--- a/산출물/통합반/이론_오프라인/06회차/통합반_오프라인_06회차.pptx
+++ b/산출물/통합반/이론_오프라인/06회차/통합반_오프라인_06회차.pptx
@@ -744,7 +744,7 @@
           </a:p>
           <a:p>
             <a:r>
-              <a:t>[다음] 스킬의 절차가 가리키는 것: 스킬 밖의 도구</a:t>
+              <a:t>[다음] 스킬의 절차가 가리키는 것</a:t>
             </a:r>
           </a:p>
         </p:txBody>
@@ -844,7 +844,7 @@
           </a:p>
           <a:p>
             <a:r>
-              <a:t>[다음] MCP: AI 애플리케이션과 외부 도구를 잇는 개방형 프로토콜</a:t>
+              <a:t>[다음] MCP</a:t>
             </a:r>
           </a:p>
         </p:txBody>
@@ -944,7 +944,7 @@
           </a:p>
           <a:p>
             <a:r>
-              <a:t>[다음] MCP의 네 구성요소: 호스트 · 클라이언트 · 서버 · 도구</a:t>
+              <a:t>[다음] MCP의 네 구성요소</a:t>
             </a:r>
           </a:p>
         </p:txBody>
@@ -1044,7 +1044,7 @@
           </a:p>
           <a:p>
             <a:r>
-              <a:t>[다음] 도구 정의 한 건: part_quotes</a:t>
+              <a:t>[다음] 도구 정의 한 건</a:t>
             </a:r>
           </a:p>
         </p:txBody>
@@ -1144,7 +1144,7 @@
           </a:p>
           <a:p>
             <a:r>
-              <a:t>[다음] 호출 한 건의 요청: 도구의 전체 이름과 입력</a:t>
+              <a:t>[다음] 호출 한 건의 요청</a:t>
             </a:r>
           </a:p>
         </p:txBody>
@@ -1244,7 +1244,7 @@
           </a:p>
           <a:p>
             <a:r>
-              <a:t>[다음] 연결 방식 두 가지: stdio와 Streamable HTTP</a:t>
+              <a:t>[다음] 연결 방식 두 가지</a:t>
             </a:r>
           </a:p>
         </p:txBody>
@@ -1794,7 +1794,7 @@
           </a:p>
           <a:p>
             <a:r>
-              <a:t>[다음] 읽는 도구와 쓰는 도구: 잘못 불렀을 때의 차이</a:t>
+              <a:t>[다음] 읽는 도구와 쓰는 도구</a:t>
             </a:r>
           </a:p>
         </p:txBody>
@@ -1884,7 +1884,7 @@
           </a:p>
           <a:p>
             <a:r>
-              <a:t>[다음] 허용 목록(Allowlist): 에이전트가 부를 수 있는 도구의 이름</a:t>
+              <a:t>[다음] 허용 목록(Allowlist)</a:t>
             </a:r>
           </a:p>
         </p:txBody>
@@ -1989,7 +1989,7 @@
           </a:p>
           <a:p>
             <a:r>
-              <a:t>[다음] 최소 권한 원칙: Principle of Least Privilege</a:t>
+              <a:t>[다음] 최소 권한 원칙</a:t>
             </a:r>
           </a:p>
         </p:txBody>
@@ -2089,7 +2089,7 @@
           </a:p>
           <a:p>
             <a:r>
-              <a:t>[다음] 파일 접근 범위: 작업 폴더 하나</a:t>
+              <a:t>[다음] 파일 접근 범위</a:t>
             </a:r>
           </a:p>
         </p:txBody>
@@ -2189,7 +2189,7 @@
           </a:p>
           <a:p>
             <a:r>
-              <a:t>[다음] 인증 비밀값: 설정에는 자리표시자, 값은 실행 직전에</a:t>
+              <a:t>[다음] 인증 비밀값</a:t>
             </a:r>
           </a:p>
         </p:txBody>
@@ -2774,7 +2774,7 @@
           </a:p>
           <a:p>
             <a:r>
-              <a:t>[다음] 에이전트 스킬: 이름을 붙여 재사용하는 업무 지침</a:t>
+              <a:t>[다음] 에이전트 스킬</a:t>
             </a:r>
           </a:p>
         </p:txBody>
@@ -2869,7 +2869,7 @@
           </a:p>
           <a:p>
             <a:r>
-              <a:t>[다음] SKILL.md 원문 ①: 머리말과 요약</a:t>
+              <a:t>[다음] SKILL.md 원문 ①</a:t>
             </a:r>
           </a:p>
         </p:txBody>
@@ -2964,7 +2964,7 @@
           </a:p>
           <a:p>
             <a:r>
-              <a:t>[다음] SKILL.md 원문 ②: 절차</a:t>
+              <a:t>[다음] SKILL.md 원문 ②</a:t>
             </a:r>
           </a:p>
         </p:txBody>
@@ -9315,7 +9315,7 @@
       </p:sp>
       <p:pic>
         <p:nvPicPr>
-          <p:cNvPr id="6" name="삽화:MCP구성.svg" descr="illust_5845380309492867527_1793113376.png"/>
+          <p:cNvPr id="6" name="삽화:MCP구성.svg" descr="illust_4034039071689383235_1793113376.png"/>
           <p:cNvPicPr>
             <a:picLocks noChangeAspect="1"/>
           </p:cNvPicPr>
@@ -11814,7 +11814,7 @@
       </p:sp>
       <p:pic>
         <p:nvPicPr>
-          <p:cNvPr id="6" name="삽화:연결방식.svg" descr="illust_849467006159466994_1793113376.png"/>
+          <p:cNvPr id="6" name="삽화:연결방식.svg" descr="illust_1036365756791865564_1793113376.png"/>
           <p:cNvPicPr>
             <a:picLocks noChangeAspect="1"/>
           </p:cNvPicPr>
@@ -28064,7 +28064,7 @@
       </p:sp>
       <p:pic>
         <p:nvPicPr>
-          <p:cNvPr id="6" name="삽화:스킬문서.svg" descr="illust_6595967764761612683_1793113376.png"/>
+          <p:cNvPr id="6" name="삽화:스킬문서.svg" descr="illust_1450096010465289401_1793113376.png"/>
           <p:cNvPicPr>
             <a:picLocks noChangeAspect="1"/>
           </p:cNvPicPr>

--- a/산출물/통합반/이론_오프라인/06회차/통합반_오프라인_06회차.pptx
+++ b/산출물/통합반/이론_오프라인/06회차/통합반_오프라인_06회차.pptx
@@ -33,6 +33,12 @@
     <p:sldId id="281" r:id="rId33"/>
     <p:sldId id="282" r:id="rId34"/>
     <p:sldId id="283" r:id="rId35"/>
+    <p:sldId id="284" r:id="rId36"/>
+    <p:sldId id="285" r:id="rId37"/>
+    <p:sldId id="286" r:id="rId38"/>
+    <p:sldId id="287" r:id="rId39"/>
+    <p:sldId id="288" r:id="rId40"/>
+    <p:sldId id="289" r:id="rId41"/>
   </p:sldIdLst>
   <p:sldSz cx="12191695" cy="6858000" type="screen4x3"/>
   <p:notesSz cx="6858000" cy="9144000"/>
@@ -534,12 +540,12 @@
           </a:p>
           <a:p>
             <a:r>
-              <a:t>· 지난 회차 에이전트는 매번 무엇을 어떤 순서로 할지 스스로 정했다 → 오늘은 그 방법을 지침으로 남기고, 쓰는 도구를 표준으로 잇는다</a:t>
-            </a:r>
-          </a:p>
-          <a:p>
-            <a:r>
-              <a:t>· 네 교시: 이론 50분 → 회의록 스킬 → 파일 · Git · 시간 도구 연결 → 내 조회 도구 구현과 조합</a:t>
+              <a:t>· 앞에서 만든 에이전트는 매번 무엇을 어떤 순서로 할지 스스로 정했다 → 오늘은 그 방법을 지침으로 남기고, 쓰는 도구를 표준으로 잇는다</a:t>
+            </a:r>
+          </a:p>
+          <a:p>
+            <a:r>
+              <a:t>· 오늘의 흐름: 이론 → 회의록 스킬 → 파일 · Git · 시간 도구 연결 → 내 조회 도구 구현과 조합</a:t>
             </a:r>
           </a:p>
           <a:p>
@@ -739,7 +745,7 @@
           </a:p>
           <a:p>
             <a:r>
-              <a:t>· 3교시에 파일 · Git · 시간 서버의 도구 목록 · 입력 · 반환값을 직접 확인한다</a:t>
+              <a:t>· 실습에서 파일 · Git · 시간 서버의 도구 목록 · 입력 · 반환값을 직접 확인한다</a:t>
             </a:r>
           </a:p>
           <a:p>
@@ -1419,7 +1425,7 @@
           </a:p>
           <a:p>
             <a:r>
-              <a:t>· 4교시에 내 조회 도구를 서버로 노출하고 외부 도구와 조합할 때 이 구분을 쓴다</a:t>
+              <a:t>· 실습에서 내 조회 도구를 서버로 노출하고 외부 도구와 조합할 때 이 구분을 쓴다</a:t>
             </a:r>
           </a:p>
           <a:p>
@@ -1594,12 +1600,12 @@
           </a:p>
           <a:p>
             <a:r>
-              <a:t>· 1 SKILL.md: 언제 · 무엇을 위해 · 무엇을 받아 · 어떤 순서로 · 무엇을 내놓나 → 2교시 회의록 스킬</a:t>
-            </a:r>
-          </a:p>
-          <a:p>
-            <a:r>
-              <a:t>· 2 MCP: 스킬이 부르는 도구는 스킬 밖 서버에 있다 → 3교시 파일 · Git · 시간 서버 연결</a:t>
+              <a:t>· 1 SKILL.md: 언제 · 무엇을 위해 · 무엇을 받아 · 어떤 순서로 · 무엇을 내놓나 → 실습의 회의록 스킬</a:t>
+            </a:r>
+          </a:p>
+          <a:p>
+            <a:r>
+              <a:t>· 2 MCP: 스킬이 부르는 도구는 스킬 밖 서버에 있다 → 실습의 파일 · Git · 시간 서버 연결</a:t>
             </a:r>
           </a:p>
           <a:p>
@@ -1789,7 +1795,7 @@
           </a:p>
           <a:p>
             <a:r>
-              <a:t>· 3교시에 파일 서버의 접근 범위를 설정하고, 접근 실패와 자료 없음을 구분해 저장한다</a:t>
+              <a:t>· 실습에서 파일 서버의 접근 범위를 설정하고, 접근 실패와 자료 없음을 구분해 저장한다</a:t>
             </a:r>
           </a:p>
           <a:p>
@@ -2394,7 +2400,7 @@
           </a:p>
           <a:p>
             <a:r>
-              <a:t>[다음] 오늘의 실습과 남길 결과</a:t>
+              <a:t>[다음] 복습</a:t>
             </a:r>
           </a:p>
         </p:txBody>
@@ -2464,37 +2470,137 @@
           <a:lstStyle/>
           <a:p>
             <a:r>
-              <a:t>[짚을 곳] 표 세 줄: 교시 → 실습 → 남길 결과, 강조한 4교시</a:t>
-            </a:r>
-          </a:p>
-          <a:p>
-            <a:r>
-              <a:t>· 2교시: 준비된 MCP의 연결과 호출 결과를 확인하고, 회의록에서 결정사항 · 담당자 · 기한 · 출처를 뽑는 SKILL.md. 담당자 · 기한이 없으면 미정으로 남는지 원문과 비교</a:t>
-            </a:r>
-          </a:p>
-          <a:p>
-            <a:r>
-              <a:t>· 3교시: 파일 · Git · 시간 서버의 실행과 접근 범위를 설정, 같은 자료의 내용 · 변경 이력 · 기준 시각을 대조해 도구마다 주는 정보를 가른다</a:t>
-            </a:r>
-          </a:p>
-          <a:p>
-            <a:r>
-              <a:t>· 4교시: 제공 서버 골격에 점검 자료 조회 함수를 구현해 도구로 노출, 파일 · Git · 시간 도구와 함께 불러 확인 결과. 다른 대상 · 없는 자료 · 조회 실패로 검증</a:t>
-            </a:r>
-          </a:p>
-          <a:p>
-            <a:r>
-              <a:t>· 기본 진행은 Notion 없이. 현장에서 Notion 연결과 자기 노트가 준비되면 4교시에 자기 노트 퀴즈(출제 → 답변 → 채점 · 해설 · 원문 근거)를 선택할 수 있다</a:t>
-            </a:r>
-          </a:p>
-          <a:p>
-            <a:r>
-              <a:t>· 진행은 실습마다 핸즈온 가이드를 따른다. 다음 회차에 점검 요청의 정보 누락과 요구 변경을 질문 · 명세 · 검증으로 다룬다</a:t>
-            </a:r>
-          </a:p>
-          <a:p>
-            <a:r>
-              <a:t>[다음] 실습으로</a:t>
+              <a:t>[짚을 곳] 2 × 2 카드, 상황(제목 · 첫 줄) → 아래 파란 줄의 답. 학생이 먼저 고르게 한다(약 15초)</a:t>
+            </a:r>
+          </a:p>
+          <a:p>
+            <a:r>
+              <a:t>· 정기 정비 경보도 같은 방법으로 → 스킬: 이름 있는 지침을 에이전트에 붙인다(프롬프트에 매번 적지 않는다)</a:t>
+            </a:r>
+          </a:p>
+          <a:p>
+            <a:r>
+              <a:t>· 부품별 단가 · 납기를 읽는 기능 → 도구: 스킬 밖 서버가 내주는 기능(part_quotes처럼), 모델은 설명과 입력 스키마를 보고 고른다</a:t>
+            </a:r>
+          </a:p>
+          <a:p>
+            <a:r>
+              <a:t>· 결과 파일 → 작업 폴더: output/result.json 한 경로, 작업 폴더 밖과 홈 디렉터리는 보지 않는다. 지시만으로는 격리가 아니다</a:t>
+            </a:r>
+          </a:p>
+          <a:p>
+            <a:r>
+              <a:t>· 토큰이 필요한 외부 서버 → 자리표시자: 값은 설정 밖, 실행 직전에 채운다</a:t>
+            </a:r>
+          </a:p>
+          <a:p>
+            <a:r>
+              <a:t>· 무엇을 어디에 둘지(방법 · 도구 · 파일의 자리 · 비밀)를 가르면 바꿀 때 무엇부터 볼지 안다</a:t>
+            </a:r>
+          </a:p>
+          <a:p>
+            <a:r>
+              <a:t>[다음] 오늘 다룬 핵심 개념과 주요 용어 정리</a:t>
+            </a:r>
+          </a:p>
+        </p:txBody>
+      </p:sp>
+      <p:sp>
+        <p:nvSpPr>
+          <p:cNvPr id="4" name="Slide Number Placeholder 3"/>
+          <p:cNvSpPr>
+            <a:spLocks noGrp="1"/>
+          </p:cNvSpPr>
+          <p:nvPr>
+            <p:ph type="sldNum" idx="5" sz="quarter"/>
+          </p:nvPr>
+        </p:nvSpPr>
+        <p:spPr/>
+      </p:sp>
+    </p:spTree>
+  </p:cSld>
+  <p:clrMapOvr>
+    <a:masterClrMapping/>
+  </p:clrMapOvr>
+</p:notes>
+</file>
+
+<file path=ppt/notesSlides/notesSlide29.xml><?xml version="1.0" encoding="utf-8"?>
+<p:notes xmlns:a="http://schemas.openxmlformats.org/drawingml/2006/main" xmlns:p="http://schemas.openxmlformats.org/presentationml/2006/main" xmlns:r="http://schemas.openxmlformats.org/officeDocument/2006/relationships">
+  <p:cSld>
+    <p:spTree>
+      <p:nvGrpSpPr>
+        <p:cNvPr id="1" name=""/>
+        <p:cNvGrpSpPr/>
+        <p:nvPr/>
+      </p:nvGrpSpPr>
+      <p:grpSpPr>
+        <a:xfrm>
+          <a:off x="0" y="0"/>
+          <a:ext cx="0" cy="0"/>
+          <a:chOff x="0" y="0"/>
+          <a:chExt cx="0" cy="0"/>
+        </a:xfrm>
+      </p:grpSpPr>
+      <p:sp>
+        <p:nvSpPr>
+          <p:cNvPr id="2" name="Slide Image Placeholder 1"/>
+          <p:cNvSpPr>
+            <a:spLocks noGrp="1"/>
+          </p:cNvSpPr>
+          <p:nvPr>
+            <p:ph type="sldImg" idx="2"/>
+          </p:nvPr>
+        </p:nvSpPr>
+        <p:spPr/>
+      </p:sp>
+      <p:sp>
+        <p:nvSpPr>
+          <p:cNvPr id="3" name="Notes Placeholder 2"/>
+          <p:cNvSpPr>
+            <a:spLocks noGrp="1"/>
+          </p:cNvSpPr>
+          <p:nvPr>
+            <p:ph type="body" idx="3" sz="quarter"/>
+          </p:nvPr>
+        </p:nvSpPr>
+        <p:spPr/>
+        <p:txBody>
+          <a:bodyPr/>
+          <a:lstStyle/>
+          <a:p>
+            <a:r>
+              <a:t>[짚을 곳] 표 아홉 줄 위에서부터</a:t>
+            </a:r>
+          </a:p>
+          <a:p>
+            <a:r>
+              <a:t>· 에이전트 스킬(Agent Skill): 업무 지침과 자료를 이름 있는 묶음으로 관리해 다시 쓰는 방법. MCP: AI 애플리케이션이 외부 도구 · 데이터에 연결하는 방식을 정한 개방형 프로토콜</a:t>
+            </a:r>
+          </a:p>
+          <a:p>
+            <a:r>
+              <a:t>· 호스트 · 클라이언트: 모델을 가진 애플리케이션, 그 안에서 서버 하나와 연결을 유지하는 구성요소. 서버 · 도구: 기능을 내주는 프로그램, 호출할 수 있는 기능</a:t>
+            </a:r>
+          </a:p>
+          <a:p>
+            <a:r>
+              <a:t>· 입력 스키마(JSON Schema): 넘길 값의 이름과 형</a:t>
+            </a:r>
+          </a:p>
+          <a:p>
+            <a:r>
+              <a:t>· stdio · Streamable HTTP: 하위 프로세스의 표준 입출력/HTTP 요청</a:t>
+            </a:r>
+          </a:p>
+          <a:p>
+            <a:r>
+              <a:t>· readOnlyHint: 서버가 스스로 다는 읽기 전용 표시. 최소 권한 원칙: 필요한 권한만. 자리표시자: 비밀값 대신 적는 이름과 자리</a:t>
+            </a:r>
+          </a:p>
+          <a:p>
+            <a:r>
+              <a:t>[다음] Review Quiz</a:t>
             </a:r>
           </a:p>
         </p:txBody>
@@ -2614,6 +2720,481 @@
 </p:notes>
 </file>
 
+<file path=ppt/notesSlides/notesSlide30.xml><?xml version="1.0" encoding="utf-8"?>
+<p:notes xmlns:a="http://schemas.openxmlformats.org/drawingml/2006/main" xmlns:p="http://schemas.openxmlformats.org/presentationml/2006/main" xmlns:r="http://schemas.openxmlformats.org/officeDocument/2006/relationships">
+  <p:cSld>
+    <p:spTree>
+      <p:nvGrpSpPr>
+        <p:cNvPr id="1" name=""/>
+        <p:cNvGrpSpPr/>
+        <p:nvPr/>
+      </p:nvGrpSpPr>
+      <p:grpSpPr>
+        <a:xfrm>
+          <a:off x="0" y="0"/>
+          <a:ext cx="0" cy="0"/>
+          <a:chOff x="0" y="0"/>
+          <a:chExt cx="0" cy="0"/>
+        </a:xfrm>
+      </p:grpSpPr>
+      <p:sp>
+        <p:nvSpPr>
+          <p:cNvPr id="2" name="Slide Image Placeholder 1"/>
+          <p:cNvSpPr>
+            <a:spLocks noGrp="1"/>
+          </p:cNvSpPr>
+          <p:nvPr>
+            <p:ph type="sldImg" idx="2"/>
+          </p:nvPr>
+        </p:nvSpPr>
+        <p:spPr/>
+      </p:sp>
+      <p:sp>
+        <p:nvSpPr>
+          <p:cNvPr id="3" name="Notes Placeholder 2"/>
+          <p:cNvSpPr>
+            <a:spLocks noGrp="1"/>
+          </p:cNvSpPr>
+          <p:nvPr>
+            <p:ph type="body" idx="3" sz="quarter"/>
+          </p:nvPr>
+        </p:nvSpPr>
+        <p:spPr/>
+        <p:txBody>
+          <a:bodyPr/>
+          <a:lstStyle/>
+          <a:p>
+            <a:r>
+              <a:t>[짚을 곳] 간지 제목 → 부제</a:t>
+            </a:r>
+          </a:p>
+          <a:p>
+            <a:r>
+              <a:t>· 퀴즈 세 문제. 문항마다 먼저 가린다: 문제가 스킬에 있나, 연결에 있나, 응답 처리에 있나</a:t>
+            </a:r>
+          </a:p>
+          <a:p>
+            <a:r>
+              <a:t>· 정답과 까닭은 세 문제 뒤에 함께</a:t>
+            </a:r>
+          </a:p>
+          <a:p>
+            <a:r>
+              <a:t>[다음] Quiz 1. 스킬에 적힌 조회가 실행되지 않은 까닭</a:t>
+            </a:r>
+          </a:p>
+        </p:txBody>
+      </p:sp>
+      <p:sp>
+        <p:nvSpPr>
+          <p:cNvPr id="4" name="Slide Number Placeholder 3"/>
+          <p:cNvSpPr>
+            <a:spLocks noGrp="1"/>
+          </p:cNvSpPr>
+          <p:nvPr>
+            <p:ph type="sldNum" idx="5" sz="quarter"/>
+          </p:nvPr>
+        </p:nvSpPr>
+        <p:spPr/>
+      </p:sp>
+    </p:spTree>
+  </p:cSld>
+  <p:clrMapOvr>
+    <a:masterClrMapping/>
+  </p:clrMapOvr>
+</p:notes>
+</file>
+
+<file path=ppt/notesSlides/notesSlide31.xml><?xml version="1.0" encoding="utf-8"?>
+<p:notes xmlns:a="http://schemas.openxmlformats.org/drawingml/2006/main" xmlns:p="http://schemas.openxmlformats.org/presentationml/2006/main" xmlns:r="http://schemas.openxmlformats.org/officeDocument/2006/relationships">
+  <p:cSld>
+    <p:spTree>
+      <p:nvGrpSpPr>
+        <p:cNvPr id="1" name=""/>
+        <p:cNvGrpSpPr/>
+        <p:nvPr/>
+      </p:nvGrpSpPr>
+      <p:grpSpPr>
+        <a:xfrm>
+          <a:off x="0" y="0"/>
+          <a:ext cx="0" cy="0"/>
+          <a:chOff x="0" y="0"/>
+          <a:chExt cx="0" cy="0"/>
+        </a:xfrm>
+      </p:grpSpPr>
+      <p:sp>
+        <p:nvSpPr>
+          <p:cNvPr id="2" name="Slide Image Placeholder 1"/>
+          <p:cNvSpPr>
+            <a:spLocks noGrp="1"/>
+          </p:cNvSpPr>
+          <p:nvPr>
+            <p:ph type="sldImg" idx="2"/>
+          </p:nvPr>
+        </p:nvSpPr>
+        <p:spPr/>
+      </p:sp>
+      <p:sp>
+        <p:nvSpPr>
+          <p:cNvPr id="3" name="Notes Placeholder 2"/>
+          <p:cNvSpPr>
+            <a:spLocks noGrp="1"/>
+          </p:cNvSpPr>
+          <p:nvPr>
+            <p:ph type="body" idx="3" sz="quarter"/>
+          </p:nvPr>
+        </p:nvSpPr>
+        <p:spPr/>
+        <p:txBody>
+          <a:bodyPr/>
+          <a:lstStyle/>
+          <a:p>
+            <a:r>
+              <a:t>[짚을 곳] 위 상황 → 물음 → 보기 넷</a:t>
+            </a:r>
+          </a:p>
+          <a:p>
+            <a:r>
+              <a:t>· 상황: 스킬에 생산 오더 조회(mes_orders) 단계가 있는데 값을 못 받았다. 연결된 서버는 neo4j와 hyd-dmn뿐</a:t>
+            </a:r>
+          </a:p>
+          <a:p>
+            <a:r>
+              <a:t>· 물음: 먼저 고칠 곳은?</a:t>
+            </a:r>
+          </a:p>
+          <a:p>
+            <a:r>
+              <a:t>· 생각할 거리: 빠진 것이 방법(스킬)인가 연결(서버)인가</a:t>
+            </a:r>
+          </a:p>
+          <a:p>
+            <a:r>
+              <a:t>· 약 20초</a:t>
+            </a:r>
+          </a:p>
+          <a:p>
+            <a:r>
+              <a:t>[다음] Quiz 2. 시간을 넘긴 재고 조회</a:t>
+            </a:r>
+          </a:p>
+        </p:txBody>
+      </p:sp>
+      <p:sp>
+        <p:nvSpPr>
+          <p:cNvPr id="4" name="Slide Number Placeholder 3"/>
+          <p:cNvSpPr>
+            <a:spLocks noGrp="1"/>
+          </p:cNvSpPr>
+          <p:nvPr>
+            <p:ph type="sldNum" idx="5" sz="quarter"/>
+          </p:nvPr>
+        </p:nvSpPr>
+        <p:spPr/>
+      </p:sp>
+    </p:spTree>
+  </p:cSld>
+  <p:clrMapOvr>
+    <a:masterClrMapping/>
+  </p:clrMapOvr>
+</p:notes>
+</file>
+
+<file path=ppt/notesSlides/notesSlide32.xml><?xml version="1.0" encoding="utf-8"?>
+<p:notes xmlns:a="http://schemas.openxmlformats.org/drawingml/2006/main" xmlns:p="http://schemas.openxmlformats.org/presentationml/2006/main" xmlns:r="http://schemas.openxmlformats.org/officeDocument/2006/relationships">
+  <p:cSld>
+    <p:spTree>
+      <p:nvGrpSpPr>
+        <p:cNvPr id="1" name=""/>
+        <p:cNvGrpSpPr/>
+        <p:nvPr/>
+      </p:nvGrpSpPr>
+      <p:grpSpPr>
+        <a:xfrm>
+          <a:off x="0" y="0"/>
+          <a:ext cx="0" cy="0"/>
+          <a:chOff x="0" y="0"/>
+          <a:chExt cx="0" cy="0"/>
+        </a:xfrm>
+      </p:grpSpPr>
+      <p:sp>
+        <p:nvSpPr>
+          <p:cNvPr id="2" name="Slide Image Placeholder 1"/>
+          <p:cNvSpPr>
+            <a:spLocks noGrp="1"/>
+          </p:cNvSpPr>
+          <p:nvPr>
+            <p:ph type="sldImg" idx="2"/>
+          </p:nvPr>
+        </p:nvSpPr>
+        <p:spPr/>
+      </p:sp>
+      <p:sp>
+        <p:nvSpPr>
+          <p:cNvPr id="3" name="Notes Placeholder 2"/>
+          <p:cNvSpPr>
+            <a:spLocks noGrp="1"/>
+          </p:cNvSpPr>
+          <p:nvPr>
+            <p:ph type="body" idx="3" sz="quarter"/>
+          </p:nvPr>
+        </p:nvSpPr>
+        <p:spPr/>
+        <p:txBody>
+          <a:bodyPr/>
+          <a:lstStyle/>
+          <a:p>
+            <a:r>
+              <a:t>[짚을 곳] 위 상황 → 물음 → 보기 넷</a:t>
+            </a:r>
+          </a:p>
+          <a:p>
+            <a:r>
+              <a:t>· 상황: 예비품 재고 조회가 제한 시간 안에 끝나지 않아 포털이 시간 초과로 결과를 못 받았다고 알림</a:t>
+            </a:r>
+          </a:p>
+          <a:p>
+            <a:r>
+              <a:t>· 물음: 결과에 적을 내용은?</a:t>
+            </a:r>
+          </a:p>
+          <a:p>
+            <a:r>
+              <a:t>· 생각할 거리: 실패한 조회가 재고에 대해 알려 준 것과 알려 주지 않은 것</a:t>
+            </a:r>
+          </a:p>
+          <a:p>
+            <a:r>
+              <a:t>· 약 20초</a:t>
+            </a:r>
+          </a:p>
+          <a:p>
+            <a:r>
+              <a:t>[다음] Quiz 3. 정비 에이전트에 붙일 서버</a:t>
+            </a:r>
+          </a:p>
+        </p:txBody>
+      </p:sp>
+      <p:sp>
+        <p:nvSpPr>
+          <p:cNvPr id="4" name="Slide Number Placeholder 3"/>
+          <p:cNvSpPr>
+            <a:spLocks noGrp="1"/>
+          </p:cNvSpPr>
+          <p:nvPr>
+            <p:ph type="sldNum" idx="5" sz="quarter"/>
+          </p:nvPr>
+        </p:nvSpPr>
+        <p:spPr/>
+      </p:sp>
+    </p:spTree>
+  </p:cSld>
+  <p:clrMapOvr>
+    <a:masterClrMapping/>
+  </p:clrMapOvr>
+</p:notes>
+</file>
+
+<file path=ppt/notesSlides/notesSlide33.xml><?xml version="1.0" encoding="utf-8"?>
+<p:notes xmlns:a="http://schemas.openxmlformats.org/drawingml/2006/main" xmlns:p="http://schemas.openxmlformats.org/presentationml/2006/main" xmlns:r="http://schemas.openxmlformats.org/officeDocument/2006/relationships">
+  <p:cSld>
+    <p:spTree>
+      <p:nvGrpSpPr>
+        <p:cNvPr id="1" name=""/>
+        <p:cNvGrpSpPr/>
+        <p:nvPr/>
+      </p:nvGrpSpPr>
+      <p:grpSpPr>
+        <a:xfrm>
+          <a:off x="0" y="0"/>
+          <a:ext cx="0" cy="0"/>
+          <a:chOff x="0" y="0"/>
+          <a:chExt cx="0" cy="0"/>
+        </a:xfrm>
+      </p:grpSpPr>
+      <p:sp>
+        <p:nvSpPr>
+          <p:cNvPr id="2" name="Slide Image Placeholder 1"/>
+          <p:cNvSpPr>
+            <a:spLocks noGrp="1"/>
+          </p:cNvSpPr>
+          <p:nvPr>
+            <p:ph type="sldImg" idx="2"/>
+          </p:nvPr>
+        </p:nvSpPr>
+        <p:spPr/>
+      </p:sp>
+      <p:sp>
+        <p:nvSpPr>
+          <p:cNvPr id="3" name="Notes Placeholder 2"/>
+          <p:cNvSpPr>
+            <a:spLocks noGrp="1"/>
+          </p:cNvSpPr>
+          <p:nvPr>
+            <p:ph type="body" idx="3" sz="quarter"/>
+          </p:nvPr>
+        </p:nvSpPr>
+        <p:spPr/>
+        <p:txBody>
+          <a:bodyPr/>
+          <a:lstStyle/>
+          <a:p>
+            <a:r>
+              <a:t>[짚을 곳] 위 상황 → 물음 → 보기 넷</a:t>
+            </a:r>
+          </a:p>
+          <a:p>
+            <a:r>
+              <a:t>· 상황: 정기 정비 계획 에이전트는 enterprise-maint만 연결돼 있다. 견적도 보게 구매용 서버를 붙이자는 제안, 그런데 이 에이전트의 일에는 견적이 쓰이지 않는다</a:t>
+            </a:r>
+          </a:p>
+          <a:p>
+            <a:r>
+              <a:t>· 물음: 최소 권한 원칙에 맞는 판단은?</a:t>
+            </a:r>
+          </a:p>
+          <a:p>
+            <a:r>
+              <a:t>· 생각할 거리: 읽기 도구라면 연결해도 괜찮은가</a:t>
+            </a:r>
+          </a:p>
+          <a:p>
+            <a:r>
+              <a:t>· 약 20초</a:t>
+            </a:r>
+          </a:p>
+          <a:p>
+            <a:r>
+              <a:t>[다음] 정답과 판단 기준</a:t>
+            </a:r>
+          </a:p>
+        </p:txBody>
+      </p:sp>
+      <p:sp>
+        <p:nvSpPr>
+          <p:cNvPr id="4" name="Slide Number Placeholder 3"/>
+          <p:cNvSpPr>
+            <a:spLocks noGrp="1"/>
+          </p:cNvSpPr>
+          <p:nvPr>
+            <p:ph type="sldNum" idx="5" sz="quarter"/>
+          </p:nvPr>
+        </p:nvSpPr>
+        <p:spPr/>
+      </p:sp>
+    </p:spTree>
+  </p:cSld>
+  <p:clrMapOvr>
+    <a:masterClrMapping/>
+  </p:clrMapOvr>
+</p:notes>
+</file>
+
+<file path=ppt/notesSlides/notesSlide34.xml><?xml version="1.0" encoding="utf-8"?>
+<p:notes xmlns:a="http://schemas.openxmlformats.org/drawingml/2006/main" xmlns:p="http://schemas.openxmlformats.org/presentationml/2006/main" xmlns:r="http://schemas.openxmlformats.org/officeDocument/2006/relationships">
+  <p:cSld>
+    <p:spTree>
+      <p:nvGrpSpPr>
+        <p:cNvPr id="1" name=""/>
+        <p:cNvGrpSpPr/>
+        <p:nvPr/>
+      </p:nvGrpSpPr>
+      <p:grpSpPr>
+        <a:xfrm>
+          <a:off x="0" y="0"/>
+          <a:ext cx="0" cy="0"/>
+          <a:chOff x="0" y="0"/>
+          <a:chExt cx="0" cy="0"/>
+        </a:xfrm>
+      </p:grpSpPr>
+      <p:sp>
+        <p:nvSpPr>
+          <p:cNvPr id="2" name="Slide Image Placeholder 1"/>
+          <p:cNvSpPr>
+            <a:spLocks noGrp="1"/>
+          </p:cNvSpPr>
+          <p:nvPr>
+            <p:ph type="sldImg" idx="2"/>
+          </p:nvPr>
+        </p:nvSpPr>
+        <p:spPr/>
+      </p:sp>
+      <p:sp>
+        <p:nvSpPr>
+          <p:cNvPr id="3" name="Notes Placeholder 2"/>
+          <p:cNvSpPr>
+            <a:spLocks noGrp="1"/>
+          </p:cNvSpPr>
+          <p:nvPr>
+            <p:ph type="body" idx="3" sz="quarter"/>
+          </p:nvPr>
+        </p:nvSpPr>
+        <p:spPr/>
+        <p:txBody>
+          <a:bodyPr/>
+          <a:lstStyle/>
+          <a:p>
+            <a:r>
+              <a:t>[짚을 곳] 표 세 줄 위에서부터, 판단 기준 → 정답</a:t>
+            </a:r>
+          </a:p>
+          <a:p>
+            <a:r>
+              <a:t>· Quiz 1 정답 2번(업무 DB 서버 enterprise 연결): 스킬에 방법은 있고 빠진 것은 실행할 연결. 연결 뒤 호출 권한 · 입력 확인. 오답 1 · 3은 스킬을 고쳐 연결을 못 채우고, 4는 남은 도구까지 줄인다</a:t>
+            </a:r>
+          </a:p>
+          <a:p>
+            <a:r>
+              <a:t>· Quiz 2 정답 4번(조회 실패로 확인 못 함): 실패는 재고가 없다는 게 아니라 모른다는 것만 알려 준다. 오답 1 모르는 것을 없는 것으로, 2 지난 값을 지금 값처럼, 3 확인 못 한 사실까지 삭제</a:t>
+            </a:r>
+          </a:p>
+          <a:p>
+            <a:r>
+              <a:t>· Quiz 3 정답 1번(연결하지 않음): 쓰이지 않는 읽기 도구도 주지 않아야 잘못 판단해도 닿는 곳이 좁다. 오답 2는 읽기 표시를 연결할 까닭으로 본 혼동(읽기에도 노출 위험), 3은 지시를 권한으로 본 혼동, 4는 정비 · 구매로 나눈 까닭을 되돌린다</a:t>
+            </a:r>
+          </a:p>
+          <a:p>
+            <a:r>
+              <a:t>· 이어지는 실습: 준비된 MCP의 연결과 호출 결과를 확인하고, 회의록에서 결정사항 · 담당자 · 기한 · 출처를 뽑는 SKILL.md를 쓴다. 담당자 · 기한이 없으면 미정으로 남는지 원문과 비교한다</a:t>
+            </a:r>
+          </a:p>
+          <a:p>
+            <a:r>
+              <a:t>· 파일 · Git · 시간 서버의 접근 범위를 설정해 같은 자료의 내용 · 변경 이력 · 기준 시각을 대조하고, 점검 자료 조회 함수를 도구로 노출해 함께 불러 다른 대상 · 없는 자료 · 조회 실패로 검증한다. 기본 진행은 Notion 없이 하고, 준비되면 자기 노트 퀴즈를 고를 수 있다 — 진행은 핸즈온 가이드</a:t>
+            </a:r>
+          </a:p>
+          <a:p>
+            <a:r>
+              <a:t>· 다음 회차: 점검 요청의 정보 누락과 요구 변경을 질문 · 명세 · 검증으로 다룬다</a:t>
+            </a:r>
+          </a:p>
+          <a:p>
+            <a:r>
+              <a:t>[다음] 실습으로</a:t>
+            </a:r>
+          </a:p>
+        </p:txBody>
+      </p:sp>
+      <p:sp>
+        <p:nvSpPr>
+          <p:cNvPr id="4" name="Slide Number Placeholder 3"/>
+          <p:cNvSpPr>
+            <a:spLocks noGrp="1"/>
+          </p:cNvSpPr>
+          <p:nvPr>
+            <p:ph type="sldNum" idx="5" sz="quarter"/>
+          </p:nvPr>
+        </p:nvSpPr>
+        <p:spPr/>
+      </p:sp>
+    </p:spTree>
+  </p:cSld>
+  <p:clrMapOvr>
+    <a:masterClrMapping/>
+  </p:clrMapOvr>
+</p:notes>
+</file>
+
 <file path=ppt/notesSlides/notesSlide4.xml><?xml version="1.0" encoding="utf-8"?>
 <p:notes xmlns:a="http://schemas.openxmlformats.org/drawingml/2006/main" xmlns:p="http://schemas.openxmlformats.org/presentationml/2006/main" xmlns:r="http://schemas.openxmlformats.org/officeDocument/2006/relationships">
   <p:cSld>
@@ -2669,7 +3250,7 @@
           </a:p>
           <a:p>
             <a:r>
-              <a:t>· 실제 SKILL.md 원문의 머리말 · 절차 · 결과 절을 읽고 여섯 가지로 정리 → 2교시에 회의록 스킬을 직접 쓴다</a:t>
+              <a:t>· 실제 SKILL.md 원문의 머리말 · 절차 · 결과 절을 읽고 여섯 가지로 정리 → 실습에서 회의록 스킬을 직접 쓴다</a:t>
             </a:r>
           </a:p>
           <a:p>
@@ -9315,7 +9896,7 @@
       </p:sp>
       <p:pic>
         <p:nvPicPr>
-          <p:cNvPr id="6" name="삽화:MCP구성.svg" descr="illust_4034039071689383235_1793113376.png"/>
+          <p:cNvPr id="6" name="삽화:MCP구성.svg" descr="illust_8441336952955069056_1793113376.png"/>
           <p:cNvPicPr>
             <a:picLocks noChangeAspect="1"/>
           </p:cNvPicPr>
@@ -11814,7 +12395,7 @@
       </p:sp>
       <p:pic>
         <p:nvPicPr>
-          <p:cNvPr id="6" name="삽화:연결방식.svg" descr="illust_1036365756791865564_1793113376.png"/>
+          <p:cNvPr id="6" name="삽화:연결방식.svg" descr="illust_7798489136438685061_1793113376.png"/>
           <p:cNvPicPr>
             <a:picLocks noChangeAspect="1"/>
           </p:cNvPicPr>
@@ -20732,7 +21313,7 @@
                 <a:ea typeface="맑은 고딕"/>
                 <a:cs typeface="맑은 고딕"/>
               </a:rPr>
-              <a:t>오늘의 실습과 남길 결과</a:t>
+              <a:t>복습: 무엇을 어디에 둘 것인가</a:t>
             </a:r>
           </a:p>
         </p:txBody>
@@ -20771,7 +21352,7 @@
                 <a:ea typeface="맑은 고딕"/>
                 <a:cs typeface="맑은 고딕"/>
               </a:rPr>
-              <a:t>이론 뒤 세 교시는 회의록 스킬을 쓰고, 파일 · Git · 시간 도구를 연결한 뒤, 내 조회 도구를 만들어 조합한다.</a:t>
+              <a:t>다룰 것이 방법인지, 도구의 기능인지, 파일의 자리인지, 비밀값인지에 따라 먼저 볼 자리가 다르다.</a:t>
             </a:r>
           </a:p>
         </p:txBody>
@@ -20852,7 +21433,779 @@
         </p:nvSpPr>
         <p:spPr>
           <a:xfrm>
-            <a:off x="548640" y="2418587"/>
+            <a:off x="548640" y="1691640"/>
+            <a:ext cx="5422392" cy="2103120"/>
+          </a:xfrm>
+          <a:prstGeom prst="roundRect">
+            <a:avLst>
+              <a:gd name="adj" fmla="val 6000"/>
+            </a:avLst>
+          </a:prstGeom>
+          <a:solidFill>
+            <a:srgbClr val="FFFFFF"/>
+          </a:solidFill>
+          <a:ln w="15875">
+            <a:solidFill>
+              <a:srgbClr val="D3D9E1"/>
+            </a:solidFill>
+          </a:ln>
+        </p:spPr>
+        <p:txBody>
+          <a:bodyPr rtlCol="0" anchor="ctr"/>
+          <a:lstStyle/>
+          <a:p>
+            <a:pPr algn="ctr"/>
+          </a:p>
+        </p:txBody>
+      </p:sp>
+      <p:sp>
+        <p:nvSpPr>
+          <p:cNvPr id="7" name="TextBox 6"/>
+          <p:cNvSpPr txBox="1"/>
+          <p:nvPr/>
+        </p:nvSpPr>
+        <p:spPr>
+          <a:xfrm>
+            <a:off x="758952" y="1856232"/>
+            <a:ext cx="5001768" cy="438912"/>
+          </a:xfrm>
+          <a:prstGeom prst="rect">
+            <a:avLst/>
+          </a:prstGeom>
+          <a:noFill/>
+        </p:spPr>
+        <p:txBody>
+          <a:bodyPr wrap="square" anchor="t"/>
+          <a:lstStyle/>
+          <a:p>
+            <a:pPr algn="l" eaLnBrk="0">
+              <a:lnSpc>
+                <a:spcPct val="110000"/>
+              </a:lnSpc>
+            </a:pPr>
+            <a:r>
+              <a:rPr sz="1800" b="1">
+                <a:solidFill>
+                  <a:srgbClr val="13294B"/>
+                </a:solidFill>
+                <a:latin typeface="맑은 고딕"/>
+                <a:ea typeface="맑은 고딕"/>
+                <a:cs typeface="맑은 고딕"/>
+              </a:rPr>
+              <a:t>반복되는 경보의 처리 방법</a:t>
+            </a:r>
+          </a:p>
+        </p:txBody>
+      </p:sp>
+      <p:sp>
+        <p:nvSpPr>
+          <p:cNvPr id="8" name="TextBox 7"/>
+          <p:cNvSpPr txBox="1"/>
+          <p:nvPr/>
+        </p:nvSpPr>
+        <p:spPr>
+          <a:xfrm>
+            <a:off x="758952" y="2386584"/>
+            <a:ext cx="5001768" cy="502920"/>
+          </a:xfrm>
+          <a:prstGeom prst="rect">
+            <a:avLst/>
+          </a:prstGeom>
+          <a:noFill/>
+        </p:spPr>
+        <p:txBody>
+          <a:bodyPr wrap="square" anchor="t"/>
+          <a:lstStyle/>
+          <a:p>
+            <a:pPr algn="l" eaLnBrk="0">
+              <a:lnSpc>
+                <a:spcPct val="110000"/>
+              </a:lnSpc>
+            </a:pPr>
+            <a:r>
+              <a:rPr sz="1700" b="0">
+                <a:solidFill>
+                  <a:srgbClr val="13294B"/>
+                </a:solidFill>
+                <a:latin typeface="맑은 고딕"/>
+                <a:ea typeface="맑은 고딕"/>
+                <a:cs typeface="맑은 고딕"/>
+              </a:rPr>
+              <a:t>정기 정비 경보도 같은 방법으로 처리한다</a:t>
+            </a:r>
+          </a:p>
+        </p:txBody>
+      </p:sp>
+      <p:sp>
+        <p:nvSpPr>
+          <p:cNvPr id="9" name="TextBox 8"/>
+          <p:cNvSpPr txBox="1"/>
+          <p:nvPr/>
+        </p:nvSpPr>
+        <p:spPr>
+          <a:xfrm>
+            <a:off x="758952" y="2935224"/>
+            <a:ext cx="5001768" cy="411480"/>
+          </a:xfrm>
+          <a:prstGeom prst="rect">
+            <a:avLst/>
+          </a:prstGeom>
+          <a:noFill/>
+        </p:spPr>
+        <p:txBody>
+          <a:bodyPr wrap="square" anchor="t"/>
+          <a:lstStyle/>
+          <a:p>
+            <a:pPr algn="l" eaLnBrk="0">
+              <a:lnSpc>
+                <a:spcPct val="110000"/>
+              </a:lnSpc>
+            </a:pPr>
+            <a:r>
+              <a:rPr sz="1600" b="1">
+                <a:solidFill>
+                  <a:srgbClr val="1A6FC4"/>
+                </a:solidFill>
+                <a:latin typeface="맑은 고딕"/>
+                <a:ea typeface="맑은 고딕"/>
+                <a:cs typeface="맑은 고딕"/>
+              </a:rPr>
+              <a:t>스킬: 이름 있는 지침을 에이전트에 붙인다</a:t>
+            </a:r>
+          </a:p>
+        </p:txBody>
+      </p:sp>
+      <p:sp>
+        <p:nvSpPr>
+          <p:cNvPr id="10" name="Rounded Rectangle 9"/>
+          <p:cNvSpPr/>
+          <p:nvPr/>
+        </p:nvSpPr>
+        <p:spPr>
+          <a:xfrm>
+            <a:off x="6217920" y="1691640"/>
+            <a:ext cx="5422392" cy="2103120"/>
+          </a:xfrm>
+          <a:prstGeom prst="roundRect">
+            <a:avLst>
+              <a:gd name="adj" fmla="val 6000"/>
+            </a:avLst>
+          </a:prstGeom>
+          <a:solidFill>
+            <a:srgbClr val="FFFFFF"/>
+          </a:solidFill>
+          <a:ln w="15875">
+            <a:solidFill>
+              <a:srgbClr val="D3D9E1"/>
+            </a:solidFill>
+          </a:ln>
+        </p:spPr>
+        <p:txBody>
+          <a:bodyPr rtlCol="0" anchor="ctr"/>
+          <a:lstStyle/>
+          <a:p>
+            <a:pPr algn="ctr"/>
+          </a:p>
+        </p:txBody>
+      </p:sp>
+      <p:sp>
+        <p:nvSpPr>
+          <p:cNvPr id="11" name="TextBox 10"/>
+          <p:cNvSpPr txBox="1"/>
+          <p:nvPr/>
+        </p:nvSpPr>
+        <p:spPr>
+          <a:xfrm>
+            <a:off x="6428232" y="1856232"/>
+            <a:ext cx="5001768" cy="438912"/>
+          </a:xfrm>
+          <a:prstGeom prst="rect">
+            <a:avLst/>
+          </a:prstGeom>
+          <a:noFill/>
+        </p:spPr>
+        <p:txBody>
+          <a:bodyPr wrap="square" anchor="t"/>
+          <a:lstStyle/>
+          <a:p>
+            <a:pPr algn="l" eaLnBrk="0">
+              <a:lnSpc>
+                <a:spcPct val="110000"/>
+              </a:lnSpc>
+            </a:pPr>
+            <a:r>
+              <a:rPr sz="1800" b="1">
+                <a:solidFill>
+                  <a:srgbClr val="13294B"/>
+                </a:solidFill>
+                <a:latin typeface="맑은 고딕"/>
+                <a:ea typeface="맑은 고딕"/>
+                <a:cs typeface="맑은 고딕"/>
+              </a:rPr>
+              <a:t>부품 견적을 읽는 기능</a:t>
+            </a:r>
+          </a:p>
+        </p:txBody>
+      </p:sp>
+      <p:sp>
+        <p:nvSpPr>
+          <p:cNvPr id="12" name="TextBox 11"/>
+          <p:cNvSpPr txBox="1"/>
+          <p:nvPr/>
+        </p:nvSpPr>
+        <p:spPr>
+          <a:xfrm>
+            <a:off x="6428232" y="2386584"/>
+            <a:ext cx="5001768" cy="502920"/>
+          </a:xfrm>
+          <a:prstGeom prst="rect">
+            <a:avLst/>
+          </a:prstGeom>
+          <a:noFill/>
+        </p:spPr>
+        <p:txBody>
+          <a:bodyPr wrap="square" anchor="t"/>
+          <a:lstStyle/>
+          <a:p>
+            <a:pPr algn="l" eaLnBrk="0">
+              <a:lnSpc>
+                <a:spcPct val="110000"/>
+              </a:lnSpc>
+            </a:pPr>
+            <a:r>
+              <a:rPr sz="1700" b="0">
+                <a:solidFill>
+                  <a:srgbClr val="13294B"/>
+                </a:solidFill>
+                <a:latin typeface="맑은 고딕"/>
+                <a:ea typeface="맑은 고딕"/>
+                <a:cs typeface="맑은 고딕"/>
+              </a:rPr>
+              <a:t>부품별 단가 · 납기를 읽어야 한다</a:t>
+            </a:r>
+          </a:p>
+        </p:txBody>
+      </p:sp>
+      <p:sp>
+        <p:nvSpPr>
+          <p:cNvPr id="13" name="TextBox 12"/>
+          <p:cNvSpPr txBox="1"/>
+          <p:nvPr/>
+        </p:nvSpPr>
+        <p:spPr>
+          <a:xfrm>
+            <a:off x="6428232" y="2935224"/>
+            <a:ext cx="5001768" cy="411480"/>
+          </a:xfrm>
+          <a:prstGeom prst="rect">
+            <a:avLst/>
+          </a:prstGeom>
+          <a:noFill/>
+        </p:spPr>
+        <p:txBody>
+          <a:bodyPr wrap="square" anchor="t"/>
+          <a:lstStyle/>
+          <a:p>
+            <a:pPr algn="l" eaLnBrk="0">
+              <a:lnSpc>
+                <a:spcPct val="110000"/>
+              </a:lnSpc>
+            </a:pPr>
+            <a:r>
+              <a:rPr sz="1600" b="1">
+                <a:solidFill>
+                  <a:srgbClr val="1A6FC4"/>
+                </a:solidFill>
+                <a:latin typeface="맑은 고딕"/>
+                <a:ea typeface="맑은 고딕"/>
+                <a:cs typeface="맑은 고딕"/>
+              </a:rPr>
+              <a:t>도구: 서버가 내주고 설명과 입력 스키마로 고른다</a:t>
+            </a:r>
+          </a:p>
+        </p:txBody>
+      </p:sp>
+      <p:sp>
+        <p:nvSpPr>
+          <p:cNvPr id="14" name="Rounded Rectangle 13"/>
+          <p:cNvSpPr/>
+          <p:nvPr/>
+        </p:nvSpPr>
+        <p:spPr>
+          <a:xfrm>
+            <a:off x="548640" y="4023360"/>
+            <a:ext cx="5422392" cy="2103120"/>
+          </a:xfrm>
+          <a:prstGeom prst="roundRect">
+            <a:avLst>
+              <a:gd name="adj" fmla="val 6000"/>
+            </a:avLst>
+          </a:prstGeom>
+          <a:solidFill>
+            <a:srgbClr val="FFFFFF"/>
+          </a:solidFill>
+          <a:ln w="15875">
+            <a:solidFill>
+              <a:srgbClr val="D3D9E1"/>
+            </a:solidFill>
+          </a:ln>
+        </p:spPr>
+        <p:txBody>
+          <a:bodyPr rtlCol="0" anchor="ctr"/>
+          <a:lstStyle/>
+          <a:p>
+            <a:pPr algn="ctr"/>
+          </a:p>
+        </p:txBody>
+      </p:sp>
+      <p:sp>
+        <p:nvSpPr>
+          <p:cNvPr id="15" name="TextBox 14"/>
+          <p:cNvSpPr txBox="1"/>
+          <p:nvPr/>
+        </p:nvSpPr>
+        <p:spPr>
+          <a:xfrm>
+            <a:off x="758952" y="4187952"/>
+            <a:ext cx="5001768" cy="438912"/>
+          </a:xfrm>
+          <a:prstGeom prst="rect">
+            <a:avLst/>
+          </a:prstGeom>
+          <a:noFill/>
+        </p:spPr>
+        <p:txBody>
+          <a:bodyPr wrap="square" anchor="t"/>
+          <a:lstStyle/>
+          <a:p>
+            <a:pPr algn="l" eaLnBrk="0">
+              <a:lnSpc>
+                <a:spcPct val="110000"/>
+              </a:lnSpc>
+            </a:pPr>
+            <a:r>
+              <a:rPr sz="1800" b="1">
+                <a:solidFill>
+                  <a:srgbClr val="13294B"/>
+                </a:solidFill>
+                <a:latin typeface="맑은 고딕"/>
+                <a:ea typeface="맑은 고딕"/>
+                <a:cs typeface="맑은 고딕"/>
+              </a:rPr>
+              <a:t>결과 파일을 남길 자리</a:t>
+            </a:r>
+          </a:p>
+        </p:txBody>
+      </p:sp>
+      <p:sp>
+        <p:nvSpPr>
+          <p:cNvPr id="16" name="TextBox 15"/>
+          <p:cNvSpPr txBox="1"/>
+          <p:nvPr/>
+        </p:nvSpPr>
+        <p:spPr>
+          <a:xfrm>
+            <a:off x="758952" y="4718304"/>
+            <a:ext cx="5001768" cy="502920"/>
+          </a:xfrm>
+          <a:prstGeom prst="rect">
+            <a:avLst/>
+          </a:prstGeom>
+          <a:noFill/>
+        </p:spPr>
+        <p:txBody>
+          <a:bodyPr wrap="square" anchor="t"/>
+          <a:lstStyle/>
+          <a:p>
+            <a:pPr algn="l" eaLnBrk="0">
+              <a:lnSpc>
+                <a:spcPct val="110000"/>
+              </a:lnSpc>
+            </a:pPr>
+            <a:r>
+              <a:rPr sz="1700" b="0">
+                <a:solidFill>
+                  <a:srgbClr val="13294B"/>
+                </a:solidFill>
+                <a:latin typeface="맑은 고딕"/>
+                <a:ea typeface="맑은 고딕"/>
+                <a:cs typeface="맑은 고딕"/>
+              </a:rPr>
+              <a:t>에이전트가 결과를 파일로 쓴다</a:t>
+            </a:r>
+          </a:p>
+        </p:txBody>
+      </p:sp>
+      <p:sp>
+        <p:nvSpPr>
+          <p:cNvPr id="17" name="TextBox 16"/>
+          <p:cNvSpPr txBox="1"/>
+          <p:nvPr/>
+        </p:nvSpPr>
+        <p:spPr>
+          <a:xfrm>
+            <a:off x="758952" y="5266944"/>
+            <a:ext cx="5001768" cy="411480"/>
+          </a:xfrm>
+          <a:prstGeom prst="rect">
+            <a:avLst/>
+          </a:prstGeom>
+          <a:noFill/>
+        </p:spPr>
+        <p:txBody>
+          <a:bodyPr wrap="square" anchor="t"/>
+          <a:lstStyle/>
+          <a:p>
+            <a:pPr algn="l" eaLnBrk="0">
+              <a:lnSpc>
+                <a:spcPct val="110000"/>
+              </a:lnSpc>
+            </a:pPr>
+            <a:r>
+              <a:rPr sz="1600" b="1">
+                <a:solidFill>
+                  <a:srgbClr val="1A6FC4"/>
+                </a:solidFill>
+                <a:latin typeface="맑은 고딕"/>
+                <a:ea typeface="맑은 고딕"/>
+                <a:cs typeface="맑은 고딕"/>
+              </a:rPr>
+              <a:t>작업 폴더: 정해진 경로에만 쓰고 밖은 보지 않는다</a:t>
+            </a:r>
+          </a:p>
+        </p:txBody>
+      </p:sp>
+      <p:sp>
+        <p:nvSpPr>
+          <p:cNvPr id="18" name="Rounded Rectangle 17"/>
+          <p:cNvSpPr/>
+          <p:nvPr/>
+        </p:nvSpPr>
+        <p:spPr>
+          <a:xfrm>
+            <a:off x="6217920" y="4023360"/>
+            <a:ext cx="5422392" cy="2103120"/>
+          </a:xfrm>
+          <a:prstGeom prst="roundRect">
+            <a:avLst>
+              <a:gd name="adj" fmla="val 6000"/>
+            </a:avLst>
+          </a:prstGeom>
+          <a:solidFill>
+            <a:srgbClr val="FFFFFF"/>
+          </a:solidFill>
+          <a:ln w="15875">
+            <a:solidFill>
+              <a:srgbClr val="D3D9E1"/>
+            </a:solidFill>
+          </a:ln>
+        </p:spPr>
+        <p:txBody>
+          <a:bodyPr rtlCol="0" anchor="ctr"/>
+          <a:lstStyle/>
+          <a:p>
+            <a:pPr algn="ctr"/>
+          </a:p>
+        </p:txBody>
+      </p:sp>
+      <p:sp>
+        <p:nvSpPr>
+          <p:cNvPr id="19" name="TextBox 18"/>
+          <p:cNvSpPr txBox="1"/>
+          <p:nvPr/>
+        </p:nvSpPr>
+        <p:spPr>
+          <a:xfrm>
+            <a:off x="6428232" y="4187952"/>
+            <a:ext cx="5001768" cy="438912"/>
+          </a:xfrm>
+          <a:prstGeom prst="rect">
+            <a:avLst/>
+          </a:prstGeom>
+          <a:noFill/>
+        </p:spPr>
+        <p:txBody>
+          <a:bodyPr wrap="square" anchor="t"/>
+          <a:lstStyle/>
+          <a:p>
+            <a:pPr algn="l" eaLnBrk="0">
+              <a:lnSpc>
+                <a:spcPct val="110000"/>
+              </a:lnSpc>
+            </a:pPr>
+            <a:r>
+              <a:rPr sz="1800" b="1">
+                <a:solidFill>
+                  <a:srgbClr val="13294B"/>
+                </a:solidFill>
+                <a:latin typeface="맑은 고딕"/>
+                <a:ea typeface="맑은 고딕"/>
+                <a:cs typeface="맑은 고딕"/>
+              </a:rPr>
+              <a:t>토큰이 필요한 서버 등록</a:t>
+            </a:r>
+          </a:p>
+        </p:txBody>
+      </p:sp>
+      <p:sp>
+        <p:nvSpPr>
+          <p:cNvPr id="20" name="TextBox 19"/>
+          <p:cNvSpPr txBox="1"/>
+          <p:nvPr/>
+        </p:nvSpPr>
+        <p:spPr>
+          <a:xfrm>
+            <a:off x="6428232" y="4718304"/>
+            <a:ext cx="5001768" cy="502920"/>
+          </a:xfrm>
+          <a:prstGeom prst="rect">
+            <a:avLst/>
+          </a:prstGeom>
+          <a:noFill/>
+        </p:spPr>
+        <p:txBody>
+          <a:bodyPr wrap="square" anchor="t"/>
+          <a:lstStyle/>
+          <a:p>
+            <a:pPr algn="l" eaLnBrk="0">
+              <a:lnSpc>
+                <a:spcPct val="110000"/>
+              </a:lnSpc>
+            </a:pPr>
+            <a:r>
+              <a:rPr sz="1700" b="0">
+                <a:solidFill>
+                  <a:srgbClr val="13294B"/>
+                </a:solidFill>
+                <a:latin typeface="맑은 고딕"/>
+                <a:ea typeface="맑은 고딕"/>
+                <a:cs typeface="맑은 고딕"/>
+              </a:rPr>
+              <a:t>외부 서버의 인증 설정을 준비한다</a:t>
+            </a:r>
+          </a:p>
+        </p:txBody>
+      </p:sp>
+      <p:sp>
+        <p:nvSpPr>
+          <p:cNvPr id="21" name="TextBox 20"/>
+          <p:cNvSpPr txBox="1"/>
+          <p:nvPr/>
+        </p:nvSpPr>
+        <p:spPr>
+          <a:xfrm>
+            <a:off x="6428232" y="5266944"/>
+            <a:ext cx="5001768" cy="411480"/>
+          </a:xfrm>
+          <a:prstGeom prst="rect">
+            <a:avLst/>
+          </a:prstGeom>
+          <a:noFill/>
+        </p:spPr>
+        <p:txBody>
+          <a:bodyPr wrap="square" anchor="t"/>
+          <a:lstStyle/>
+          <a:p>
+            <a:pPr algn="l" eaLnBrk="0">
+              <a:lnSpc>
+                <a:spcPct val="110000"/>
+              </a:lnSpc>
+            </a:pPr>
+            <a:r>
+              <a:rPr sz="1600" b="1">
+                <a:solidFill>
+                  <a:srgbClr val="1A6FC4"/>
+                </a:solidFill>
+                <a:latin typeface="맑은 고딕"/>
+                <a:ea typeface="맑은 고딕"/>
+                <a:cs typeface="맑은 고딕"/>
+              </a:rPr>
+              <a:t>자리표시자: 값은 따로 두고 실행 때 채운다</a:t>
+            </a:r>
+          </a:p>
+        </p:txBody>
+      </p:sp>
+    </p:spTree>
+  </p:cSld>
+  <p:clrMapOvr>
+    <a:masterClrMapping/>
+  </p:clrMapOvr>
+</p:sld>
+</file>
+
+<file path=ppt/slides/slide29.xml><?xml version="1.0" encoding="utf-8"?>
+<p:sld xmlns:a="http://schemas.openxmlformats.org/drawingml/2006/main" xmlns:p="http://schemas.openxmlformats.org/presentationml/2006/main" xmlns:r="http://schemas.openxmlformats.org/officeDocument/2006/relationships">
+  <p:cSld>
+    <p:bg>
+      <p:bgPr>
+        <a:solidFill>
+          <a:srgbClr val="FFFFFF"/>
+        </a:solidFill>
+        <a:effectLst/>
+      </p:bgPr>
+    </p:bg>
+    <p:spTree>
+      <p:nvGrpSpPr>
+        <p:cNvPr id="1" name=""/>
+        <p:cNvGrpSpPr/>
+        <p:nvPr/>
+      </p:nvGrpSpPr>
+      <p:grpSpPr/>
+      <p:sp>
+        <p:nvSpPr>
+          <p:cNvPr id="2" name="TextBox 1"/>
+          <p:cNvSpPr txBox="1"/>
+          <p:nvPr/>
+        </p:nvSpPr>
+        <p:spPr>
+          <a:xfrm>
+            <a:off x="457200" y="329184"/>
+            <a:ext cx="11277295" cy="603504"/>
+          </a:xfrm>
+          <a:prstGeom prst="rect">
+            <a:avLst/>
+          </a:prstGeom>
+          <a:noFill/>
+        </p:spPr>
+        <p:txBody>
+          <a:bodyPr wrap="square" anchor="ctr"/>
+          <a:lstStyle/>
+          <a:p>
+            <a:pPr algn="l" eaLnBrk="0">
+              <a:lnSpc>
+                <a:spcPct val="110000"/>
+              </a:lnSpc>
+            </a:pPr>
+            <a:r>
+              <a:rPr sz="2800" b="1">
+                <a:solidFill>
+                  <a:srgbClr val="13294B"/>
+                </a:solidFill>
+                <a:latin typeface="맑은 고딕"/>
+                <a:ea typeface="맑은 고딕"/>
+                <a:cs typeface="맑은 고딕"/>
+              </a:rPr>
+              <a:t>오늘 다룬 핵심 개념과 주요 용어 정리</a:t>
+            </a:r>
+          </a:p>
+        </p:txBody>
+      </p:sp>
+      <p:sp>
+        <p:nvSpPr>
+          <p:cNvPr id="3" name="TextBox 2"/>
+          <p:cNvSpPr txBox="1"/>
+          <p:nvPr/>
+        </p:nvSpPr>
+        <p:spPr>
+          <a:xfrm>
+            <a:off x="457200" y="932688"/>
+            <a:ext cx="11277295" cy="420624"/>
+          </a:xfrm>
+          <a:prstGeom prst="rect">
+            <a:avLst/>
+          </a:prstGeom>
+          <a:noFill/>
+        </p:spPr>
+        <p:txBody>
+          <a:bodyPr wrap="square" anchor="ctr"/>
+          <a:lstStyle/>
+          <a:p>
+            <a:pPr algn="l" eaLnBrk="0">
+              <a:lnSpc>
+                <a:spcPct val="110000"/>
+              </a:lnSpc>
+            </a:pPr>
+            <a:r>
+              <a:rPr sz="1600" b="0">
+                <a:solidFill>
+                  <a:srgbClr val="556175"/>
+                </a:solidFill>
+                <a:latin typeface="맑은 고딕"/>
+                <a:ea typeface="맑은 고딕"/>
+                <a:cs typeface="맑은 고딕"/>
+              </a:rPr>
+              <a:t>본문에서 정의한 아홉 용어의 정식 명칭과 뜻을 한곳에 모은다.</a:t>
+            </a:r>
+          </a:p>
+        </p:txBody>
+      </p:sp>
+      <p:sp>
+        <p:nvSpPr>
+          <p:cNvPr id="4" name="Rectangle 3"/>
+          <p:cNvSpPr/>
+          <p:nvPr/>
+        </p:nvSpPr>
+        <p:spPr>
+          <a:xfrm>
+            <a:off x="548640" y="1408176"/>
+            <a:ext cx="11094415" cy="18288"/>
+          </a:xfrm>
+          <a:prstGeom prst="rect">
+            <a:avLst/>
+          </a:prstGeom>
+          <a:solidFill>
+            <a:srgbClr val="D3D9E1"/>
+          </a:solidFill>
+          <a:ln>
+            <a:noFill/>
+          </a:ln>
+        </p:spPr>
+        <p:txBody>
+          <a:bodyPr rtlCol="0" anchor="ctr"/>
+          <a:lstStyle/>
+          <a:p>
+            <a:pPr algn="ctr"/>
+          </a:p>
+        </p:txBody>
+      </p:sp>
+      <p:sp>
+        <p:nvSpPr>
+          <p:cNvPr id="5" name="TextBox 4"/>
+          <p:cNvSpPr txBox="1"/>
+          <p:nvPr/>
+        </p:nvSpPr>
+        <p:spPr>
+          <a:xfrm>
+            <a:off x="10911535" y="6473952"/>
+            <a:ext cx="822960" cy="274320"/>
+          </a:xfrm>
+          <a:prstGeom prst="rect">
+            <a:avLst/>
+          </a:prstGeom>
+          <a:noFill/>
+        </p:spPr>
+        <p:txBody>
+          <a:bodyPr wrap="square" anchor="t"/>
+          <a:lstStyle/>
+          <a:p>
+            <a:pPr algn="r" eaLnBrk="0">
+              <a:lnSpc>
+                <a:spcPct val="110000"/>
+              </a:lnSpc>
+            </a:pPr>
+            <a:r>
+              <a:rPr sz="1000" b="0">
+                <a:solidFill>
+                  <a:srgbClr val="556175"/>
+                </a:solidFill>
+                <a:latin typeface="맑은 고딕"/>
+                <a:ea typeface="맑은 고딕"/>
+                <a:cs typeface="맑은 고딕"/>
+              </a:rPr>
+              <a:t>29</a:t>
+            </a:r>
+          </a:p>
+        </p:txBody>
+      </p:sp>
+      <p:sp>
+        <p:nvSpPr>
+          <p:cNvPr id="6" name="Rounded Rectangle 5"/>
+          <p:cNvSpPr/>
+          <p:nvPr/>
+        </p:nvSpPr>
+        <p:spPr>
+          <a:xfrm>
+            <a:off x="548640" y="1627631"/>
             <a:ext cx="11094415" cy="347472"/>
           </a:xfrm>
           <a:prstGeom prst="roundRect">
@@ -20883,7 +22236,7 @@
         </p:nvSpPr>
         <p:spPr>
           <a:xfrm>
-            <a:off x="685800" y="2418587"/>
+            <a:off x="685800" y="1627631"/>
             <a:ext cx="2514600" cy="347472"/>
           </a:xfrm>
           <a:prstGeom prst="rect">
@@ -20909,7 +22262,7 @@
                 <a:ea typeface="맑은 고딕"/>
                 <a:cs typeface="맑은 고딕"/>
               </a:rPr>
-              <a:t>교시</a:t>
+              <a:t>용어</a:t>
             </a:r>
           </a:p>
         </p:txBody>
@@ -20922,8 +22275,8 @@
         </p:nvSpPr>
         <p:spPr>
           <a:xfrm>
-            <a:off x="3200400" y="2418587"/>
-            <a:ext cx="6248095" cy="347472"/>
+            <a:off x="3200400" y="1627631"/>
+            <a:ext cx="8442655" cy="347472"/>
           </a:xfrm>
           <a:prstGeom prst="rect">
             <a:avLst/>
@@ -20948,60 +22301,21 @@
                 <a:ea typeface="맑은 고딕"/>
                 <a:cs typeface="맑은 고딕"/>
               </a:rPr>
-              <a:t>실습</a:t>
-            </a:r>
-          </a:p>
-        </p:txBody>
-      </p:sp>
-      <p:sp>
-        <p:nvSpPr>
-          <p:cNvPr id="9" name="TextBox 8"/>
-          <p:cNvSpPr txBox="1"/>
-          <p:nvPr/>
-        </p:nvSpPr>
-        <p:spPr>
-          <a:xfrm>
-            <a:off x="9448495" y="2418587"/>
-            <a:ext cx="2194560" cy="347472"/>
-          </a:xfrm>
-          <a:prstGeom prst="rect">
-            <a:avLst/>
-          </a:prstGeom>
-          <a:noFill/>
-        </p:spPr>
-        <p:txBody>
-          <a:bodyPr wrap="square" anchor="ctr"/>
-          <a:lstStyle/>
-          <a:p>
-            <a:pPr algn="l" eaLnBrk="0">
-              <a:lnSpc>
-                <a:spcPct val="110000"/>
-              </a:lnSpc>
-            </a:pPr>
-            <a:r>
-              <a:rPr sz="1300" b="1">
-                <a:solidFill>
-                  <a:srgbClr val="FFFFFF"/>
-                </a:solidFill>
-                <a:latin typeface="맑은 고딕"/>
-                <a:ea typeface="맑은 고딕"/>
-                <a:cs typeface="맑은 고딕"/>
-              </a:rPr>
-              <a:t>남길 결과</a:t>
-            </a:r>
-          </a:p>
-        </p:txBody>
-      </p:sp>
-      <p:sp>
-        <p:nvSpPr>
-          <p:cNvPr id="10" name="Rounded Rectangle 9"/>
+              <a:t>정식 명칭 · 풀이</a:t>
+            </a:r>
+          </a:p>
+        </p:txBody>
+      </p:sp>
+      <p:sp>
+        <p:nvSpPr>
+          <p:cNvPr id="9" name="Rounded Rectangle 8"/>
           <p:cNvSpPr/>
           <p:nvPr/>
         </p:nvSpPr>
         <p:spPr>
           <a:xfrm>
-            <a:off x="548640" y="2852927"/>
-            <a:ext cx="11094415" cy="850392"/>
+            <a:off x="548640" y="2061972"/>
+            <a:ext cx="11094415" cy="416560"/>
           </a:xfrm>
           <a:prstGeom prst="roundRect">
             <a:avLst>
@@ -21025,14 +22339,53 @@
       </p:sp>
       <p:sp>
         <p:nvSpPr>
+          <p:cNvPr id="10" name="TextBox 9"/>
+          <p:cNvSpPr txBox="1"/>
+          <p:nvPr/>
+        </p:nvSpPr>
+        <p:spPr>
+          <a:xfrm>
+            <a:off x="685800" y="2029967"/>
+            <a:ext cx="2514600" cy="480568"/>
+          </a:xfrm>
+          <a:prstGeom prst="rect">
+            <a:avLst/>
+          </a:prstGeom>
+          <a:noFill/>
+        </p:spPr>
+        <p:txBody>
+          <a:bodyPr wrap="square" anchor="ctr"/>
+          <a:lstStyle/>
+          <a:p>
+            <a:pPr algn="l" eaLnBrk="0">
+              <a:lnSpc>
+                <a:spcPct val="110000"/>
+              </a:lnSpc>
+            </a:pPr>
+            <a:r>
+              <a:rPr sz="1450" b="1">
+                <a:solidFill>
+                  <a:srgbClr val="13294B"/>
+                </a:solidFill>
+                <a:latin typeface="맑은 고딕"/>
+                <a:ea typeface="맑은 고딕"/>
+                <a:cs typeface="맑은 고딕"/>
+              </a:rPr>
+              <a:t>에이전트 스킬</a:t>
+            </a:r>
+          </a:p>
+        </p:txBody>
+      </p:sp>
+      <p:sp>
+        <p:nvSpPr>
           <p:cNvPr id="11" name="TextBox 10"/>
           <p:cNvSpPr txBox="1"/>
           <p:nvPr/>
         </p:nvSpPr>
         <p:spPr>
           <a:xfrm>
-            <a:off x="685800" y="2820923"/>
-            <a:ext cx="2514600" cy="914400"/>
+            <a:off x="3200400" y="2029967"/>
+            <a:ext cx="8351215" cy="480568"/>
           </a:xfrm>
           <a:prstGeom prst="rect">
             <a:avLst/>
@@ -21049,46 +22402,7 @@
               </a:lnSpc>
             </a:pPr>
             <a:r>
-              <a:rPr sz="1600" b="1">
-                <a:solidFill>
-                  <a:srgbClr val="13294B"/>
-                </a:solidFill>
-                <a:latin typeface="맑은 고딕"/>
-                <a:ea typeface="맑은 고딕"/>
-                <a:cs typeface="맑은 고딕"/>
-              </a:rPr>
-              <a:t>2교시</a:t>
-            </a:r>
-          </a:p>
-        </p:txBody>
-      </p:sp>
-      <p:sp>
-        <p:nvSpPr>
-          <p:cNvPr id="12" name="TextBox 11"/>
-          <p:cNvSpPr txBox="1"/>
-          <p:nvPr/>
-        </p:nvSpPr>
-        <p:spPr>
-          <a:xfrm>
-            <a:off x="3200400" y="2820923"/>
-            <a:ext cx="6156655" cy="914400"/>
-          </a:xfrm>
-          <a:prstGeom prst="rect">
-            <a:avLst/>
-          </a:prstGeom>
-          <a:noFill/>
-        </p:spPr>
-        <p:txBody>
-          <a:bodyPr wrap="square" anchor="ctr"/>
-          <a:lstStyle/>
-          <a:p>
-            <a:pPr algn="l" eaLnBrk="0">
-              <a:lnSpc>
-                <a:spcPct val="110000"/>
-              </a:lnSpc>
-            </a:pPr>
-            <a:r>
-              <a:rPr sz="1400" b="0">
+              <a:rPr sz="1250" b="0">
                 <a:solidFill>
                   <a:srgbClr val="1F2A3A"/>
                 </a:solidFill>
@@ -21096,78 +22410,39 @@
                 <a:ea typeface="맑은 고딕"/>
                 <a:cs typeface="맑은 고딕"/>
               </a:rPr>
-              <a:t>도구를 연결하고 회의록 스킬 만들기</a:t>
-            </a:r>
-          </a:p>
-        </p:txBody>
-      </p:sp>
-      <p:sp>
-        <p:nvSpPr>
-          <p:cNvPr id="13" name="TextBox 12"/>
-          <p:cNvSpPr txBox="1"/>
-          <p:nvPr/>
-        </p:nvSpPr>
-        <p:spPr>
-          <a:xfrm>
-            <a:off x="9448495" y="2820923"/>
-            <a:ext cx="2103120" cy="914400"/>
-          </a:xfrm>
-          <a:prstGeom prst="rect">
-            <a:avLst/>
-          </a:prstGeom>
-          <a:noFill/>
-        </p:spPr>
-        <p:txBody>
-          <a:bodyPr wrap="square" anchor="ctr"/>
-          <a:lstStyle/>
-          <a:p>
-            <a:pPr algn="l" eaLnBrk="0">
-              <a:lnSpc>
-                <a:spcPct val="110000"/>
-              </a:lnSpc>
-            </a:pPr>
-            <a:r>
-              <a:rPr sz="1250" b="1">
-                <a:solidFill>
-                  <a:srgbClr val="556175"/>
-                </a:solidFill>
-                <a:latin typeface="맑은 고딕"/>
-                <a:ea typeface="맑은 고딕"/>
-                <a:cs typeface="맑은 고딕"/>
-              </a:rPr>
-              <a:t>결정 · 담당 · 기한 · 출처,</a:t>
-            </a:r>
-          </a:p>
-          <a:p>
-            <a:pPr algn="l" eaLnBrk="0">
-              <a:lnSpc>
-                <a:spcPct val="110000"/>
-              </a:lnSpc>
-            </a:pPr>
-            <a:r>
-              <a:rPr sz="1250" b="1">
-                <a:solidFill>
-                  <a:srgbClr val="556175"/>
-                </a:solidFill>
-                <a:latin typeface="맑은 고딕"/>
-                <a:ea typeface="맑은 고딕"/>
-                <a:cs typeface="맑은 고딕"/>
-              </a:rPr>
-              <a:t>없는 항목은 미정</a:t>
-            </a:r>
-          </a:p>
-        </p:txBody>
-      </p:sp>
-      <p:sp>
-        <p:nvSpPr>
-          <p:cNvPr id="14" name="Rounded Rectangle 13"/>
+              <a:t>Agent Skill</a:t>
+            </a:r>
+          </a:p>
+          <a:p>
+            <a:pPr algn="l" eaLnBrk="0">
+              <a:lnSpc>
+                <a:spcPct val="110000"/>
+              </a:lnSpc>
+            </a:pPr>
+            <a:r>
+              <a:rPr sz="1250" b="0">
+                <a:solidFill>
+                  <a:srgbClr val="1F2A3A"/>
+                </a:solidFill>
+                <a:latin typeface="맑은 고딕"/>
+                <a:ea typeface="맑은 고딕"/>
+                <a:cs typeface="맑은 고딕"/>
+              </a:rPr>
+              <a:t>업무 지침과 필요한 자료를 이름 있는 묶음으로 관리해 다시 쓰는 방법</a:t>
+            </a:r>
+          </a:p>
+        </p:txBody>
+      </p:sp>
+      <p:sp>
+        <p:nvSpPr>
+          <p:cNvPr id="12" name="Rounded Rectangle 11"/>
           <p:cNvSpPr/>
           <p:nvPr/>
         </p:nvSpPr>
         <p:spPr>
           <a:xfrm>
-            <a:off x="548640" y="3767327"/>
-            <a:ext cx="11094415" cy="850392"/>
+            <a:off x="548640" y="2542540"/>
+            <a:ext cx="11094415" cy="416560"/>
           </a:xfrm>
           <a:prstGeom prst="roundRect">
             <a:avLst>
@@ -21191,14 +22466,14 @@
       </p:sp>
       <p:sp>
         <p:nvSpPr>
-          <p:cNvPr id="15" name="TextBox 14"/>
+          <p:cNvPr id="13" name="TextBox 12"/>
           <p:cNvSpPr txBox="1"/>
           <p:nvPr/>
         </p:nvSpPr>
         <p:spPr>
           <a:xfrm>
-            <a:off x="685800" y="3735323"/>
-            <a:ext cx="2514600" cy="914400"/>
+            <a:off x="685800" y="2510536"/>
+            <a:ext cx="2514600" cy="480568"/>
           </a:xfrm>
           <a:prstGeom prst="rect">
             <a:avLst/>
@@ -21215,7 +22490,7 @@
               </a:lnSpc>
             </a:pPr>
             <a:r>
-              <a:rPr sz="1600" b="1">
+              <a:rPr sz="1450" b="1">
                 <a:solidFill>
                   <a:srgbClr val="13294B"/>
                 </a:solidFill>
@@ -21223,21 +22498,21 @@
                 <a:ea typeface="맑은 고딕"/>
                 <a:cs typeface="맑은 고딕"/>
               </a:rPr>
-              <a:t>3교시</a:t>
-            </a:r>
-          </a:p>
-        </p:txBody>
-      </p:sp>
-      <p:sp>
-        <p:nvSpPr>
-          <p:cNvPr id="16" name="TextBox 15"/>
+              <a:t>MCP</a:t>
+            </a:r>
+          </a:p>
+        </p:txBody>
+      </p:sp>
+      <p:sp>
+        <p:nvSpPr>
+          <p:cNvPr id="14" name="TextBox 13"/>
           <p:cNvSpPr txBox="1"/>
           <p:nvPr/>
         </p:nvSpPr>
         <p:spPr>
           <a:xfrm>
-            <a:off x="3200400" y="3735323"/>
-            <a:ext cx="6156655" cy="914400"/>
+            <a:off x="3200400" y="2510536"/>
+            <a:ext cx="8351215" cy="480568"/>
           </a:xfrm>
           <a:prstGeom prst="rect">
             <a:avLst/>
@@ -21254,7 +22529,7 @@
               </a:lnSpc>
             </a:pPr>
             <a:r>
-              <a:rPr sz="1400" b="0">
+              <a:rPr sz="1250" b="0">
                 <a:solidFill>
                   <a:srgbClr val="1F2A3A"/>
                 </a:solidFill>
@@ -21262,17 +22537,17 @@
                 <a:ea typeface="맑은 고딕"/>
                 <a:cs typeface="맑은 고딕"/>
               </a:rPr>
-              <a:t>파일 · Git · 시간 MCP를 연결하고</a:t>
-            </a:r>
-          </a:p>
-          <a:p>
-            <a:pPr algn="l" eaLnBrk="0">
-              <a:lnSpc>
-                <a:spcPct val="110000"/>
-              </a:lnSpc>
-            </a:pPr>
-            <a:r>
-              <a:rPr sz="1400" b="0">
+              <a:t>Model Context Protocol</a:t>
+            </a:r>
+          </a:p>
+          <a:p>
+            <a:pPr algn="l" eaLnBrk="0">
+              <a:lnSpc>
+                <a:spcPct val="110000"/>
+              </a:lnSpc>
+            </a:pPr>
+            <a:r>
+              <a:rPr sz="1250" b="0">
                 <a:solidFill>
                   <a:srgbClr val="1F2A3A"/>
                 </a:solidFill>
@@ -21280,78 +22555,21 @@
                 <a:ea typeface="맑은 고딕"/>
                 <a:cs typeface="맑은 고딕"/>
               </a:rPr>
-              <a:t>반환값 확인하기</a:t>
-            </a:r>
-          </a:p>
-        </p:txBody>
-      </p:sp>
-      <p:sp>
-        <p:nvSpPr>
-          <p:cNvPr id="17" name="TextBox 16"/>
-          <p:cNvSpPr txBox="1"/>
-          <p:nvPr/>
-        </p:nvSpPr>
-        <p:spPr>
-          <a:xfrm>
-            <a:off x="9448495" y="3735323"/>
-            <a:ext cx="2103120" cy="914400"/>
-          </a:xfrm>
-          <a:prstGeom prst="rect">
-            <a:avLst/>
-          </a:prstGeom>
-          <a:noFill/>
-        </p:spPr>
-        <p:txBody>
-          <a:bodyPr wrap="square" anchor="ctr"/>
-          <a:lstStyle/>
-          <a:p>
-            <a:pPr algn="l" eaLnBrk="0">
-              <a:lnSpc>
-                <a:spcPct val="110000"/>
-              </a:lnSpc>
-            </a:pPr>
-            <a:r>
-              <a:rPr sz="1250" b="1">
-                <a:solidFill>
-                  <a:srgbClr val="556175"/>
-                </a:solidFill>
-                <a:latin typeface="맑은 고딕"/>
-                <a:ea typeface="맑은 고딕"/>
-                <a:cs typeface="맑은 고딕"/>
-              </a:rPr>
-              <a:t>연결 설정과 반환값,</a:t>
-            </a:r>
-          </a:p>
-          <a:p>
-            <a:pPr algn="l" eaLnBrk="0">
-              <a:lnSpc>
-                <a:spcPct val="110000"/>
-              </a:lnSpc>
-            </a:pPr>
-            <a:r>
-              <a:rPr sz="1250" b="1">
-                <a:solidFill>
-                  <a:srgbClr val="556175"/>
-                </a:solidFill>
-                <a:latin typeface="맑은 고딕"/>
-                <a:ea typeface="맑은 고딕"/>
-                <a:cs typeface="맑은 고딕"/>
-              </a:rPr>
-              <a:t>접근 실패 · 자료 없음</a:t>
-            </a:r>
-          </a:p>
-        </p:txBody>
-      </p:sp>
-      <p:sp>
-        <p:nvSpPr>
-          <p:cNvPr id="18" name="Rounded Rectangle 17"/>
+              <a:t>AI 애플리케이션이 외부 도구와 데이터에 연결하는 방식을 정한 개방형 프로토콜</a:t>
+            </a:r>
+          </a:p>
+        </p:txBody>
+      </p:sp>
+      <p:sp>
+        <p:nvSpPr>
+          <p:cNvPr id="15" name="Rounded Rectangle 14"/>
           <p:cNvSpPr/>
           <p:nvPr/>
         </p:nvSpPr>
         <p:spPr>
           <a:xfrm>
-            <a:off x="548640" y="4681727"/>
-            <a:ext cx="11094415" cy="850392"/>
+            <a:off x="548640" y="3023108"/>
+            <a:ext cx="11094415" cy="416560"/>
           </a:xfrm>
           <a:prstGeom prst="roundRect">
             <a:avLst>
@@ -21359,7 +22577,7 @@
             </a:avLst>
           </a:prstGeom>
           <a:solidFill>
-            <a:srgbClr val="E7F3FD"/>
+            <a:srgbClr val="F3F6F9"/>
           </a:solidFill>
           <a:ln>
             <a:noFill/>
@@ -21375,14 +22593,141 @@
       </p:sp>
       <p:sp>
         <p:nvSpPr>
+          <p:cNvPr id="16" name="TextBox 15"/>
+          <p:cNvSpPr txBox="1"/>
+          <p:nvPr/>
+        </p:nvSpPr>
+        <p:spPr>
+          <a:xfrm>
+            <a:off x="685800" y="2991104"/>
+            <a:ext cx="2514600" cy="480568"/>
+          </a:xfrm>
+          <a:prstGeom prst="rect">
+            <a:avLst/>
+          </a:prstGeom>
+          <a:noFill/>
+        </p:spPr>
+        <p:txBody>
+          <a:bodyPr wrap="square" anchor="ctr"/>
+          <a:lstStyle/>
+          <a:p>
+            <a:pPr algn="l" eaLnBrk="0">
+              <a:lnSpc>
+                <a:spcPct val="110000"/>
+              </a:lnSpc>
+            </a:pPr>
+            <a:r>
+              <a:rPr sz="1450" b="1">
+                <a:solidFill>
+                  <a:srgbClr val="13294B"/>
+                </a:solidFill>
+                <a:latin typeface="맑은 고딕"/>
+                <a:ea typeface="맑은 고딕"/>
+                <a:cs typeface="맑은 고딕"/>
+              </a:rPr>
+              <a:t>호스트 · 클라이언트</a:t>
+            </a:r>
+          </a:p>
+        </p:txBody>
+      </p:sp>
+      <p:sp>
+        <p:nvSpPr>
+          <p:cNvPr id="17" name="TextBox 16"/>
+          <p:cNvSpPr txBox="1"/>
+          <p:nvPr/>
+        </p:nvSpPr>
+        <p:spPr>
+          <a:xfrm>
+            <a:off x="3200400" y="2991104"/>
+            <a:ext cx="8351215" cy="480568"/>
+          </a:xfrm>
+          <a:prstGeom prst="rect">
+            <a:avLst/>
+          </a:prstGeom>
+          <a:noFill/>
+        </p:spPr>
+        <p:txBody>
+          <a:bodyPr wrap="square" anchor="ctr"/>
+          <a:lstStyle/>
+          <a:p>
+            <a:pPr algn="l" eaLnBrk="0">
+              <a:lnSpc>
+                <a:spcPct val="110000"/>
+              </a:lnSpc>
+            </a:pPr>
+            <a:r>
+              <a:rPr sz="1250" b="0">
+                <a:solidFill>
+                  <a:srgbClr val="1F2A3A"/>
+                </a:solidFill>
+                <a:latin typeface="맑은 고딕"/>
+                <a:ea typeface="맑은 고딕"/>
+                <a:cs typeface="맑은 고딕"/>
+              </a:rPr>
+              <a:t>Host · Client</a:t>
+            </a:r>
+          </a:p>
+          <a:p>
+            <a:pPr algn="l" eaLnBrk="0">
+              <a:lnSpc>
+                <a:spcPct val="110000"/>
+              </a:lnSpc>
+            </a:pPr>
+            <a:r>
+              <a:rPr sz="1250" b="0">
+                <a:solidFill>
+                  <a:srgbClr val="1F2A3A"/>
+                </a:solidFill>
+                <a:latin typeface="맑은 고딕"/>
+                <a:ea typeface="맑은 고딕"/>
+                <a:cs typeface="맑은 고딕"/>
+              </a:rPr>
+              <a:t>모델을 가진 애플리케이션과, 그 안에서 서버 하나와 연결을 유지하는 구성요소</a:t>
+            </a:r>
+          </a:p>
+        </p:txBody>
+      </p:sp>
+      <p:sp>
+        <p:nvSpPr>
+          <p:cNvPr id="18" name="Rounded Rectangle 17"/>
+          <p:cNvSpPr/>
+          <p:nvPr/>
+        </p:nvSpPr>
+        <p:spPr>
+          <a:xfrm>
+            <a:off x="548640" y="3503676"/>
+            <a:ext cx="11094415" cy="416560"/>
+          </a:xfrm>
+          <a:prstGeom prst="roundRect">
+            <a:avLst>
+              <a:gd name="adj" fmla="val 8000"/>
+            </a:avLst>
+          </a:prstGeom>
+          <a:solidFill>
+            <a:srgbClr val="F3F6F9"/>
+          </a:solidFill>
+          <a:ln>
+            <a:noFill/>
+          </a:ln>
+        </p:spPr>
+        <p:txBody>
+          <a:bodyPr rtlCol="0" anchor="ctr"/>
+          <a:lstStyle/>
+          <a:p>
+            <a:pPr algn="ctr"/>
+          </a:p>
+        </p:txBody>
+      </p:sp>
+      <p:sp>
+        <p:nvSpPr>
           <p:cNvPr id="19" name="TextBox 18"/>
           <p:cNvSpPr txBox="1"/>
           <p:nvPr/>
         </p:nvSpPr>
         <p:spPr>
           <a:xfrm>
-            <a:off x="685800" y="4649723"/>
-            <a:ext cx="2514600" cy="914400"/>
+            <a:off x="685800" y="3471672"/>
+            <a:ext cx="2514600" cy="480568"/>
           </a:xfrm>
           <a:prstGeom prst="rect">
             <a:avLst/>
@@ -21399,7 +22744,7 @@
               </a:lnSpc>
             </a:pPr>
             <a:r>
-              <a:rPr sz="1600" b="1">
+              <a:rPr sz="1450" b="1">
                 <a:solidFill>
                   <a:srgbClr val="13294B"/>
                 </a:solidFill>
@@ -21407,7 +22752,7 @@
                 <a:ea typeface="맑은 고딕"/>
                 <a:cs typeface="맑은 고딕"/>
               </a:rPr>
-              <a:t>4교시</a:t>
+              <a:t>서버 · 도구</a:t>
             </a:r>
           </a:p>
         </p:txBody>
@@ -21420,8 +22765,8 @@
         </p:nvSpPr>
         <p:spPr>
           <a:xfrm>
-            <a:off x="3200400" y="4649723"/>
-            <a:ext cx="6156655" cy="914400"/>
+            <a:off x="3200400" y="3471672"/>
+            <a:ext cx="8351215" cy="480568"/>
           </a:xfrm>
           <a:prstGeom prst="rect">
             <a:avLst/>
@@ -21438,7 +22783,7 @@
               </a:lnSpc>
             </a:pPr>
             <a:r>
-              <a:rPr sz="1400" b="0">
+              <a:rPr sz="1250" b="0">
                 <a:solidFill>
                   <a:srgbClr val="1F2A3A"/>
                 </a:solidFill>
@@ -21446,17 +22791,17 @@
                 <a:ea typeface="맑은 고딕"/>
                 <a:cs typeface="맑은 고딕"/>
               </a:rPr>
-              <a:t>내 조회 도구를 구현하고</a:t>
-            </a:r>
-          </a:p>
-          <a:p>
-            <a:pPr algn="l" eaLnBrk="0">
-              <a:lnSpc>
-                <a:spcPct val="110000"/>
-              </a:lnSpc>
-            </a:pPr>
-            <a:r>
-              <a:rPr sz="1400" b="0">
+              <a:t>Server · Tool</a:t>
+            </a:r>
+          </a:p>
+          <a:p>
+            <a:pPr algn="l" eaLnBrk="0">
+              <a:lnSpc>
+                <a:spcPct val="110000"/>
+              </a:lnSpc>
+            </a:pPr>
+            <a:r>
+              <a:rPr sz="1250" b="0">
                 <a:solidFill>
                   <a:srgbClr val="1F2A3A"/>
                 </a:solidFill>
@@ -21464,21 +22809,52 @@
                 <a:ea typeface="맑은 고딕"/>
                 <a:cs typeface="맑은 고딕"/>
               </a:rPr>
-              <a:t>외부 MCP와 조합해 검증하기</a:t>
-            </a:r>
-          </a:p>
-        </p:txBody>
-      </p:sp>
-      <p:sp>
-        <p:nvSpPr>
-          <p:cNvPr id="21" name="TextBox 20"/>
+              <a:t>시스템의 기능을 내주는 프로그램과, 그 서버가 내주는 호출할 수 있는 기능</a:t>
+            </a:r>
+          </a:p>
+        </p:txBody>
+      </p:sp>
+      <p:sp>
+        <p:nvSpPr>
+          <p:cNvPr id="21" name="Rounded Rectangle 20"/>
+          <p:cNvSpPr/>
+          <p:nvPr/>
+        </p:nvSpPr>
+        <p:spPr>
+          <a:xfrm>
+            <a:off x="548640" y="3984244"/>
+            <a:ext cx="11094415" cy="416560"/>
+          </a:xfrm>
+          <a:prstGeom prst="roundRect">
+            <a:avLst>
+              <a:gd name="adj" fmla="val 8000"/>
+            </a:avLst>
+          </a:prstGeom>
+          <a:solidFill>
+            <a:srgbClr val="F3F6F9"/>
+          </a:solidFill>
+          <a:ln>
+            <a:noFill/>
+          </a:ln>
+        </p:spPr>
+        <p:txBody>
+          <a:bodyPr rtlCol="0" anchor="ctr"/>
+          <a:lstStyle/>
+          <a:p>
+            <a:pPr algn="ctr"/>
+          </a:p>
+        </p:txBody>
+      </p:sp>
+      <p:sp>
+        <p:nvSpPr>
+          <p:cNvPr id="22" name="TextBox 21"/>
           <p:cNvSpPr txBox="1"/>
           <p:nvPr/>
         </p:nvSpPr>
         <p:spPr>
           <a:xfrm>
-            <a:off x="9448495" y="4649723"/>
-            <a:ext cx="2103120" cy="914400"/>
+            <a:off x="685800" y="3952239"/>
+            <a:ext cx="2514600" cy="480568"/>
           </a:xfrm>
           <a:prstGeom prst="rect">
             <a:avLst/>
@@ -21495,33 +22871,580 @@
               </a:lnSpc>
             </a:pPr>
             <a:r>
-              <a:rPr sz="1250" b="1">
-                <a:solidFill>
-                  <a:srgbClr val="1A6FC4"/>
-                </a:solidFill>
-                <a:latin typeface="맑은 고딕"/>
-                <a:ea typeface="맑은 고딕"/>
-                <a:cs typeface="맑은 고딕"/>
-              </a:rPr>
-              <a:t>코드 · 설정 · 출처,</a:t>
-            </a:r>
-          </a:p>
-          <a:p>
-            <a:pPr algn="l" eaLnBrk="0">
-              <a:lnSpc>
-                <a:spcPct val="110000"/>
-              </a:lnSpc>
-            </a:pPr>
-            <a:r>
-              <a:rPr sz="1250" b="1">
-                <a:solidFill>
-                  <a:srgbClr val="1A6FC4"/>
-                </a:solidFill>
-                <a:latin typeface="맑은 고딕"/>
-                <a:ea typeface="맑은 고딕"/>
-                <a:cs typeface="맑은 고딕"/>
-              </a:rPr>
-              <a:t>실패 사례 검증</a:t>
+              <a:rPr sz="1450" b="1">
+                <a:solidFill>
+                  <a:srgbClr val="13294B"/>
+                </a:solidFill>
+                <a:latin typeface="맑은 고딕"/>
+                <a:ea typeface="맑은 고딕"/>
+                <a:cs typeface="맑은 고딕"/>
+              </a:rPr>
+              <a:t>입력 스키마</a:t>
+            </a:r>
+          </a:p>
+        </p:txBody>
+      </p:sp>
+      <p:sp>
+        <p:nvSpPr>
+          <p:cNvPr id="23" name="TextBox 22"/>
+          <p:cNvSpPr txBox="1"/>
+          <p:nvPr/>
+        </p:nvSpPr>
+        <p:spPr>
+          <a:xfrm>
+            <a:off x="3200400" y="3952239"/>
+            <a:ext cx="8351215" cy="480568"/>
+          </a:xfrm>
+          <a:prstGeom prst="rect">
+            <a:avLst/>
+          </a:prstGeom>
+          <a:noFill/>
+        </p:spPr>
+        <p:txBody>
+          <a:bodyPr wrap="square" anchor="ctr"/>
+          <a:lstStyle/>
+          <a:p>
+            <a:pPr algn="l" eaLnBrk="0">
+              <a:lnSpc>
+                <a:spcPct val="110000"/>
+              </a:lnSpc>
+            </a:pPr>
+            <a:r>
+              <a:rPr sz="1250" b="0">
+                <a:solidFill>
+                  <a:srgbClr val="1F2A3A"/>
+                </a:solidFill>
+                <a:latin typeface="맑은 고딕"/>
+                <a:ea typeface="맑은 고딕"/>
+                <a:cs typeface="맑은 고딕"/>
+              </a:rPr>
+              <a:t>Input Schema (JSON Schema)</a:t>
+            </a:r>
+          </a:p>
+          <a:p>
+            <a:pPr algn="l" eaLnBrk="0">
+              <a:lnSpc>
+                <a:spcPct val="110000"/>
+              </a:lnSpc>
+            </a:pPr>
+            <a:r>
+              <a:rPr sz="1250" b="0">
+                <a:solidFill>
+                  <a:srgbClr val="1F2A3A"/>
+                </a:solidFill>
+                <a:latin typeface="맑은 고딕"/>
+                <a:ea typeface="맑은 고딕"/>
+                <a:cs typeface="맑은 고딕"/>
+              </a:rPr>
+              <a:t>도구에 넘길 값의 이름과 형을 정한 정의</a:t>
+            </a:r>
+          </a:p>
+        </p:txBody>
+      </p:sp>
+      <p:sp>
+        <p:nvSpPr>
+          <p:cNvPr id="24" name="Rounded Rectangle 23"/>
+          <p:cNvSpPr/>
+          <p:nvPr/>
+        </p:nvSpPr>
+        <p:spPr>
+          <a:xfrm>
+            <a:off x="548640" y="4464811"/>
+            <a:ext cx="11094415" cy="416560"/>
+          </a:xfrm>
+          <a:prstGeom prst="roundRect">
+            <a:avLst>
+              <a:gd name="adj" fmla="val 8000"/>
+            </a:avLst>
+          </a:prstGeom>
+          <a:solidFill>
+            <a:srgbClr val="F3F6F9"/>
+          </a:solidFill>
+          <a:ln>
+            <a:noFill/>
+          </a:ln>
+        </p:spPr>
+        <p:txBody>
+          <a:bodyPr rtlCol="0" anchor="ctr"/>
+          <a:lstStyle/>
+          <a:p>
+            <a:pPr algn="ctr"/>
+          </a:p>
+        </p:txBody>
+      </p:sp>
+      <p:sp>
+        <p:nvSpPr>
+          <p:cNvPr id="25" name="TextBox 24"/>
+          <p:cNvSpPr txBox="1"/>
+          <p:nvPr/>
+        </p:nvSpPr>
+        <p:spPr>
+          <a:xfrm>
+            <a:off x="685800" y="4432807"/>
+            <a:ext cx="2514600" cy="480568"/>
+          </a:xfrm>
+          <a:prstGeom prst="rect">
+            <a:avLst/>
+          </a:prstGeom>
+          <a:noFill/>
+        </p:spPr>
+        <p:txBody>
+          <a:bodyPr wrap="square" anchor="ctr"/>
+          <a:lstStyle/>
+          <a:p>
+            <a:pPr algn="l" eaLnBrk="0">
+              <a:lnSpc>
+                <a:spcPct val="110000"/>
+              </a:lnSpc>
+            </a:pPr>
+            <a:r>
+              <a:rPr sz="1450" b="1">
+                <a:solidFill>
+                  <a:srgbClr val="13294B"/>
+                </a:solidFill>
+                <a:latin typeface="맑은 고딕"/>
+                <a:ea typeface="맑은 고딕"/>
+                <a:cs typeface="맑은 고딕"/>
+              </a:rPr>
+              <a:t>stdio · Streamable HTTP</a:t>
+            </a:r>
+          </a:p>
+        </p:txBody>
+      </p:sp>
+      <p:sp>
+        <p:nvSpPr>
+          <p:cNvPr id="26" name="TextBox 25"/>
+          <p:cNvSpPr txBox="1"/>
+          <p:nvPr/>
+        </p:nvSpPr>
+        <p:spPr>
+          <a:xfrm>
+            <a:off x="3200400" y="4432807"/>
+            <a:ext cx="8351215" cy="480568"/>
+          </a:xfrm>
+          <a:prstGeom prst="rect">
+            <a:avLst/>
+          </a:prstGeom>
+          <a:noFill/>
+        </p:spPr>
+        <p:txBody>
+          <a:bodyPr wrap="square" anchor="ctr"/>
+          <a:lstStyle/>
+          <a:p>
+            <a:pPr algn="l" eaLnBrk="0">
+              <a:lnSpc>
+                <a:spcPct val="110000"/>
+              </a:lnSpc>
+            </a:pPr>
+            <a:r>
+              <a:rPr sz="1250" b="0">
+                <a:solidFill>
+                  <a:srgbClr val="1F2A3A"/>
+                </a:solidFill>
+                <a:latin typeface="맑은 고딕"/>
+                <a:ea typeface="맑은 고딕"/>
+                <a:cs typeface="맑은 고딕"/>
+              </a:rPr>
+              <a:t>Standard Input/Output · Streamable HTTP</a:t>
+            </a:r>
+          </a:p>
+          <a:p>
+            <a:pPr algn="l" eaLnBrk="0">
+              <a:lnSpc>
+                <a:spcPct val="110000"/>
+              </a:lnSpc>
+            </a:pPr>
+            <a:r>
+              <a:rPr sz="1250" b="0">
+                <a:solidFill>
+                  <a:srgbClr val="1F2A3A"/>
+                </a:solidFill>
+                <a:latin typeface="맑은 고딕"/>
+                <a:ea typeface="맑은 고딕"/>
+                <a:cs typeface="맑은 고딕"/>
+              </a:rPr>
+              <a:t>하위 프로세스의 표준 입출력, 또는 HTTP 요청으로 주고받는 연결 방식</a:t>
+            </a:r>
+          </a:p>
+        </p:txBody>
+      </p:sp>
+      <p:sp>
+        <p:nvSpPr>
+          <p:cNvPr id="27" name="Rounded Rectangle 26"/>
+          <p:cNvSpPr/>
+          <p:nvPr/>
+        </p:nvSpPr>
+        <p:spPr>
+          <a:xfrm>
+            <a:off x="548640" y="4945380"/>
+            <a:ext cx="11094415" cy="416560"/>
+          </a:xfrm>
+          <a:prstGeom prst="roundRect">
+            <a:avLst>
+              <a:gd name="adj" fmla="val 8000"/>
+            </a:avLst>
+          </a:prstGeom>
+          <a:solidFill>
+            <a:srgbClr val="F3F6F9"/>
+          </a:solidFill>
+          <a:ln>
+            <a:noFill/>
+          </a:ln>
+        </p:spPr>
+        <p:txBody>
+          <a:bodyPr rtlCol="0" anchor="ctr"/>
+          <a:lstStyle/>
+          <a:p>
+            <a:pPr algn="ctr"/>
+          </a:p>
+        </p:txBody>
+      </p:sp>
+      <p:sp>
+        <p:nvSpPr>
+          <p:cNvPr id="28" name="TextBox 27"/>
+          <p:cNvSpPr txBox="1"/>
+          <p:nvPr/>
+        </p:nvSpPr>
+        <p:spPr>
+          <a:xfrm>
+            <a:off x="685800" y="4913376"/>
+            <a:ext cx="2514600" cy="480568"/>
+          </a:xfrm>
+          <a:prstGeom prst="rect">
+            <a:avLst/>
+          </a:prstGeom>
+          <a:noFill/>
+        </p:spPr>
+        <p:txBody>
+          <a:bodyPr wrap="square" anchor="ctr"/>
+          <a:lstStyle/>
+          <a:p>
+            <a:pPr algn="l" eaLnBrk="0">
+              <a:lnSpc>
+                <a:spcPct val="110000"/>
+              </a:lnSpc>
+            </a:pPr>
+            <a:r>
+              <a:rPr sz="1450" b="1">
+                <a:solidFill>
+                  <a:srgbClr val="13294B"/>
+                </a:solidFill>
+                <a:latin typeface="맑은 고딕"/>
+                <a:ea typeface="맑은 고딕"/>
+                <a:cs typeface="맑은 고딕"/>
+              </a:rPr>
+              <a:t>readOnlyHint</a:t>
+            </a:r>
+          </a:p>
+        </p:txBody>
+      </p:sp>
+      <p:sp>
+        <p:nvSpPr>
+          <p:cNvPr id="29" name="TextBox 28"/>
+          <p:cNvSpPr txBox="1"/>
+          <p:nvPr/>
+        </p:nvSpPr>
+        <p:spPr>
+          <a:xfrm>
+            <a:off x="3200400" y="4913376"/>
+            <a:ext cx="8351215" cy="480568"/>
+          </a:xfrm>
+          <a:prstGeom prst="rect">
+            <a:avLst/>
+          </a:prstGeom>
+          <a:noFill/>
+        </p:spPr>
+        <p:txBody>
+          <a:bodyPr wrap="square" anchor="ctr"/>
+          <a:lstStyle/>
+          <a:p>
+            <a:pPr algn="l" eaLnBrk="0">
+              <a:lnSpc>
+                <a:spcPct val="110000"/>
+              </a:lnSpc>
+            </a:pPr>
+            <a:r>
+              <a:rPr sz="1250" b="0">
+                <a:solidFill>
+                  <a:srgbClr val="1F2A3A"/>
+                </a:solidFill>
+                <a:latin typeface="맑은 고딕"/>
+                <a:ea typeface="맑은 고딕"/>
+                <a:cs typeface="맑은 고딕"/>
+              </a:rPr>
+              <a:t>Read-only Hint</a:t>
+            </a:r>
+          </a:p>
+          <a:p>
+            <a:pPr algn="l" eaLnBrk="0">
+              <a:lnSpc>
+                <a:spcPct val="110000"/>
+              </a:lnSpc>
+            </a:pPr>
+            <a:r>
+              <a:rPr sz="1250" b="0">
+                <a:solidFill>
+                  <a:srgbClr val="1F2A3A"/>
+                </a:solidFill>
+                <a:latin typeface="맑은 고딕"/>
+                <a:ea typeface="맑은 고딕"/>
+                <a:cs typeface="맑은 고딕"/>
+              </a:rPr>
+              <a:t>도구가 시스템을 바꾸지 않는다고 서버가 스스로 다는 표시</a:t>
+            </a:r>
+          </a:p>
+        </p:txBody>
+      </p:sp>
+      <p:sp>
+        <p:nvSpPr>
+          <p:cNvPr id="30" name="Rounded Rectangle 29"/>
+          <p:cNvSpPr/>
+          <p:nvPr/>
+        </p:nvSpPr>
+        <p:spPr>
+          <a:xfrm>
+            <a:off x="548640" y="5425948"/>
+            <a:ext cx="11094415" cy="416560"/>
+          </a:xfrm>
+          <a:prstGeom prst="roundRect">
+            <a:avLst>
+              <a:gd name="adj" fmla="val 8000"/>
+            </a:avLst>
+          </a:prstGeom>
+          <a:solidFill>
+            <a:srgbClr val="F3F6F9"/>
+          </a:solidFill>
+          <a:ln>
+            <a:noFill/>
+          </a:ln>
+        </p:spPr>
+        <p:txBody>
+          <a:bodyPr rtlCol="0" anchor="ctr"/>
+          <a:lstStyle/>
+          <a:p>
+            <a:pPr algn="ctr"/>
+          </a:p>
+        </p:txBody>
+      </p:sp>
+      <p:sp>
+        <p:nvSpPr>
+          <p:cNvPr id="31" name="TextBox 30"/>
+          <p:cNvSpPr txBox="1"/>
+          <p:nvPr/>
+        </p:nvSpPr>
+        <p:spPr>
+          <a:xfrm>
+            <a:off x="685800" y="5393944"/>
+            <a:ext cx="2514600" cy="480568"/>
+          </a:xfrm>
+          <a:prstGeom prst="rect">
+            <a:avLst/>
+          </a:prstGeom>
+          <a:noFill/>
+        </p:spPr>
+        <p:txBody>
+          <a:bodyPr wrap="square" anchor="ctr"/>
+          <a:lstStyle/>
+          <a:p>
+            <a:pPr algn="l" eaLnBrk="0">
+              <a:lnSpc>
+                <a:spcPct val="110000"/>
+              </a:lnSpc>
+            </a:pPr>
+            <a:r>
+              <a:rPr sz="1450" b="1">
+                <a:solidFill>
+                  <a:srgbClr val="13294B"/>
+                </a:solidFill>
+                <a:latin typeface="맑은 고딕"/>
+                <a:ea typeface="맑은 고딕"/>
+                <a:cs typeface="맑은 고딕"/>
+              </a:rPr>
+              <a:t>최소 권한 원칙</a:t>
+            </a:r>
+          </a:p>
+        </p:txBody>
+      </p:sp>
+      <p:sp>
+        <p:nvSpPr>
+          <p:cNvPr id="32" name="TextBox 31"/>
+          <p:cNvSpPr txBox="1"/>
+          <p:nvPr/>
+        </p:nvSpPr>
+        <p:spPr>
+          <a:xfrm>
+            <a:off x="3200400" y="5393944"/>
+            <a:ext cx="8351215" cy="480568"/>
+          </a:xfrm>
+          <a:prstGeom prst="rect">
+            <a:avLst/>
+          </a:prstGeom>
+          <a:noFill/>
+        </p:spPr>
+        <p:txBody>
+          <a:bodyPr wrap="square" anchor="ctr"/>
+          <a:lstStyle/>
+          <a:p>
+            <a:pPr algn="l" eaLnBrk="0">
+              <a:lnSpc>
+                <a:spcPct val="110000"/>
+              </a:lnSpc>
+            </a:pPr>
+            <a:r>
+              <a:rPr sz="1250" b="0">
+                <a:solidFill>
+                  <a:srgbClr val="1F2A3A"/>
+                </a:solidFill>
+                <a:latin typeface="맑은 고딕"/>
+                <a:ea typeface="맑은 고딕"/>
+                <a:cs typeface="맑은 고딕"/>
+              </a:rPr>
+              <a:t>Principle of Least Privilege</a:t>
+            </a:r>
+          </a:p>
+          <a:p>
+            <a:pPr algn="l" eaLnBrk="0">
+              <a:lnSpc>
+                <a:spcPct val="110000"/>
+              </a:lnSpc>
+            </a:pPr>
+            <a:r>
+              <a:rPr sz="1250" b="0">
+                <a:solidFill>
+                  <a:srgbClr val="1F2A3A"/>
+                </a:solidFill>
+                <a:latin typeface="맑은 고딕"/>
+                <a:ea typeface="맑은 고딕"/>
+                <a:cs typeface="맑은 고딕"/>
+              </a:rPr>
+              <a:t>맡은 일에 필요한 권한만 주는 원칙</a:t>
+            </a:r>
+          </a:p>
+        </p:txBody>
+      </p:sp>
+      <p:sp>
+        <p:nvSpPr>
+          <p:cNvPr id="33" name="Rounded Rectangle 32"/>
+          <p:cNvSpPr/>
+          <p:nvPr/>
+        </p:nvSpPr>
+        <p:spPr>
+          <a:xfrm>
+            <a:off x="548640" y="5906516"/>
+            <a:ext cx="11094415" cy="416560"/>
+          </a:xfrm>
+          <a:prstGeom prst="roundRect">
+            <a:avLst>
+              <a:gd name="adj" fmla="val 8000"/>
+            </a:avLst>
+          </a:prstGeom>
+          <a:solidFill>
+            <a:srgbClr val="F3F6F9"/>
+          </a:solidFill>
+          <a:ln>
+            <a:noFill/>
+          </a:ln>
+        </p:spPr>
+        <p:txBody>
+          <a:bodyPr rtlCol="0" anchor="ctr"/>
+          <a:lstStyle/>
+          <a:p>
+            <a:pPr algn="ctr"/>
+          </a:p>
+        </p:txBody>
+      </p:sp>
+      <p:sp>
+        <p:nvSpPr>
+          <p:cNvPr id="34" name="TextBox 33"/>
+          <p:cNvSpPr txBox="1"/>
+          <p:nvPr/>
+        </p:nvSpPr>
+        <p:spPr>
+          <a:xfrm>
+            <a:off x="685800" y="5874512"/>
+            <a:ext cx="2514600" cy="480568"/>
+          </a:xfrm>
+          <a:prstGeom prst="rect">
+            <a:avLst/>
+          </a:prstGeom>
+          <a:noFill/>
+        </p:spPr>
+        <p:txBody>
+          <a:bodyPr wrap="square" anchor="ctr"/>
+          <a:lstStyle/>
+          <a:p>
+            <a:pPr algn="l" eaLnBrk="0">
+              <a:lnSpc>
+                <a:spcPct val="110000"/>
+              </a:lnSpc>
+            </a:pPr>
+            <a:r>
+              <a:rPr sz="1450" b="1">
+                <a:solidFill>
+                  <a:srgbClr val="13294B"/>
+                </a:solidFill>
+                <a:latin typeface="맑은 고딕"/>
+                <a:ea typeface="맑은 고딕"/>
+                <a:cs typeface="맑은 고딕"/>
+              </a:rPr>
+              <a:t>자리표시자</a:t>
+            </a:r>
+          </a:p>
+        </p:txBody>
+      </p:sp>
+      <p:sp>
+        <p:nvSpPr>
+          <p:cNvPr id="35" name="TextBox 34"/>
+          <p:cNvSpPr txBox="1"/>
+          <p:nvPr/>
+        </p:nvSpPr>
+        <p:spPr>
+          <a:xfrm>
+            <a:off x="3200400" y="5874512"/>
+            <a:ext cx="8351215" cy="480568"/>
+          </a:xfrm>
+          <a:prstGeom prst="rect">
+            <a:avLst/>
+          </a:prstGeom>
+          <a:noFill/>
+        </p:spPr>
+        <p:txBody>
+          <a:bodyPr wrap="square" anchor="ctr"/>
+          <a:lstStyle/>
+          <a:p>
+            <a:pPr algn="l" eaLnBrk="0">
+              <a:lnSpc>
+                <a:spcPct val="110000"/>
+              </a:lnSpc>
+            </a:pPr>
+            <a:r>
+              <a:rPr sz="1250" b="0">
+                <a:solidFill>
+                  <a:srgbClr val="1F2A3A"/>
+                </a:solidFill>
+                <a:latin typeface="맑은 고딕"/>
+                <a:ea typeface="맑은 고딕"/>
+                <a:cs typeface="맑은 고딕"/>
+              </a:rPr>
+              <a:t>Placeholder</a:t>
+            </a:r>
+          </a:p>
+          <a:p>
+            <a:pPr algn="l" eaLnBrk="0">
+              <a:lnSpc>
+                <a:spcPct val="110000"/>
+              </a:lnSpc>
+            </a:pPr>
+            <a:r>
+              <a:rPr sz="1250" b="0">
+                <a:solidFill>
+                  <a:srgbClr val="1F2A3A"/>
+                </a:solidFill>
+                <a:latin typeface="맑은 고딕"/>
+                <a:ea typeface="맑은 고딕"/>
+                <a:cs typeface="맑은 고딕"/>
+              </a:rPr>
+              <a:t>설정에 비밀값 대신 적어 두는 값의 이름과 자리</a:t>
             </a:r>
           </a:p>
         </p:txBody>
@@ -22346,6 +24269,3324 @@
 </p:sld>
 </file>
 
+<file path=ppt/slides/slide30.xml><?xml version="1.0" encoding="utf-8"?>
+<p:sld xmlns:a="http://schemas.openxmlformats.org/drawingml/2006/main" xmlns:p="http://schemas.openxmlformats.org/presentationml/2006/main" xmlns:r="http://schemas.openxmlformats.org/officeDocument/2006/relationships">
+  <p:cSld>
+    <p:bg>
+      <p:bgPr>
+        <a:solidFill>
+          <a:srgbClr val="E7F3FD"/>
+        </a:solidFill>
+        <a:effectLst/>
+      </p:bgPr>
+    </p:bg>
+    <p:spTree>
+      <p:nvGrpSpPr>
+        <p:cNvPr id="1" name=""/>
+        <p:cNvGrpSpPr/>
+        <p:nvPr/>
+      </p:nvGrpSpPr>
+      <p:grpSpPr/>
+      <p:sp>
+        <p:nvSpPr>
+          <p:cNvPr id="2" name="TextBox 1"/>
+          <p:cNvSpPr txBox="1"/>
+          <p:nvPr/>
+        </p:nvSpPr>
+        <p:spPr>
+          <a:xfrm>
+            <a:off x="457200" y="384048"/>
+            <a:ext cx="8229600" cy="457200"/>
+          </a:xfrm>
+          <a:prstGeom prst="rect">
+            <a:avLst/>
+          </a:prstGeom>
+          <a:noFill/>
+        </p:spPr>
+        <p:txBody>
+          <a:bodyPr wrap="square" anchor="t"/>
+          <a:lstStyle/>
+          <a:p>
+            <a:pPr algn="l" eaLnBrk="0">
+              <a:lnSpc>
+                <a:spcPct val="110000"/>
+              </a:lnSpc>
+            </a:pPr>
+            <a:r>
+              <a:rPr sz="2000" b="1">
+                <a:solidFill>
+                  <a:srgbClr val="5CB8F2"/>
+                </a:solidFill>
+                <a:latin typeface="맑은 고딕"/>
+                <a:ea typeface="맑은 고딕"/>
+                <a:cs typeface="맑은 고딕"/>
+              </a:rPr>
+              <a:t>경남대학교 피지컬AI 사관학교</a:t>
+            </a:r>
+          </a:p>
+        </p:txBody>
+      </p:sp>
+      <p:sp>
+        <p:nvSpPr>
+          <p:cNvPr id="3" name="Rectangle 2"/>
+          <p:cNvSpPr/>
+          <p:nvPr/>
+        </p:nvSpPr>
+        <p:spPr>
+          <a:xfrm>
+            <a:off x="548640" y="859536"/>
+            <a:ext cx="3606800" cy="41148"/>
+          </a:xfrm>
+          <a:prstGeom prst="rect">
+            <a:avLst/>
+          </a:prstGeom>
+          <a:solidFill>
+            <a:srgbClr val="5CB8F2"/>
+          </a:solidFill>
+          <a:ln>
+            <a:noFill/>
+          </a:ln>
+        </p:spPr>
+        <p:txBody>
+          <a:bodyPr rtlCol="0" anchor="ctr"/>
+          <a:lstStyle/>
+          <a:p>
+            <a:pPr algn="ctr"/>
+          </a:p>
+        </p:txBody>
+      </p:sp>
+      <p:sp>
+        <p:nvSpPr>
+          <p:cNvPr id="4" name="TextBox 3"/>
+          <p:cNvSpPr txBox="1"/>
+          <p:nvPr/>
+        </p:nvSpPr>
+        <p:spPr>
+          <a:xfrm>
+            <a:off x="731520" y="2011680"/>
+            <a:ext cx="10911535" cy="2011680"/>
+          </a:xfrm>
+          <a:prstGeom prst="rect">
+            <a:avLst/>
+          </a:prstGeom>
+          <a:noFill/>
+        </p:spPr>
+        <p:txBody>
+          <a:bodyPr wrap="square" anchor="ctr"/>
+          <a:lstStyle/>
+          <a:p>
+            <a:pPr algn="l" eaLnBrk="0">
+              <a:lnSpc>
+                <a:spcPct val="110000"/>
+              </a:lnSpc>
+            </a:pPr>
+            <a:r>
+              <a:rPr sz="3400" b="1">
+                <a:solidFill>
+                  <a:srgbClr val="13294B"/>
+                </a:solidFill>
+                <a:latin typeface="맑은 고딕"/>
+                <a:ea typeface="맑은 고딕"/>
+                <a:cs typeface="맑은 고딕"/>
+              </a:rPr>
+              <a:t>Review Quiz: 핵심 흐름 되짚어보기</a:t>
+            </a:r>
+          </a:p>
+        </p:txBody>
+      </p:sp>
+      <p:sp>
+        <p:nvSpPr>
+          <p:cNvPr id="5" name="TextBox 4"/>
+          <p:cNvSpPr txBox="1"/>
+          <p:nvPr/>
+        </p:nvSpPr>
+        <p:spPr>
+          <a:xfrm>
+            <a:off x="731520" y="4160520"/>
+            <a:ext cx="10911535" cy="457200"/>
+          </a:xfrm>
+          <a:prstGeom prst="rect">
+            <a:avLst/>
+          </a:prstGeom>
+          <a:noFill/>
+        </p:spPr>
+        <p:txBody>
+          <a:bodyPr wrap="square" anchor="t"/>
+          <a:lstStyle/>
+          <a:p>
+            <a:pPr algn="l" eaLnBrk="0">
+              <a:lnSpc>
+                <a:spcPct val="110000"/>
+              </a:lnSpc>
+            </a:pPr>
+            <a:r>
+              <a:rPr sz="1700" b="0">
+                <a:solidFill>
+                  <a:srgbClr val="556175"/>
+                </a:solidFill>
+                <a:latin typeface="맑은 고딕"/>
+                <a:ea typeface="맑은 고딕"/>
+                <a:cs typeface="맑은 고딕"/>
+              </a:rPr>
+              <a:t>배운 내용을 바탕으로 정답을 맞혀 보세요.</a:t>
+            </a:r>
+          </a:p>
+        </p:txBody>
+      </p:sp>
+    </p:spTree>
+  </p:cSld>
+  <p:clrMapOvr>
+    <a:masterClrMapping/>
+  </p:clrMapOvr>
+</p:sld>
+</file>
+
+<file path=ppt/slides/slide31.xml><?xml version="1.0" encoding="utf-8"?>
+<p:sld xmlns:a="http://schemas.openxmlformats.org/drawingml/2006/main" xmlns:p="http://schemas.openxmlformats.org/presentationml/2006/main" xmlns:r="http://schemas.openxmlformats.org/officeDocument/2006/relationships">
+  <p:cSld>
+    <p:bg>
+      <p:bgPr>
+        <a:solidFill>
+          <a:srgbClr val="FFFFFF"/>
+        </a:solidFill>
+        <a:effectLst/>
+      </p:bgPr>
+    </p:bg>
+    <p:spTree>
+      <p:nvGrpSpPr>
+        <p:cNvPr id="1" name=""/>
+        <p:cNvGrpSpPr/>
+        <p:nvPr/>
+      </p:nvGrpSpPr>
+      <p:grpSpPr/>
+      <p:sp>
+        <p:nvSpPr>
+          <p:cNvPr id="2" name="TextBox 1"/>
+          <p:cNvSpPr txBox="1"/>
+          <p:nvPr/>
+        </p:nvSpPr>
+        <p:spPr>
+          <a:xfrm>
+            <a:off x="457200" y="329184"/>
+            <a:ext cx="11277295" cy="603504"/>
+          </a:xfrm>
+          <a:prstGeom prst="rect">
+            <a:avLst/>
+          </a:prstGeom>
+          <a:noFill/>
+        </p:spPr>
+        <p:txBody>
+          <a:bodyPr wrap="square" anchor="ctr"/>
+          <a:lstStyle/>
+          <a:p>
+            <a:pPr algn="l" eaLnBrk="0">
+              <a:lnSpc>
+                <a:spcPct val="110000"/>
+              </a:lnSpc>
+            </a:pPr>
+            <a:r>
+              <a:rPr sz="2800" b="1">
+                <a:solidFill>
+                  <a:srgbClr val="13294B"/>
+                </a:solidFill>
+                <a:latin typeface="맑은 고딕"/>
+                <a:ea typeface="맑은 고딕"/>
+                <a:cs typeface="맑은 고딕"/>
+              </a:rPr>
+              <a:t>Quiz 1. 스킬에 적힌 조회가 실행되지 않은 까닭</a:t>
+            </a:r>
+          </a:p>
+        </p:txBody>
+      </p:sp>
+      <p:sp>
+        <p:nvSpPr>
+          <p:cNvPr id="3" name="TextBox 2"/>
+          <p:cNvSpPr txBox="1"/>
+          <p:nvPr/>
+        </p:nvSpPr>
+        <p:spPr>
+          <a:xfrm>
+            <a:off x="457200" y="932688"/>
+            <a:ext cx="11277295" cy="420624"/>
+          </a:xfrm>
+          <a:prstGeom prst="rect">
+            <a:avLst/>
+          </a:prstGeom>
+          <a:noFill/>
+        </p:spPr>
+        <p:txBody>
+          <a:bodyPr wrap="square" anchor="ctr"/>
+          <a:lstStyle/>
+          <a:p>
+            <a:pPr algn="l" eaLnBrk="0">
+              <a:lnSpc>
+                <a:spcPct val="110000"/>
+              </a:lnSpc>
+            </a:pPr>
+            <a:r>
+              <a:rPr sz="1600" b="0">
+                <a:solidFill>
+                  <a:srgbClr val="556175"/>
+                </a:solidFill>
+                <a:latin typeface="맑은 고딕"/>
+                <a:ea typeface="맑은 고딕"/>
+                <a:cs typeface="맑은 고딕"/>
+              </a:rPr>
+              <a:t>스킬에 mes_orders 직접 호출이 있지만, 연결된 서버는 neo4j와 hyd-dmn뿐이며 그 도구는 제공되지 않는다.</a:t>
+            </a:r>
+          </a:p>
+        </p:txBody>
+      </p:sp>
+      <p:sp>
+        <p:nvSpPr>
+          <p:cNvPr id="4" name="Rectangle 3"/>
+          <p:cNvSpPr/>
+          <p:nvPr/>
+        </p:nvSpPr>
+        <p:spPr>
+          <a:xfrm>
+            <a:off x="548640" y="1408176"/>
+            <a:ext cx="11094415" cy="18288"/>
+          </a:xfrm>
+          <a:prstGeom prst="rect">
+            <a:avLst/>
+          </a:prstGeom>
+          <a:solidFill>
+            <a:srgbClr val="D3D9E1"/>
+          </a:solidFill>
+          <a:ln>
+            <a:noFill/>
+          </a:ln>
+        </p:spPr>
+        <p:txBody>
+          <a:bodyPr rtlCol="0" anchor="ctr"/>
+          <a:lstStyle/>
+          <a:p>
+            <a:pPr algn="ctr"/>
+          </a:p>
+        </p:txBody>
+      </p:sp>
+      <p:sp>
+        <p:nvSpPr>
+          <p:cNvPr id="5" name="TextBox 4"/>
+          <p:cNvSpPr txBox="1"/>
+          <p:nvPr/>
+        </p:nvSpPr>
+        <p:spPr>
+          <a:xfrm>
+            <a:off x="10911535" y="6473952"/>
+            <a:ext cx="822960" cy="274320"/>
+          </a:xfrm>
+          <a:prstGeom prst="rect">
+            <a:avLst/>
+          </a:prstGeom>
+          <a:noFill/>
+        </p:spPr>
+        <p:txBody>
+          <a:bodyPr wrap="square" anchor="t"/>
+          <a:lstStyle/>
+          <a:p>
+            <a:pPr algn="r" eaLnBrk="0">
+              <a:lnSpc>
+                <a:spcPct val="110000"/>
+              </a:lnSpc>
+            </a:pPr>
+            <a:r>
+              <a:rPr sz="1000" b="0">
+                <a:solidFill>
+                  <a:srgbClr val="556175"/>
+                </a:solidFill>
+                <a:latin typeface="맑은 고딕"/>
+                <a:ea typeface="맑은 고딕"/>
+                <a:cs typeface="맑은 고딕"/>
+              </a:rPr>
+              <a:t>31</a:t>
+            </a:r>
+          </a:p>
+        </p:txBody>
+      </p:sp>
+      <p:sp>
+        <p:nvSpPr>
+          <p:cNvPr id="6" name="Rounded Rectangle 5"/>
+          <p:cNvSpPr/>
+          <p:nvPr/>
+        </p:nvSpPr>
+        <p:spPr>
+          <a:xfrm>
+            <a:off x="548640" y="1627632"/>
+            <a:ext cx="11094415" cy="704088"/>
+          </a:xfrm>
+          <a:prstGeom prst="roundRect">
+            <a:avLst>
+              <a:gd name="adj" fmla="val 5000"/>
+            </a:avLst>
+          </a:prstGeom>
+          <a:solidFill>
+            <a:srgbClr val="E7F3FD"/>
+          </a:solidFill>
+          <a:ln>
+            <a:noFill/>
+          </a:ln>
+        </p:spPr>
+        <p:txBody>
+          <a:bodyPr rtlCol="0" anchor="ctr"/>
+          <a:lstStyle/>
+          <a:p>
+            <a:pPr algn="ctr"/>
+          </a:p>
+        </p:txBody>
+      </p:sp>
+      <p:sp>
+        <p:nvSpPr>
+          <p:cNvPr id="7" name="TextBox 6"/>
+          <p:cNvSpPr txBox="1"/>
+          <p:nvPr/>
+        </p:nvSpPr>
+        <p:spPr>
+          <a:xfrm>
+            <a:off x="777240" y="1627632"/>
+            <a:ext cx="10637215" cy="704088"/>
+          </a:xfrm>
+          <a:prstGeom prst="rect">
+            <a:avLst/>
+          </a:prstGeom>
+          <a:noFill/>
+        </p:spPr>
+        <p:txBody>
+          <a:bodyPr wrap="square" anchor="ctr"/>
+          <a:lstStyle/>
+          <a:p>
+            <a:pPr algn="l" eaLnBrk="0">
+              <a:lnSpc>
+                <a:spcPct val="110000"/>
+              </a:lnSpc>
+            </a:pPr>
+            <a:r>
+              <a:rPr sz="1900" b="1">
+                <a:solidFill>
+                  <a:srgbClr val="13294B"/>
+                </a:solidFill>
+                <a:latin typeface="맑은 고딕"/>
+                <a:ea typeface="맑은 고딕"/>
+                <a:cs typeface="맑은 고딕"/>
+              </a:rPr>
+              <a:t>먼저 고칠 곳으로 가장 알맞은 것은?</a:t>
+            </a:r>
+          </a:p>
+        </p:txBody>
+      </p:sp>
+      <p:sp>
+        <p:nvSpPr>
+          <p:cNvPr id="8" name="Rounded Rectangle 7"/>
+          <p:cNvSpPr/>
+          <p:nvPr/>
+        </p:nvSpPr>
+        <p:spPr>
+          <a:xfrm>
+            <a:off x="548640" y="2560320"/>
+            <a:ext cx="11094415" cy="822960"/>
+          </a:xfrm>
+          <a:prstGeom prst="roundRect">
+            <a:avLst>
+              <a:gd name="adj" fmla="val 8000"/>
+            </a:avLst>
+          </a:prstGeom>
+          <a:solidFill>
+            <a:srgbClr val="F3F6F9"/>
+          </a:solidFill>
+          <a:ln>
+            <a:noFill/>
+          </a:ln>
+        </p:spPr>
+        <p:txBody>
+          <a:bodyPr rtlCol="0" anchor="ctr"/>
+          <a:lstStyle/>
+          <a:p>
+            <a:pPr algn="ctr"/>
+          </a:p>
+        </p:txBody>
+      </p:sp>
+      <p:sp>
+        <p:nvSpPr>
+          <p:cNvPr id="9" name="Oval 8"/>
+          <p:cNvSpPr/>
+          <p:nvPr/>
+        </p:nvSpPr>
+        <p:spPr>
+          <a:xfrm>
+            <a:off x="731520" y="2788920"/>
+            <a:ext cx="365760" cy="365760"/>
+          </a:xfrm>
+          <a:prstGeom prst="ellipse">
+            <a:avLst/>
+          </a:prstGeom>
+          <a:solidFill>
+            <a:srgbClr val="13294B"/>
+          </a:solidFill>
+          <a:ln>
+            <a:noFill/>
+          </a:ln>
+        </p:spPr>
+        <p:txBody>
+          <a:bodyPr rtlCol="0" anchor="ctr"/>
+          <a:lstStyle/>
+          <a:p>
+            <a:pPr algn="ctr"/>
+          </a:p>
+        </p:txBody>
+      </p:sp>
+      <p:sp>
+        <p:nvSpPr>
+          <p:cNvPr id="10" name="TextBox 9"/>
+          <p:cNvSpPr txBox="1"/>
+          <p:nvPr/>
+        </p:nvSpPr>
+        <p:spPr>
+          <a:xfrm>
+            <a:off x="731520" y="2788920"/>
+            <a:ext cx="365760" cy="365760"/>
+          </a:xfrm>
+          <a:prstGeom prst="rect">
+            <a:avLst/>
+          </a:prstGeom>
+          <a:noFill/>
+        </p:spPr>
+        <p:txBody>
+          <a:bodyPr wrap="square" anchor="ctr"/>
+          <a:lstStyle/>
+          <a:p>
+            <a:pPr algn="ctr" eaLnBrk="0">
+              <a:lnSpc>
+                <a:spcPct val="110000"/>
+              </a:lnSpc>
+            </a:pPr>
+            <a:r>
+              <a:rPr sz="1300" b="1">
+                <a:solidFill>
+                  <a:srgbClr val="FFFFFF"/>
+                </a:solidFill>
+                <a:latin typeface="맑은 고딕"/>
+                <a:ea typeface="맑은 고딕"/>
+                <a:cs typeface="맑은 고딕"/>
+              </a:rPr>
+              <a:t>1</a:t>
+            </a:r>
+          </a:p>
+        </p:txBody>
+      </p:sp>
+      <p:sp>
+        <p:nvSpPr>
+          <p:cNvPr id="11" name="TextBox 10"/>
+          <p:cNvSpPr txBox="1"/>
+          <p:nvPr/>
+        </p:nvSpPr>
+        <p:spPr>
+          <a:xfrm>
+            <a:off x="1234440" y="2514600"/>
+            <a:ext cx="10225735" cy="914400"/>
+          </a:xfrm>
+          <a:prstGeom prst="rect">
+            <a:avLst/>
+          </a:prstGeom>
+          <a:noFill/>
+        </p:spPr>
+        <p:txBody>
+          <a:bodyPr wrap="square" anchor="ctr"/>
+          <a:lstStyle/>
+          <a:p>
+            <a:pPr algn="l" eaLnBrk="0">
+              <a:lnSpc>
+                <a:spcPct val="110000"/>
+              </a:lnSpc>
+            </a:pPr>
+            <a:r>
+              <a:rPr sz="1550" b="1">
+                <a:solidFill>
+                  <a:srgbClr val="1F2A3A"/>
+                </a:solidFill>
+                <a:latin typeface="맑은 고딕"/>
+                <a:ea typeface="맑은 고딕"/>
+                <a:cs typeface="맑은 고딕"/>
+              </a:rPr>
+              <a:t>스킬의 절차에 mes_orders의 입력 스키마를 옮겨 적는다</a:t>
+            </a:r>
+          </a:p>
+        </p:txBody>
+      </p:sp>
+      <p:sp>
+        <p:nvSpPr>
+          <p:cNvPr id="12" name="Rounded Rectangle 11"/>
+          <p:cNvSpPr/>
+          <p:nvPr/>
+        </p:nvSpPr>
+        <p:spPr>
+          <a:xfrm>
+            <a:off x="548640" y="3474720"/>
+            <a:ext cx="11094415" cy="822960"/>
+          </a:xfrm>
+          <a:prstGeom prst="roundRect">
+            <a:avLst>
+              <a:gd name="adj" fmla="val 8000"/>
+            </a:avLst>
+          </a:prstGeom>
+          <a:solidFill>
+            <a:srgbClr val="F3F6F9"/>
+          </a:solidFill>
+          <a:ln>
+            <a:noFill/>
+          </a:ln>
+        </p:spPr>
+        <p:txBody>
+          <a:bodyPr rtlCol="0" anchor="ctr"/>
+          <a:lstStyle/>
+          <a:p>
+            <a:pPr algn="ctr"/>
+          </a:p>
+        </p:txBody>
+      </p:sp>
+      <p:sp>
+        <p:nvSpPr>
+          <p:cNvPr id="13" name="Oval 12"/>
+          <p:cNvSpPr/>
+          <p:nvPr/>
+        </p:nvSpPr>
+        <p:spPr>
+          <a:xfrm>
+            <a:off x="731520" y="3703320"/>
+            <a:ext cx="365760" cy="365760"/>
+          </a:xfrm>
+          <a:prstGeom prst="ellipse">
+            <a:avLst/>
+          </a:prstGeom>
+          <a:solidFill>
+            <a:srgbClr val="13294B"/>
+          </a:solidFill>
+          <a:ln>
+            <a:noFill/>
+          </a:ln>
+        </p:spPr>
+        <p:txBody>
+          <a:bodyPr rtlCol="0" anchor="ctr"/>
+          <a:lstStyle/>
+          <a:p>
+            <a:pPr algn="ctr"/>
+          </a:p>
+        </p:txBody>
+      </p:sp>
+      <p:sp>
+        <p:nvSpPr>
+          <p:cNvPr id="14" name="TextBox 13"/>
+          <p:cNvSpPr txBox="1"/>
+          <p:nvPr/>
+        </p:nvSpPr>
+        <p:spPr>
+          <a:xfrm>
+            <a:off x="731520" y="3703320"/>
+            <a:ext cx="365760" cy="365760"/>
+          </a:xfrm>
+          <a:prstGeom prst="rect">
+            <a:avLst/>
+          </a:prstGeom>
+          <a:noFill/>
+        </p:spPr>
+        <p:txBody>
+          <a:bodyPr wrap="square" anchor="ctr"/>
+          <a:lstStyle/>
+          <a:p>
+            <a:pPr algn="ctr" eaLnBrk="0">
+              <a:lnSpc>
+                <a:spcPct val="110000"/>
+              </a:lnSpc>
+            </a:pPr>
+            <a:r>
+              <a:rPr sz="1300" b="1">
+                <a:solidFill>
+                  <a:srgbClr val="FFFFFF"/>
+                </a:solidFill>
+                <a:latin typeface="맑은 고딕"/>
+                <a:ea typeface="맑은 고딕"/>
+                <a:cs typeface="맑은 고딕"/>
+              </a:rPr>
+              <a:t>2</a:t>
+            </a:r>
+          </a:p>
+        </p:txBody>
+      </p:sp>
+      <p:sp>
+        <p:nvSpPr>
+          <p:cNvPr id="15" name="TextBox 14"/>
+          <p:cNvSpPr txBox="1"/>
+          <p:nvPr/>
+        </p:nvSpPr>
+        <p:spPr>
+          <a:xfrm>
+            <a:off x="1234440" y="3429000"/>
+            <a:ext cx="10225735" cy="914400"/>
+          </a:xfrm>
+          <a:prstGeom prst="rect">
+            <a:avLst/>
+          </a:prstGeom>
+          <a:noFill/>
+        </p:spPr>
+        <p:txBody>
+          <a:bodyPr wrap="square" anchor="ctr"/>
+          <a:lstStyle/>
+          <a:p>
+            <a:pPr algn="l" eaLnBrk="0">
+              <a:lnSpc>
+                <a:spcPct val="110000"/>
+              </a:lnSpc>
+            </a:pPr>
+            <a:r>
+              <a:rPr sz="1550" b="1">
+                <a:solidFill>
+                  <a:srgbClr val="1F2A3A"/>
+                </a:solidFill>
+                <a:latin typeface="맑은 고딕"/>
+                <a:ea typeface="맑은 고딕"/>
+                <a:cs typeface="맑은 고딕"/>
+              </a:rPr>
+              <a:t>에이전트에 업무 DB 서버 enterprise를 연결한다</a:t>
+            </a:r>
+          </a:p>
+        </p:txBody>
+      </p:sp>
+      <p:sp>
+        <p:nvSpPr>
+          <p:cNvPr id="16" name="Rounded Rectangle 15"/>
+          <p:cNvSpPr/>
+          <p:nvPr/>
+        </p:nvSpPr>
+        <p:spPr>
+          <a:xfrm>
+            <a:off x="548640" y="4389120"/>
+            <a:ext cx="11094415" cy="822960"/>
+          </a:xfrm>
+          <a:prstGeom prst="roundRect">
+            <a:avLst>
+              <a:gd name="adj" fmla="val 8000"/>
+            </a:avLst>
+          </a:prstGeom>
+          <a:solidFill>
+            <a:srgbClr val="F3F6F9"/>
+          </a:solidFill>
+          <a:ln>
+            <a:noFill/>
+          </a:ln>
+        </p:spPr>
+        <p:txBody>
+          <a:bodyPr rtlCol="0" anchor="ctr"/>
+          <a:lstStyle/>
+          <a:p>
+            <a:pPr algn="ctr"/>
+          </a:p>
+        </p:txBody>
+      </p:sp>
+      <p:sp>
+        <p:nvSpPr>
+          <p:cNvPr id="17" name="Oval 16"/>
+          <p:cNvSpPr/>
+          <p:nvPr/>
+        </p:nvSpPr>
+        <p:spPr>
+          <a:xfrm>
+            <a:off x="731520" y="4617720"/>
+            <a:ext cx="365760" cy="365760"/>
+          </a:xfrm>
+          <a:prstGeom prst="ellipse">
+            <a:avLst/>
+          </a:prstGeom>
+          <a:solidFill>
+            <a:srgbClr val="13294B"/>
+          </a:solidFill>
+          <a:ln>
+            <a:noFill/>
+          </a:ln>
+        </p:spPr>
+        <p:txBody>
+          <a:bodyPr rtlCol="0" anchor="ctr"/>
+          <a:lstStyle/>
+          <a:p>
+            <a:pPr algn="ctr"/>
+          </a:p>
+        </p:txBody>
+      </p:sp>
+      <p:sp>
+        <p:nvSpPr>
+          <p:cNvPr id="18" name="TextBox 17"/>
+          <p:cNvSpPr txBox="1"/>
+          <p:nvPr/>
+        </p:nvSpPr>
+        <p:spPr>
+          <a:xfrm>
+            <a:off x="731520" y="4617720"/>
+            <a:ext cx="365760" cy="365760"/>
+          </a:xfrm>
+          <a:prstGeom prst="rect">
+            <a:avLst/>
+          </a:prstGeom>
+          <a:noFill/>
+        </p:spPr>
+        <p:txBody>
+          <a:bodyPr wrap="square" anchor="ctr"/>
+          <a:lstStyle/>
+          <a:p>
+            <a:pPr algn="ctr" eaLnBrk="0">
+              <a:lnSpc>
+                <a:spcPct val="110000"/>
+              </a:lnSpc>
+            </a:pPr>
+            <a:r>
+              <a:rPr sz="1300" b="1">
+                <a:solidFill>
+                  <a:srgbClr val="FFFFFF"/>
+                </a:solidFill>
+                <a:latin typeface="맑은 고딕"/>
+                <a:ea typeface="맑은 고딕"/>
+                <a:cs typeface="맑은 고딕"/>
+              </a:rPr>
+              <a:t>3</a:t>
+            </a:r>
+          </a:p>
+        </p:txBody>
+      </p:sp>
+      <p:sp>
+        <p:nvSpPr>
+          <p:cNvPr id="19" name="TextBox 18"/>
+          <p:cNvSpPr txBox="1"/>
+          <p:nvPr/>
+        </p:nvSpPr>
+        <p:spPr>
+          <a:xfrm>
+            <a:off x="1234440" y="4343400"/>
+            <a:ext cx="10225735" cy="914400"/>
+          </a:xfrm>
+          <a:prstGeom prst="rect">
+            <a:avLst/>
+          </a:prstGeom>
+          <a:noFill/>
+        </p:spPr>
+        <p:txBody>
+          <a:bodyPr wrap="square" anchor="ctr"/>
+          <a:lstStyle/>
+          <a:p>
+            <a:pPr algn="l" eaLnBrk="0">
+              <a:lnSpc>
+                <a:spcPct val="110000"/>
+              </a:lnSpc>
+            </a:pPr>
+            <a:r>
+              <a:rPr sz="1550" b="1">
+                <a:solidFill>
+                  <a:srgbClr val="1F2A3A"/>
+                </a:solidFill>
+                <a:latin typeface="맑은 고딕"/>
+                <a:ea typeface="맑은 고딕"/>
+                <a:cs typeface="맑은 고딕"/>
+              </a:rPr>
+              <a:t>스킬의 description을 더 자세히 고쳐 쓴다</a:t>
+            </a:r>
+          </a:p>
+        </p:txBody>
+      </p:sp>
+      <p:sp>
+        <p:nvSpPr>
+          <p:cNvPr id="20" name="Rounded Rectangle 19"/>
+          <p:cNvSpPr/>
+          <p:nvPr/>
+        </p:nvSpPr>
+        <p:spPr>
+          <a:xfrm>
+            <a:off x="548640" y="5303520"/>
+            <a:ext cx="11094415" cy="822960"/>
+          </a:xfrm>
+          <a:prstGeom prst="roundRect">
+            <a:avLst>
+              <a:gd name="adj" fmla="val 8000"/>
+            </a:avLst>
+          </a:prstGeom>
+          <a:solidFill>
+            <a:srgbClr val="F3F6F9"/>
+          </a:solidFill>
+          <a:ln>
+            <a:noFill/>
+          </a:ln>
+        </p:spPr>
+        <p:txBody>
+          <a:bodyPr rtlCol="0" anchor="ctr"/>
+          <a:lstStyle/>
+          <a:p>
+            <a:pPr algn="ctr"/>
+          </a:p>
+        </p:txBody>
+      </p:sp>
+      <p:sp>
+        <p:nvSpPr>
+          <p:cNvPr id="21" name="Oval 20"/>
+          <p:cNvSpPr/>
+          <p:nvPr/>
+        </p:nvSpPr>
+        <p:spPr>
+          <a:xfrm>
+            <a:off x="731520" y="5532120"/>
+            <a:ext cx="365760" cy="365760"/>
+          </a:xfrm>
+          <a:prstGeom prst="ellipse">
+            <a:avLst/>
+          </a:prstGeom>
+          <a:solidFill>
+            <a:srgbClr val="13294B"/>
+          </a:solidFill>
+          <a:ln>
+            <a:noFill/>
+          </a:ln>
+        </p:spPr>
+        <p:txBody>
+          <a:bodyPr rtlCol="0" anchor="ctr"/>
+          <a:lstStyle/>
+          <a:p>
+            <a:pPr algn="ctr"/>
+          </a:p>
+        </p:txBody>
+      </p:sp>
+      <p:sp>
+        <p:nvSpPr>
+          <p:cNvPr id="22" name="TextBox 21"/>
+          <p:cNvSpPr txBox="1"/>
+          <p:nvPr/>
+        </p:nvSpPr>
+        <p:spPr>
+          <a:xfrm>
+            <a:off x="731520" y="5532120"/>
+            <a:ext cx="365760" cy="365760"/>
+          </a:xfrm>
+          <a:prstGeom prst="rect">
+            <a:avLst/>
+          </a:prstGeom>
+          <a:noFill/>
+        </p:spPr>
+        <p:txBody>
+          <a:bodyPr wrap="square" anchor="ctr"/>
+          <a:lstStyle/>
+          <a:p>
+            <a:pPr algn="ctr" eaLnBrk="0">
+              <a:lnSpc>
+                <a:spcPct val="110000"/>
+              </a:lnSpc>
+            </a:pPr>
+            <a:r>
+              <a:rPr sz="1300" b="1">
+                <a:solidFill>
+                  <a:srgbClr val="FFFFFF"/>
+                </a:solidFill>
+                <a:latin typeface="맑은 고딕"/>
+                <a:ea typeface="맑은 고딕"/>
+                <a:cs typeface="맑은 고딕"/>
+              </a:rPr>
+              <a:t>4</a:t>
+            </a:r>
+          </a:p>
+        </p:txBody>
+      </p:sp>
+      <p:sp>
+        <p:nvSpPr>
+          <p:cNvPr id="23" name="TextBox 22"/>
+          <p:cNvSpPr txBox="1"/>
+          <p:nvPr/>
+        </p:nvSpPr>
+        <p:spPr>
+          <a:xfrm>
+            <a:off x="1234440" y="5257800"/>
+            <a:ext cx="10225735" cy="914400"/>
+          </a:xfrm>
+          <a:prstGeom prst="rect">
+            <a:avLst/>
+          </a:prstGeom>
+          <a:noFill/>
+        </p:spPr>
+        <p:txBody>
+          <a:bodyPr wrap="square" anchor="ctr"/>
+          <a:lstStyle/>
+          <a:p>
+            <a:pPr algn="l" eaLnBrk="0">
+              <a:lnSpc>
+                <a:spcPct val="110000"/>
+              </a:lnSpc>
+            </a:pPr>
+            <a:r>
+              <a:rPr sz="1550" b="1">
+                <a:solidFill>
+                  <a:srgbClr val="1F2A3A"/>
+                </a:solidFill>
+                <a:latin typeface="맑은 고딕"/>
+                <a:ea typeface="맑은 고딕"/>
+                <a:cs typeface="맑은 고딕"/>
+              </a:rPr>
+              <a:t>허용 목록에서 hyd-dmn의 도구를 뺀다</a:t>
+            </a:r>
+          </a:p>
+        </p:txBody>
+      </p:sp>
+    </p:spTree>
+  </p:cSld>
+  <p:clrMapOvr>
+    <a:masterClrMapping/>
+  </p:clrMapOvr>
+</p:sld>
+</file>
+
+<file path=ppt/slides/slide32.xml><?xml version="1.0" encoding="utf-8"?>
+<p:sld xmlns:a="http://schemas.openxmlformats.org/drawingml/2006/main" xmlns:p="http://schemas.openxmlformats.org/presentationml/2006/main" xmlns:r="http://schemas.openxmlformats.org/officeDocument/2006/relationships">
+  <p:cSld>
+    <p:bg>
+      <p:bgPr>
+        <a:solidFill>
+          <a:srgbClr val="FFFFFF"/>
+        </a:solidFill>
+        <a:effectLst/>
+      </p:bgPr>
+    </p:bg>
+    <p:spTree>
+      <p:nvGrpSpPr>
+        <p:cNvPr id="1" name=""/>
+        <p:cNvGrpSpPr/>
+        <p:nvPr/>
+      </p:nvGrpSpPr>
+      <p:grpSpPr/>
+      <p:sp>
+        <p:nvSpPr>
+          <p:cNvPr id="2" name="TextBox 1"/>
+          <p:cNvSpPr txBox="1"/>
+          <p:nvPr/>
+        </p:nvSpPr>
+        <p:spPr>
+          <a:xfrm>
+            <a:off x="457200" y="329184"/>
+            <a:ext cx="11277295" cy="603504"/>
+          </a:xfrm>
+          <a:prstGeom prst="rect">
+            <a:avLst/>
+          </a:prstGeom>
+          <a:noFill/>
+        </p:spPr>
+        <p:txBody>
+          <a:bodyPr wrap="square" anchor="ctr"/>
+          <a:lstStyle/>
+          <a:p>
+            <a:pPr algn="l" eaLnBrk="0">
+              <a:lnSpc>
+                <a:spcPct val="110000"/>
+              </a:lnSpc>
+            </a:pPr>
+            <a:r>
+              <a:rPr sz="2800" b="1">
+                <a:solidFill>
+                  <a:srgbClr val="13294B"/>
+                </a:solidFill>
+                <a:latin typeface="맑은 고딕"/>
+                <a:ea typeface="맑은 고딕"/>
+                <a:cs typeface="맑은 고딕"/>
+              </a:rPr>
+              <a:t>Quiz 2. 시간을 넘긴 재고 조회</a:t>
+            </a:r>
+          </a:p>
+        </p:txBody>
+      </p:sp>
+      <p:sp>
+        <p:nvSpPr>
+          <p:cNvPr id="3" name="TextBox 2"/>
+          <p:cNvSpPr txBox="1"/>
+          <p:nvPr/>
+        </p:nvSpPr>
+        <p:spPr>
+          <a:xfrm>
+            <a:off x="457200" y="932688"/>
+            <a:ext cx="11277295" cy="420624"/>
+          </a:xfrm>
+          <a:prstGeom prst="rect">
+            <a:avLst/>
+          </a:prstGeom>
+          <a:noFill/>
+        </p:spPr>
+        <p:txBody>
+          <a:bodyPr wrap="square" anchor="ctr"/>
+          <a:lstStyle/>
+          <a:p>
+            <a:pPr algn="l" eaLnBrk="0">
+              <a:lnSpc>
+                <a:spcPct val="110000"/>
+              </a:lnSpc>
+            </a:pPr>
+            <a:r>
+              <a:rPr sz="1600" b="0">
+                <a:solidFill>
+                  <a:srgbClr val="556175"/>
+                </a:solidFill>
+                <a:latin typeface="맑은 고딕"/>
+                <a:ea typeface="맑은 고딕"/>
+                <a:cs typeface="맑은 고딕"/>
+              </a:rPr>
+              <a:t>예비품 재고 조회가 제한 시간 안에 끝나지 않아, 포털이 시간 초과로 결과를 받지 못했다고 알렸다.</a:t>
+            </a:r>
+          </a:p>
+        </p:txBody>
+      </p:sp>
+      <p:sp>
+        <p:nvSpPr>
+          <p:cNvPr id="4" name="Rectangle 3"/>
+          <p:cNvSpPr/>
+          <p:nvPr/>
+        </p:nvSpPr>
+        <p:spPr>
+          <a:xfrm>
+            <a:off x="548640" y="1408176"/>
+            <a:ext cx="11094415" cy="18288"/>
+          </a:xfrm>
+          <a:prstGeom prst="rect">
+            <a:avLst/>
+          </a:prstGeom>
+          <a:solidFill>
+            <a:srgbClr val="D3D9E1"/>
+          </a:solidFill>
+          <a:ln>
+            <a:noFill/>
+          </a:ln>
+        </p:spPr>
+        <p:txBody>
+          <a:bodyPr rtlCol="0" anchor="ctr"/>
+          <a:lstStyle/>
+          <a:p>
+            <a:pPr algn="ctr"/>
+          </a:p>
+        </p:txBody>
+      </p:sp>
+      <p:sp>
+        <p:nvSpPr>
+          <p:cNvPr id="5" name="TextBox 4"/>
+          <p:cNvSpPr txBox="1"/>
+          <p:nvPr/>
+        </p:nvSpPr>
+        <p:spPr>
+          <a:xfrm>
+            <a:off x="10911535" y="6473952"/>
+            <a:ext cx="822960" cy="274320"/>
+          </a:xfrm>
+          <a:prstGeom prst="rect">
+            <a:avLst/>
+          </a:prstGeom>
+          <a:noFill/>
+        </p:spPr>
+        <p:txBody>
+          <a:bodyPr wrap="square" anchor="t"/>
+          <a:lstStyle/>
+          <a:p>
+            <a:pPr algn="r" eaLnBrk="0">
+              <a:lnSpc>
+                <a:spcPct val="110000"/>
+              </a:lnSpc>
+            </a:pPr>
+            <a:r>
+              <a:rPr sz="1000" b="0">
+                <a:solidFill>
+                  <a:srgbClr val="556175"/>
+                </a:solidFill>
+                <a:latin typeface="맑은 고딕"/>
+                <a:ea typeface="맑은 고딕"/>
+                <a:cs typeface="맑은 고딕"/>
+              </a:rPr>
+              <a:t>32</a:t>
+            </a:r>
+          </a:p>
+        </p:txBody>
+      </p:sp>
+      <p:sp>
+        <p:nvSpPr>
+          <p:cNvPr id="6" name="Rounded Rectangle 5"/>
+          <p:cNvSpPr/>
+          <p:nvPr/>
+        </p:nvSpPr>
+        <p:spPr>
+          <a:xfrm>
+            <a:off x="548640" y="1627632"/>
+            <a:ext cx="11094415" cy="704088"/>
+          </a:xfrm>
+          <a:prstGeom prst="roundRect">
+            <a:avLst>
+              <a:gd name="adj" fmla="val 5000"/>
+            </a:avLst>
+          </a:prstGeom>
+          <a:solidFill>
+            <a:srgbClr val="E7F3FD"/>
+          </a:solidFill>
+          <a:ln>
+            <a:noFill/>
+          </a:ln>
+        </p:spPr>
+        <p:txBody>
+          <a:bodyPr rtlCol="0" anchor="ctr"/>
+          <a:lstStyle/>
+          <a:p>
+            <a:pPr algn="ctr"/>
+          </a:p>
+        </p:txBody>
+      </p:sp>
+      <p:sp>
+        <p:nvSpPr>
+          <p:cNvPr id="7" name="TextBox 6"/>
+          <p:cNvSpPr txBox="1"/>
+          <p:nvPr/>
+        </p:nvSpPr>
+        <p:spPr>
+          <a:xfrm>
+            <a:off x="777240" y="1627632"/>
+            <a:ext cx="10637215" cy="704088"/>
+          </a:xfrm>
+          <a:prstGeom prst="rect">
+            <a:avLst/>
+          </a:prstGeom>
+          <a:noFill/>
+        </p:spPr>
+        <p:txBody>
+          <a:bodyPr wrap="square" anchor="ctr"/>
+          <a:lstStyle/>
+          <a:p>
+            <a:pPr algn="l" eaLnBrk="0">
+              <a:lnSpc>
+                <a:spcPct val="110000"/>
+              </a:lnSpc>
+            </a:pPr>
+            <a:r>
+              <a:rPr sz="1900" b="1">
+                <a:solidFill>
+                  <a:srgbClr val="13294B"/>
+                </a:solidFill>
+                <a:latin typeface="맑은 고딕"/>
+                <a:ea typeface="맑은 고딕"/>
+                <a:cs typeface="맑은 고딕"/>
+              </a:rPr>
+              <a:t>결과에 적을 내용으로 가장 알맞은 것은?</a:t>
+            </a:r>
+          </a:p>
+        </p:txBody>
+      </p:sp>
+      <p:sp>
+        <p:nvSpPr>
+          <p:cNvPr id="8" name="Rounded Rectangle 7"/>
+          <p:cNvSpPr/>
+          <p:nvPr/>
+        </p:nvSpPr>
+        <p:spPr>
+          <a:xfrm>
+            <a:off x="548640" y="2560320"/>
+            <a:ext cx="11094415" cy="822960"/>
+          </a:xfrm>
+          <a:prstGeom prst="roundRect">
+            <a:avLst>
+              <a:gd name="adj" fmla="val 8000"/>
+            </a:avLst>
+          </a:prstGeom>
+          <a:solidFill>
+            <a:srgbClr val="F3F6F9"/>
+          </a:solidFill>
+          <a:ln>
+            <a:noFill/>
+          </a:ln>
+        </p:spPr>
+        <p:txBody>
+          <a:bodyPr rtlCol="0" anchor="ctr"/>
+          <a:lstStyle/>
+          <a:p>
+            <a:pPr algn="ctr"/>
+          </a:p>
+        </p:txBody>
+      </p:sp>
+      <p:sp>
+        <p:nvSpPr>
+          <p:cNvPr id="9" name="Oval 8"/>
+          <p:cNvSpPr/>
+          <p:nvPr/>
+        </p:nvSpPr>
+        <p:spPr>
+          <a:xfrm>
+            <a:off x="731520" y="2788920"/>
+            <a:ext cx="365760" cy="365760"/>
+          </a:xfrm>
+          <a:prstGeom prst="ellipse">
+            <a:avLst/>
+          </a:prstGeom>
+          <a:solidFill>
+            <a:srgbClr val="13294B"/>
+          </a:solidFill>
+          <a:ln>
+            <a:noFill/>
+          </a:ln>
+        </p:spPr>
+        <p:txBody>
+          <a:bodyPr rtlCol="0" anchor="ctr"/>
+          <a:lstStyle/>
+          <a:p>
+            <a:pPr algn="ctr"/>
+          </a:p>
+        </p:txBody>
+      </p:sp>
+      <p:sp>
+        <p:nvSpPr>
+          <p:cNvPr id="10" name="TextBox 9"/>
+          <p:cNvSpPr txBox="1"/>
+          <p:nvPr/>
+        </p:nvSpPr>
+        <p:spPr>
+          <a:xfrm>
+            <a:off x="731520" y="2788920"/>
+            <a:ext cx="365760" cy="365760"/>
+          </a:xfrm>
+          <a:prstGeom prst="rect">
+            <a:avLst/>
+          </a:prstGeom>
+          <a:noFill/>
+        </p:spPr>
+        <p:txBody>
+          <a:bodyPr wrap="square" anchor="ctr"/>
+          <a:lstStyle/>
+          <a:p>
+            <a:pPr algn="ctr" eaLnBrk="0">
+              <a:lnSpc>
+                <a:spcPct val="110000"/>
+              </a:lnSpc>
+            </a:pPr>
+            <a:r>
+              <a:rPr sz="1300" b="1">
+                <a:solidFill>
+                  <a:srgbClr val="FFFFFF"/>
+                </a:solidFill>
+                <a:latin typeface="맑은 고딕"/>
+                <a:ea typeface="맑은 고딕"/>
+                <a:cs typeface="맑은 고딕"/>
+              </a:rPr>
+              <a:t>1</a:t>
+            </a:r>
+          </a:p>
+        </p:txBody>
+      </p:sp>
+      <p:sp>
+        <p:nvSpPr>
+          <p:cNvPr id="11" name="TextBox 10"/>
+          <p:cNvSpPr txBox="1"/>
+          <p:nvPr/>
+        </p:nvSpPr>
+        <p:spPr>
+          <a:xfrm>
+            <a:off x="1234440" y="2514600"/>
+            <a:ext cx="10225735" cy="914400"/>
+          </a:xfrm>
+          <a:prstGeom prst="rect">
+            <a:avLst/>
+          </a:prstGeom>
+          <a:noFill/>
+        </p:spPr>
+        <p:txBody>
+          <a:bodyPr wrap="square" anchor="ctr"/>
+          <a:lstStyle/>
+          <a:p>
+            <a:pPr algn="l" eaLnBrk="0">
+              <a:lnSpc>
+                <a:spcPct val="110000"/>
+              </a:lnSpc>
+            </a:pPr>
+            <a:r>
+              <a:rPr sz="1550" b="1">
+                <a:solidFill>
+                  <a:srgbClr val="1F2A3A"/>
+                </a:solidFill>
+                <a:latin typeface="맑은 고딕"/>
+                <a:ea typeface="맑은 고딕"/>
+                <a:cs typeface="맑은 고딕"/>
+              </a:rPr>
+              <a:t>재고가 0개라고 적는다</a:t>
+            </a:r>
+          </a:p>
+        </p:txBody>
+      </p:sp>
+      <p:sp>
+        <p:nvSpPr>
+          <p:cNvPr id="12" name="Rounded Rectangle 11"/>
+          <p:cNvSpPr/>
+          <p:nvPr/>
+        </p:nvSpPr>
+        <p:spPr>
+          <a:xfrm>
+            <a:off x="548640" y="3474720"/>
+            <a:ext cx="11094415" cy="822960"/>
+          </a:xfrm>
+          <a:prstGeom prst="roundRect">
+            <a:avLst>
+              <a:gd name="adj" fmla="val 8000"/>
+            </a:avLst>
+          </a:prstGeom>
+          <a:solidFill>
+            <a:srgbClr val="F3F6F9"/>
+          </a:solidFill>
+          <a:ln>
+            <a:noFill/>
+          </a:ln>
+        </p:spPr>
+        <p:txBody>
+          <a:bodyPr rtlCol="0" anchor="ctr"/>
+          <a:lstStyle/>
+          <a:p>
+            <a:pPr algn="ctr"/>
+          </a:p>
+        </p:txBody>
+      </p:sp>
+      <p:sp>
+        <p:nvSpPr>
+          <p:cNvPr id="13" name="Oval 12"/>
+          <p:cNvSpPr/>
+          <p:nvPr/>
+        </p:nvSpPr>
+        <p:spPr>
+          <a:xfrm>
+            <a:off x="731520" y="3703320"/>
+            <a:ext cx="365760" cy="365760"/>
+          </a:xfrm>
+          <a:prstGeom prst="ellipse">
+            <a:avLst/>
+          </a:prstGeom>
+          <a:solidFill>
+            <a:srgbClr val="13294B"/>
+          </a:solidFill>
+          <a:ln>
+            <a:noFill/>
+          </a:ln>
+        </p:spPr>
+        <p:txBody>
+          <a:bodyPr rtlCol="0" anchor="ctr"/>
+          <a:lstStyle/>
+          <a:p>
+            <a:pPr algn="ctr"/>
+          </a:p>
+        </p:txBody>
+      </p:sp>
+      <p:sp>
+        <p:nvSpPr>
+          <p:cNvPr id="14" name="TextBox 13"/>
+          <p:cNvSpPr txBox="1"/>
+          <p:nvPr/>
+        </p:nvSpPr>
+        <p:spPr>
+          <a:xfrm>
+            <a:off x="731520" y="3703320"/>
+            <a:ext cx="365760" cy="365760"/>
+          </a:xfrm>
+          <a:prstGeom prst="rect">
+            <a:avLst/>
+          </a:prstGeom>
+          <a:noFill/>
+        </p:spPr>
+        <p:txBody>
+          <a:bodyPr wrap="square" anchor="ctr"/>
+          <a:lstStyle/>
+          <a:p>
+            <a:pPr algn="ctr" eaLnBrk="0">
+              <a:lnSpc>
+                <a:spcPct val="110000"/>
+              </a:lnSpc>
+            </a:pPr>
+            <a:r>
+              <a:rPr sz="1300" b="1">
+                <a:solidFill>
+                  <a:srgbClr val="FFFFFF"/>
+                </a:solidFill>
+                <a:latin typeface="맑은 고딕"/>
+                <a:ea typeface="맑은 고딕"/>
+                <a:cs typeface="맑은 고딕"/>
+              </a:rPr>
+              <a:t>2</a:t>
+            </a:r>
+          </a:p>
+        </p:txBody>
+      </p:sp>
+      <p:sp>
+        <p:nvSpPr>
+          <p:cNvPr id="15" name="TextBox 14"/>
+          <p:cNvSpPr txBox="1"/>
+          <p:nvPr/>
+        </p:nvSpPr>
+        <p:spPr>
+          <a:xfrm>
+            <a:off x="1234440" y="3429000"/>
+            <a:ext cx="10225735" cy="914400"/>
+          </a:xfrm>
+          <a:prstGeom prst="rect">
+            <a:avLst/>
+          </a:prstGeom>
+          <a:noFill/>
+        </p:spPr>
+        <p:txBody>
+          <a:bodyPr wrap="square" anchor="ctr"/>
+          <a:lstStyle/>
+          <a:p>
+            <a:pPr algn="l" eaLnBrk="0">
+              <a:lnSpc>
+                <a:spcPct val="110000"/>
+              </a:lnSpc>
+            </a:pPr>
+            <a:r>
+              <a:rPr sz="1550" b="1">
+                <a:solidFill>
+                  <a:srgbClr val="1F2A3A"/>
+                </a:solidFill>
+                <a:latin typeface="맑은 고딕"/>
+                <a:ea typeface="맑은 고딕"/>
+                <a:cs typeface="맑은 고딕"/>
+              </a:rPr>
+              <a:t>지난 실행에서 본 재고 값을 적는다</a:t>
+            </a:r>
+          </a:p>
+        </p:txBody>
+      </p:sp>
+      <p:sp>
+        <p:nvSpPr>
+          <p:cNvPr id="16" name="Rounded Rectangle 15"/>
+          <p:cNvSpPr/>
+          <p:nvPr/>
+        </p:nvSpPr>
+        <p:spPr>
+          <a:xfrm>
+            <a:off x="548640" y="4389120"/>
+            <a:ext cx="11094415" cy="822960"/>
+          </a:xfrm>
+          <a:prstGeom prst="roundRect">
+            <a:avLst>
+              <a:gd name="adj" fmla="val 8000"/>
+            </a:avLst>
+          </a:prstGeom>
+          <a:solidFill>
+            <a:srgbClr val="F3F6F9"/>
+          </a:solidFill>
+          <a:ln>
+            <a:noFill/>
+          </a:ln>
+        </p:spPr>
+        <p:txBody>
+          <a:bodyPr rtlCol="0" anchor="ctr"/>
+          <a:lstStyle/>
+          <a:p>
+            <a:pPr algn="ctr"/>
+          </a:p>
+        </p:txBody>
+      </p:sp>
+      <p:sp>
+        <p:nvSpPr>
+          <p:cNvPr id="17" name="Oval 16"/>
+          <p:cNvSpPr/>
+          <p:nvPr/>
+        </p:nvSpPr>
+        <p:spPr>
+          <a:xfrm>
+            <a:off x="731520" y="4617720"/>
+            <a:ext cx="365760" cy="365760"/>
+          </a:xfrm>
+          <a:prstGeom prst="ellipse">
+            <a:avLst/>
+          </a:prstGeom>
+          <a:solidFill>
+            <a:srgbClr val="13294B"/>
+          </a:solidFill>
+          <a:ln>
+            <a:noFill/>
+          </a:ln>
+        </p:spPr>
+        <p:txBody>
+          <a:bodyPr rtlCol="0" anchor="ctr"/>
+          <a:lstStyle/>
+          <a:p>
+            <a:pPr algn="ctr"/>
+          </a:p>
+        </p:txBody>
+      </p:sp>
+      <p:sp>
+        <p:nvSpPr>
+          <p:cNvPr id="18" name="TextBox 17"/>
+          <p:cNvSpPr txBox="1"/>
+          <p:nvPr/>
+        </p:nvSpPr>
+        <p:spPr>
+          <a:xfrm>
+            <a:off x="731520" y="4617720"/>
+            <a:ext cx="365760" cy="365760"/>
+          </a:xfrm>
+          <a:prstGeom prst="rect">
+            <a:avLst/>
+          </a:prstGeom>
+          <a:noFill/>
+        </p:spPr>
+        <p:txBody>
+          <a:bodyPr wrap="square" anchor="ctr"/>
+          <a:lstStyle/>
+          <a:p>
+            <a:pPr algn="ctr" eaLnBrk="0">
+              <a:lnSpc>
+                <a:spcPct val="110000"/>
+              </a:lnSpc>
+            </a:pPr>
+            <a:r>
+              <a:rPr sz="1300" b="1">
+                <a:solidFill>
+                  <a:srgbClr val="FFFFFF"/>
+                </a:solidFill>
+                <a:latin typeface="맑은 고딕"/>
+                <a:ea typeface="맑은 고딕"/>
+                <a:cs typeface="맑은 고딕"/>
+              </a:rPr>
+              <a:t>3</a:t>
+            </a:r>
+          </a:p>
+        </p:txBody>
+      </p:sp>
+      <p:sp>
+        <p:nvSpPr>
+          <p:cNvPr id="19" name="TextBox 18"/>
+          <p:cNvSpPr txBox="1"/>
+          <p:nvPr/>
+        </p:nvSpPr>
+        <p:spPr>
+          <a:xfrm>
+            <a:off x="1234440" y="4343400"/>
+            <a:ext cx="10225735" cy="914400"/>
+          </a:xfrm>
+          <a:prstGeom prst="rect">
+            <a:avLst/>
+          </a:prstGeom>
+          <a:noFill/>
+        </p:spPr>
+        <p:txBody>
+          <a:bodyPr wrap="square" anchor="ctr"/>
+          <a:lstStyle/>
+          <a:p>
+            <a:pPr algn="l" eaLnBrk="0">
+              <a:lnSpc>
+                <a:spcPct val="110000"/>
+              </a:lnSpc>
+            </a:pPr>
+            <a:r>
+              <a:rPr sz="1550" b="1">
+                <a:solidFill>
+                  <a:srgbClr val="1F2A3A"/>
+                </a:solidFill>
+                <a:latin typeface="맑은 고딕"/>
+                <a:ea typeface="맑은 고딕"/>
+                <a:cs typeface="맑은 고딕"/>
+              </a:rPr>
+              <a:t>재고 항목을 결과에서 지운다</a:t>
+            </a:r>
+          </a:p>
+        </p:txBody>
+      </p:sp>
+      <p:sp>
+        <p:nvSpPr>
+          <p:cNvPr id="20" name="Rounded Rectangle 19"/>
+          <p:cNvSpPr/>
+          <p:nvPr/>
+        </p:nvSpPr>
+        <p:spPr>
+          <a:xfrm>
+            <a:off x="548640" y="5303520"/>
+            <a:ext cx="11094415" cy="822960"/>
+          </a:xfrm>
+          <a:prstGeom prst="roundRect">
+            <a:avLst>
+              <a:gd name="adj" fmla="val 8000"/>
+            </a:avLst>
+          </a:prstGeom>
+          <a:solidFill>
+            <a:srgbClr val="F3F6F9"/>
+          </a:solidFill>
+          <a:ln>
+            <a:noFill/>
+          </a:ln>
+        </p:spPr>
+        <p:txBody>
+          <a:bodyPr rtlCol="0" anchor="ctr"/>
+          <a:lstStyle/>
+          <a:p>
+            <a:pPr algn="ctr"/>
+          </a:p>
+        </p:txBody>
+      </p:sp>
+      <p:sp>
+        <p:nvSpPr>
+          <p:cNvPr id="21" name="Oval 20"/>
+          <p:cNvSpPr/>
+          <p:nvPr/>
+        </p:nvSpPr>
+        <p:spPr>
+          <a:xfrm>
+            <a:off x="731520" y="5532120"/>
+            <a:ext cx="365760" cy="365760"/>
+          </a:xfrm>
+          <a:prstGeom prst="ellipse">
+            <a:avLst/>
+          </a:prstGeom>
+          <a:solidFill>
+            <a:srgbClr val="13294B"/>
+          </a:solidFill>
+          <a:ln>
+            <a:noFill/>
+          </a:ln>
+        </p:spPr>
+        <p:txBody>
+          <a:bodyPr rtlCol="0" anchor="ctr"/>
+          <a:lstStyle/>
+          <a:p>
+            <a:pPr algn="ctr"/>
+          </a:p>
+        </p:txBody>
+      </p:sp>
+      <p:sp>
+        <p:nvSpPr>
+          <p:cNvPr id="22" name="TextBox 21"/>
+          <p:cNvSpPr txBox="1"/>
+          <p:nvPr/>
+        </p:nvSpPr>
+        <p:spPr>
+          <a:xfrm>
+            <a:off x="731520" y="5532120"/>
+            <a:ext cx="365760" cy="365760"/>
+          </a:xfrm>
+          <a:prstGeom prst="rect">
+            <a:avLst/>
+          </a:prstGeom>
+          <a:noFill/>
+        </p:spPr>
+        <p:txBody>
+          <a:bodyPr wrap="square" anchor="ctr"/>
+          <a:lstStyle/>
+          <a:p>
+            <a:pPr algn="ctr" eaLnBrk="0">
+              <a:lnSpc>
+                <a:spcPct val="110000"/>
+              </a:lnSpc>
+            </a:pPr>
+            <a:r>
+              <a:rPr sz="1300" b="1">
+                <a:solidFill>
+                  <a:srgbClr val="FFFFFF"/>
+                </a:solidFill>
+                <a:latin typeface="맑은 고딕"/>
+                <a:ea typeface="맑은 고딕"/>
+                <a:cs typeface="맑은 고딕"/>
+              </a:rPr>
+              <a:t>4</a:t>
+            </a:r>
+          </a:p>
+        </p:txBody>
+      </p:sp>
+      <p:sp>
+        <p:nvSpPr>
+          <p:cNvPr id="23" name="TextBox 22"/>
+          <p:cNvSpPr txBox="1"/>
+          <p:nvPr/>
+        </p:nvSpPr>
+        <p:spPr>
+          <a:xfrm>
+            <a:off x="1234440" y="5257800"/>
+            <a:ext cx="10225735" cy="914400"/>
+          </a:xfrm>
+          <a:prstGeom prst="rect">
+            <a:avLst/>
+          </a:prstGeom>
+          <a:noFill/>
+        </p:spPr>
+        <p:txBody>
+          <a:bodyPr wrap="square" anchor="ctr"/>
+          <a:lstStyle/>
+          <a:p>
+            <a:pPr algn="l" eaLnBrk="0">
+              <a:lnSpc>
+                <a:spcPct val="110000"/>
+              </a:lnSpc>
+            </a:pPr>
+            <a:r>
+              <a:rPr sz="1550" b="1">
+                <a:solidFill>
+                  <a:srgbClr val="1F2A3A"/>
+                </a:solidFill>
+                <a:latin typeface="맑은 고딕"/>
+                <a:ea typeface="맑은 고딕"/>
+                <a:cs typeface="맑은 고딕"/>
+              </a:rPr>
+              <a:t>조회에 실패해 재고를 확인하지 못했다고 적는다</a:t>
+            </a:r>
+          </a:p>
+        </p:txBody>
+      </p:sp>
+    </p:spTree>
+  </p:cSld>
+  <p:clrMapOvr>
+    <a:masterClrMapping/>
+  </p:clrMapOvr>
+</p:sld>
+</file>
+
+<file path=ppt/slides/slide33.xml><?xml version="1.0" encoding="utf-8"?>
+<p:sld xmlns:a="http://schemas.openxmlformats.org/drawingml/2006/main" xmlns:p="http://schemas.openxmlformats.org/presentationml/2006/main" xmlns:r="http://schemas.openxmlformats.org/officeDocument/2006/relationships">
+  <p:cSld>
+    <p:bg>
+      <p:bgPr>
+        <a:solidFill>
+          <a:srgbClr val="FFFFFF"/>
+        </a:solidFill>
+        <a:effectLst/>
+      </p:bgPr>
+    </p:bg>
+    <p:spTree>
+      <p:nvGrpSpPr>
+        <p:cNvPr id="1" name=""/>
+        <p:cNvGrpSpPr/>
+        <p:nvPr/>
+      </p:nvGrpSpPr>
+      <p:grpSpPr/>
+      <p:sp>
+        <p:nvSpPr>
+          <p:cNvPr id="2" name="TextBox 1"/>
+          <p:cNvSpPr txBox="1"/>
+          <p:nvPr/>
+        </p:nvSpPr>
+        <p:spPr>
+          <a:xfrm>
+            <a:off x="457200" y="329184"/>
+            <a:ext cx="11277295" cy="603504"/>
+          </a:xfrm>
+          <a:prstGeom prst="rect">
+            <a:avLst/>
+          </a:prstGeom>
+          <a:noFill/>
+        </p:spPr>
+        <p:txBody>
+          <a:bodyPr wrap="square" anchor="ctr"/>
+          <a:lstStyle/>
+          <a:p>
+            <a:pPr algn="l" eaLnBrk="0">
+              <a:lnSpc>
+                <a:spcPct val="110000"/>
+              </a:lnSpc>
+            </a:pPr>
+            <a:r>
+              <a:rPr sz="2800" b="1">
+                <a:solidFill>
+                  <a:srgbClr val="13294B"/>
+                </a:solidFill>
+                <a:latin typeface="맑은 고딕"/>
+                <a:ea typeface="맑은 고딕"/>
+                <a:cs typeface="맑은 고딕"/>
+              </a:rPr>
+              <a:t>Quiz 3. 정비 에이전트에 붙일 서버</a:t>
+            </a:r>
+          </a:p>
+        </p:txBody>
+      </p:sp>
+      <p:sp>
+        <p:nvSpPr>
+          <p:cNvPr id="3" name="TextBox 2"/>
+          <p:cNvSpPr txBox="1"/>
+          <p:nvPr/>
+        </p:nvSpPr>
+        <p:spPr>
+          <a:xfrm>
+            <a:off x="457200" y="932688"/>
+            <a:ext cx="11277295" cy="420624"/>
+          </a:xfrm>
+          <a:prstGeom prst="rect">
+            <a:avLst/>
+          </a:prstGeom>
+          <a:noFill/>
+        </p:spPr>
+        <p:txBody>
+          <a:bodyPr wrap="square" anchor="ctr"/>
+          <a:lstStyle/>
+          <a:p>
+            <a:pPr algn="l" eaLnBrk="0">
+              <a:lnSpc>
+                <a:spcPct val="110000"/>
+              </a:lnSpc>
+            </a:pPr>
+            <a:r>
+              <a:rPr sz="1600" b="0">
+                <a:solidFill>
+                  <a:srgbClr val="556175"/>
+                </a:solidFill>
+                <a:latin typeface="맑은 고딕"/>
+                <a:ea typeface="맑은 고딕"/>
+                <a:cs typeface="맑은 고딕"/>
+              </a:rPr>
+              <a:t>정비 계획 에이전트에 enterprise-purchase를 붙이자는 제안이 나왔지만, 그 일에는 견적이 쓰이지 않는다.</a:t>
+            </a:r>
+          </a:p>
+        </p:txBody>
+      </p:sp>
+      <p:sp>
+        <p:nvSpPr>
+          <p:cNvPr id="4" name="Rectangle 3"/>
+          <p:cNvSpPr/>
+          <p:nvPr/>
+        </p:nvSpPr>
+        <p:spPr>
+          <a:xfrm>
+            <a:off x="548640" y="1408176"/>
+            <a:ext cx="11094415" cy="18288"/>
+          </a:xfrm>
+          <a:prstGeom prst="rect">
+            <a:avLst/>
+          </a:prstGeom>
+          <a:solidFill>
+            <a:srgbClr val="D3D9E1"/>
+          </a:solidFill>
+          <a:ln>
+            <a:noFill/>
+          </a:ln>
+        </p:spPr>
+        <p:txBody>
+          <a:bodyPr rtlCol="0" anchor="ctr"/>
+          <a:lstStyle/>
+          <a:p>
+            <a:pPr algn="ctr"/>
+          </a:p>
+        </p:txBody>
+      </p:sp>
+      <p:sp>
+        <p:nvSpPr>
+          <p:cNvPr id="5" name="TextBox 4"/>
+          <p:cNvSpPr txBox="1"/>
+          <p:nvPr/>
+        </p:nvSpPr>
+        <p:spPr>
+          <a:xfrm>
+            <a:off x="10911535" y="6473952"/>
+            <a:ext cx="822960" cy="274320"/>
+          </a:xfrm>
+          <a:prstGeom prst="rect">
+            <a:avLst/>
+          </a:prstGeom>
+          <a:noFill/>
+        </p:spPr>
+        <p:txBody>
+          <a:bodyPr wrap="square" anchor="t"/>
+          <a:lstStyle/>
+          <a:p>
+            <a:pPr algn="r" eaLnBrk="0">
+              <a:lnSpc>
+                <a:spcPct val="110000"/>
+              </a:lnSpc>
+            </a:pPr>
+            <a:r>
+              <a:rPr sz="1000" b="0">
+                <a:solidFill>
+                  <a:srgbClr val="556175"/>
+                </a:solidFill>
+                <a:latin typeface="맑은 고딕"/>
+                <a:ea typeface="맑은 고딕"/>
+                <a:cs typeface="맑은 고딕"/>
+              </a:rPr>
+              <a:t>33</a:t>
+            </a:r>
+          </a:p>
+        </p:txBody>
+      </p:sp>
+      <p:sp>
+        <p:nvSpPr>
+          <p:cNvPr id="6" name="Rounded Rectangle 5"/>
+          <p:cNvSpPr/>
+          <p:nvPr/>
+        </p:nvSpPr>
+        <p:spPr>
+          <a:xfrm>
+            <a:off x="548640" y="1627632"/>
+            <a:ext cx="11094415" cy="704088"/>
+          </a:xfrm>
+          <a:prstGeom prst="roundRect">
+            <a:avLst>
+              <a:gd name="adj" fmla="val 5000"/>
+            </a:avLst>
+          </a:prstGeom>
+          <a:solidFill>
+            <a:srgbClr val="E7F3FD"/>
+          </a:solidFill>
+          <a:ln>
+            <a:noFill/>
+          </a:ln>
+        </p:spPr>
+        <p:txBody>
+          <a:bodyPr rtlCol="0" anchor="ctr"/>
+          <a:lstStyle/>
+          <a:p>
+            <a:pPr algn="ctr"/>
+          </a:p>
+        </p:txBody>
+      </p:sp>
+      <p:sp>
+        <p:nvSpPr>
+          <p:cNvPr id="7" name="TextBox 6"/>
+          <p:cNvSpPr txBox="1"/>
+          <p:nvPr/>
+        </p:nvSpPr>
+        <p:spPr>
+          <a:xfrm>
+            <a:off x="777240" y="1627632"/>
+            <a:ext cx="10637215" cy="704088"/>
+          </a:xfrm>
+          <a:prstGeom prst="rect">
+            <a:avLst/>
+          </a:prstGeom>
+          <a:noFill/>
+        </p:spPr>
+        <p:txBody>
+          <a:bodyPr wrap="square" anchor="ctr"/>
+          <a:lstStyle/>
+          <a:p>
+            <a:pPr algn="l" eaLnBrk="0">
+              <a:lnSpc>
+                <a:spcPct val="110000"/>
+              </a:lnSpc>
+            </a:pPr>
+            <a:r>
+              <a:rPr sz="1900" b="1">
+                <a:solidFill>
+                  <a:srgbClr val="13294B"/>
+                </a:solidFill>
+                <a:latin typeface="맑은 고딕"/>
+                <a:ea typeface="맑은 고딕"/>
+                <a:cs typeface="맑은 고딕"/>
+              </a:rPr>
+              <a:t>최소 권한 원칙에 맞는 판단은?</a:t>
+            </a:r>
+          </a:p>
+        </p:txBody>
+      </p:sp>
+      <p:sp>
+        <p:nvSpPr>
+          <p:cNvPr id="8" name="Rounded Rectangle 7"/>
+          <p:cNvSpPr/>
+          <p:nvPr/>
+        </p:nvSpPr>
+        <p:spPr>
+          <a:xfrm>
+            <a:off x="548640" y="2560320"/>
+            <a:ext cx="11094415" cy="822960"/>
+          </a:xfrm>
+          <a:prstGeom prst="roundRect">
+            <a:avLst>
+              <a:gd name="adj" fmla="val 8000"/>
+            </a:avLst>
+          </a:prstGeom>
+          <a:solidFill>
+            <a:srgbClr val="F3F6F9"/>
+          </a:solidFill>
+          <a:ln>
+            <a:noFill/>
+          </a:ln>
+        </p:spPr>
+        <p:txBody>
+          <a:bodyPr rtlCol="0" anchor="ctr"/>
+          <a:lstStyle/>
+          <a:p>
+            <a:pPr algn="ctr"/>
+          </a:p>
+        </p:txBody>
+      </p:sp>
+      <p:sp>
+        <p:nvSpPr>
+          <p:cNvPr id="9" name="Oval 8"/>
+          <p:cNvSpPr/>
+          <p:nvPr/>
+        </p:nvSpPr>
+        <p:spPr>
+          <a:xfrm>
+            <a:off x="731520" y="2788920"/>
+            <a:ext cx="365760" cy="365760"/>
+          </a:xfrm>
+          <a:prstGeom prst="ellipse">
+            <a:avLst/>
+          </a:prstGeom>
+          <a:solidFill>
+            <a:srgbClr val="13294B"/>
+          </a:solidFill>
+          <a:ln>
+            <a:noFill/>
+          </a:ln>
+        </p:spPr>
+        <p:txBody>
+          <a:bodyPr rtlCol="0" anchor="ctr"/>
+          <a:lstStyle/>
+          <a:p>
+            <a:pPr algn="ctr"/>
+          </a:p>
+        </p:txBody>
+      </p:sp>
+      <p:sp>
+        <p:nvSpPr>
+          <p:cNvPr id="10" name="TextBox 9"/>
+          <p:cNvSpPr txBox="1"/>
+          <p:nvPr/>
+        </p:nvSpPr>
+        <p:spPr>
+          <a:xfrm>
+            <a:off x="731520" y="2788920"/>
+            <a:ext cx="365760" cy="365760"/>
+          </a:xfrm>
+          <a:prstGeom prst="rect">
+            <a:avLst/>
+          </a:prstGeom>
+          <a:noFill/>
+        </p:spPr>
+        <p:txBody>
+          <a:bodyPr wrap="square" anchor="ctr"/>
+          <a:lstStyle/>
+          <a:p>
+            <a:pPr algn="ctr" eaLnBrk="0">
+              <a:lnSpc>
+                <a:spcPct val="110000"/>
+              </a:lnSpc>
+            </a:pPr>
+            <a:r>
+              <a:rPr sz="1300" b="1">
+                <a:solidFill>
+                  <a:srgbClr val="FFFFFF"/>
+                </a:solidFill>
+                <a:latin typeface="맑은 고딕"/>
+                <a:ea typeface="맑은 고딕"/>
+                <a:cs typeface="맑은 고딕"/>
+              </a:rPr>
+              <a:t>1</a:t>
+            </a:r>
+          </a:p>
+        </p:txBody>
+      </p:sp>
+      <p:sp>
+        <p:nvSpPr>
+          <p:cNvPr id="11" name="TextBox 10"/>
+          <p:cNvSpPr txBox="1"/>
+          <p:nvPr/>
+        </p:nvSpPr>
+        <p:spPr>
+          <a:xfrm>
+            <a:off x="1234440" y="2514600"/>
+            <a:ext cx="10225735" cy="914400"/>
+          </a:xfrm>
+          <a:prstGeom prst="rect">
+            <a:avLst/>
+          </a:prstGeom>
+          <a:noFill/>
+        </p:spPr>
+        <p:txBody>
+          <a:bodyPr wrap="square" anchor="ctr"/>
+          <a:lstStyle/>
+          <a:p>
+            <a:pPr algn="l" eaLnBrk="0">
+              <a:lnSpc>
+                <a:spcPct val="110000"/>
+              </a:lnSpc>
+            </a:pPr>
+            <a:r>
+              <a:rPr sz="1550" b="1">
+                <a:solidFill>
+                  <a:srgbClr val="1F2A3A"/>
+                </a:solidFill>
+                <a:latin typeface="맑은 고딕"/>
+                <a:ea typeface="맑은 고딕"/>
+                <a:cs typeface="맑은 고딕"/>
+              </a:rPr>
+              <a:t>enterprise-purchase는 이 에이전트에 연결하지 않는다</a:t>
+            </a:r>
+          </a:p>
+        </p:txBody>
+      </p:sp>
+      <p:sp>
+        <p:nvSpPr>
+          <p:cNvPr id="12" name="Rounded Rectangle 11"/>
+          <p:cNvSpPr/>
+          <p:nvPr/>
+        </p:nvSpPr>
+        <p:spPr>
+          <a:xfrm>
+            <a:off x="548640" y="3474720"/>
+            <a:ext cx="11094415" cy="822960"/>
+          </a:xfrm>
+          <a:prstGeom prst="roundRect">
+            <a:avLst>
+              <a:gd name="adj" fmla="val 8000"/>
+            </a:avLst>
+          </a:prstGeom>
+          <a:solidFill>
+            <a:srgbClr val="F3F6F9"/>
+          </a:solidFill>
+          <a:ln>
+            <a:noFill/>
+          </a:ln>
+        </p:spPr>
+        <p:txBody>
+          <a:bodyPr rtlCol="0" anchor="ctr"/>
+          <a:lstStyle/>
+          <a:p>
+            <a:pPr algn="ctr"/>
+          </a:p>
+        </p:txBody>
+      </p:sp>
+      <p:sp>
+        <p:nvSpPr>
+          <p:cNvPr id="13" name="Oval 12"/>
+          <p:cNvSpPr/>
+          <p:nvPr/>
+        </p:nvSpPr>
+        <p:spPr>
+          <a:xfrm>
+            <a:off x="731520" y="3703320"/>
+            <a:ext cx="365760" cy="365760"/>
+          </a:xfrm>
+          <a:prstGeom prst="ellipse">
+            <a:avLst/>
+          </a:prstGeom>
+          <a:solidFill>
+            <a:srgbClr val="13294B"/>
+          </a:solidFill>
+          <a:ln>
+            <a:noFill/>
+          </a:ln>
+        </p:spPr>
+        <p:txBody>
+          <a:bodyPr rtlCol="0" anchor="ctr"/>
+          <a:lstStyle/>
+          <a:p>
+            <a:pPr algn="ctr"/>
+          </a:p>
+        </p:txBody>
+      </p:sp>
+      <p:sp>
+        <p:nvSpPr>
+          <p:cNvPr id="14" name="TextBox 13"/>
+          <p:cNvSpPr txBox="1"/>
+          <p:nvPr/>
+        </p:nvSpPr>
+        <p:spPr>
+          <a:xfrm>
+            <a:off x="731520" y="3703320"/>
+            <a:ext cx="365760" cy="365760"/>
+          </a:xfrm>
+          <a:prstGeom prst="rect">
+            <a:avLst/>
+          </a:prstGeom>
+          <a:noFill/>
+        </p:spPr>
+        <p:txBody>
+          <a:bodyPr wrap="square" anchor="ctr"/>
+          <a:lstStyle/>
+          <a:p>
+            <a:pPr algn="ctr" eaLnBrk="0">
+              <a:lnSpc>
+                <a:spcPct val="110000"/>
+              </a:lnSpc>
+            </a:pPr>
+            <a:r>
+              <a:rPr sz="1300" b="1">
+                <a:solidFill>
+                  <a:srgbClr val="FFFFFF"/>
+                </a:solidFill>
+                <a:latin typeface="맑은 고딕"/>
+                <a:ea typeface="맑은 고딕"/>
+                <a:cs typeface="맑은 고딕"/>
+              </a:rPr>
+              <a:t>2</a:t>
+            </a:r>
+          </a:p>
+        </p:txBody>
+      </p:sp>
+      <p:sp>
+        <p:nvSpPr>
+          <p:cNvPr id="15" name="TextBox 14"/>
+          <p:cNvSpPr txBox="1"/>
+          <p:nvPr/>
+        </p:nvSpPr>
+        <p:spPr>
+          <a:xfrm>
+            <a:off x="1234440" y="3429000"/>
+            <a:ext cx="10225735" cy="914400"/>
+          </a:xfrm>
+          <a:prstGeom prst="rect">
+            <a:avLst/>
+          </a:prstGeom>
+          <a:noFill/>
+        </p:spPr>
+        <p:txBody>
+          <a:bodyPr wrap="square" anchor="ctr"/>
+          <a:lstStyle/>
+          <a:p>
+            <a:pPr algn="l" eaLnBrk="0">
+              <a:lnSpc>
+                <a:spcPct val="110000"/>
+              </a:lnSpc>
+            </a:pPr>
+            <a:r>
+              <a:rPr sz="1550" b="1">
+                <a:solidFill>
+                  <a:srgbClr val="1F2A3A"/>
+                </a:solidFill>
+                <a:latin typeface="맑은 고딕"/>
+                <a:ea typeface="맑은 고딕"/>
+                <a:cs typeface="맑은 고딕"/>
+              </a:rPr>
+              <a:t>견적 도구는 읽기 표시가 true이므로 연결해도 된다</a:t>
+            </a:r>
+          </a:p>
+        </p:txBody>
+      </p:sp>
+      <p:sp>
+        <p:nvSpPr>
+          <p:cNvPr id="16" name="Rounded Rectangle 15"/>
+          <p:cNvSpPr/>
+          <p:nvPr/>
+        </p:nvSpPr>
+        <p:spPr>
+          <a:xfrm>
+            <a:off x="548640" y="4389120"/>
+            <a:ext cx="11094415" cy="822960"/>
+          </a:xfrm>
+          <a:prstGeom prst="roundRect">
+            <a:avLst>
+              <a:gd name="adj" fmla="val 8000"/>
+            </a:avLst>
+          </a:prstGeom>
+          <a:solidFill>
+            <a:srgbClr val="F3F6F9"/>
+          </a:solidFill>
+          <a:ln>
+            <a:noFill/>
+          </a:ln>
+        </p:spPr>
+        <p:txBody>
+          <a:bodyPr rtlCol="0" anchor="ctr"/>
+          <a:lstStyle/>
+          <a:p>
+            <a:pPr algn="ctr"/>
+          </a:p>
+        </p:txBody>
+      </p:sp>
+      <p:sp>
+        <p:nvSpPr>
+          <p:cNvPr id="17" name="Oval 16"/>
+          <p:cNvSpPr/>
+          <p:nvPr/>
+        </p:nvSpPr>
+        <p:spPr>
+          <a:xfrm>
+            <a:off x="731520" y="4617720"/>
+            <a:ext cx="365760" cy="365760"/>
+          </a:xfrm>
+          <a:prstGeom prst="ellipse">
+            <a:avLst/>
+          </a:prstGeom>
+          <a:solidFill>
+            <a:srgbClr val="13294B"/>
+          </a:solidFill>
+          <a:ln>
+            <a:noFill/>
+          </a:ln>
+        </p:spPr>
+        <p:txBody>
+          <a:bodyPr rtlCol="0" anchor="ctr"/>
+          <a:lstStyle/>
+          <a:p>
+            <a:pPr algn="ctr"/>
+          </a:p>
+        </p:txBody>
+      </p:sp>
+      <p:sp>
+        <p:nvSpPr>
+          <p:cNvPr id="18" name="TextBox 17"/>
+          <p:cNvSpPr txBox="1"/>
+          <p:nvPr/>
+        </p:nvSpPr>
+        <p:spPr>
+          <a:xfrm>
+            <a:off x="731520" y="4617720"/>
+            <a:ext cx="365760" cy="365760"/>
+          </a:xfrm>
+          <a:prstGeom prst="rect">
+            <a:avLst/>
+          </a:prstGeom>
+          <a:noFill/>
+        </p:spPr>
+        <p:txBody>
+          <a:bodyPr wrap="square" anchor="ctr"/>
+          <a:lstStyle/>
+          <a:p>
+            <a:pPr algn="ctr" eaLnBrk="0">
+              <a:lnSpc>
+                <a:spcPct val="110000"/>
+              </a:lnSpc>
+            </a:pPr>
+            <a:r>
+              <a:rPr sz="1300" b="1">
+                <a:solidFill>
+                  <a:srgbClr val="FFFFFF"/>
+                </a:solidFill>
+                <a:latin typeface="맑은 고딕"/>
+                <a:ea typeface="맑은 고딕"/>
+                <a:cs typeface="맑은 고딕"/>
+              </a:rPr>
+              <a:t>3</a:t>
+            </a:r>
+          </a:p>
+        </p:txBody>
+      </p:sp>
+      <p:sp>
+        <p:nvSpPr>
+          <p:cNvPr id="19" name="TextBox 18"/>
+          <p:cNvSpPr txBox="1"/>
+          <p:nvPr/>
+        </p:nvSpPr>
+        <p:spPr>
+          <a:xfrm>
+            <a:off x="1234440" y="4343400"/>
+            <a:ext cx="10225735" cy="914400"/>
+          </a:xfrm>
+          <a:prstGeom prst="rect">
+            <a:avLst/>
+          </a:prstGeom>
+          <a:noFill/>
+        </p:spPr>
+        <p:txBody>
+          <a:bodyPr wrap="square" anchor="ctr"/>
+          <a:lstStyle/>
+          <a:p>
+            <a:pPr algn="l" eaLnBrk="0">
+              <a:lnSpc>
+                <a:spcPct val="110000"/>
+              </a:lnSpc>
+            </a:pPr>
+            <a:r>
+              <a:rPr sz="1550" b="1">
+                <a:solidFill>
+                  <a:srgbClr val="1F2A3A"/>
+                </a:solidFill>
+                <a:latin typeface="맑은 고딕"/>
+                <a:ea typeface="맑은 고딕"/>
+                <a:cs typeface="맑은 고딕"/>
+              </a:rPr>
+              <a:t>허용 목록에 별표로 올려 두고 부르지 않게 지시한다</a:t>
+            </a:r>
+          </a:p>
+        </p:txBody>
+      </p:sp>
+      <p:sp>
+        <p:nvSpPr>
+          <p:cNvPr id="20" name="Rounded Rectangle 19"/>
+          <p:cNvSpPr/>
+          <p:nvPr/>
+        </p:nvSpPr>
+        <p:spPr>
+          <a:xfrm>
+            <a:off x="548640" y="5303520"/>
+            <a:ext cx="11094415" cy="822960"/>
+          </a:xfrm>
+          <a:prstGeom prst="roundRect">
+            <a:avLst>
+              <a:gd name="adj" fmla="val 8000"/>
+            </a:avLst>
+          </a:prstGeom>
+          <a:solidFill>
+            <a:srgbClr val="F3F6F9"/>
+          </a:solidFill>
+          <a:ln>
+            <a:noFill/>
+          </a:ln>
+        </p:spPr>
+        <p:txBody>
+          <a:bodyPr rtlCol="0" anchor="ctr"/>
+          <a:lstStyle/>
+          <a:p>
+            <a:pPr algn="ctr"/>
+          </a:p>
+        </p:txBody>
+      </p:sp>
+      <p:sp>
+        <p:nvSpPr>
+          <p:cNvPr id="21" name="Oval 20"/>
+          <p:cNvSpPr/>
+          <p:nvPr/>
+        </p:nvSpPr>
+        <p:spPr>
+          <a:xfrm>
+            <a:off x="731520" y="5532120"/>
+            <a:ext cx="365760" cy="365760"/>
+          </a:xfrm>
+          <a:prstGeom prst="ellipse">
+            <a:avLst/>
+          </a:prstGeom>
+          <a:solidFill>
+            <a:srgbClr val="13294B"/>
+          </a:solidFill>
+          <a:ln>
+            <a:noFill/>
+          </a:ln>
+        </p:spPr>
+        <p:txBody>
+          <a:bodyPr rtlCol="0" anchor="ctr"/>
+          <a:lstStyle/>
+          <a:p>
+            <a:pPr algn="ctr"/>
+          </a:p>
+        </p:txBody>
+      </p:sp>
+      <p:sp>
+        <p:nvSpPr>
+          <p:cNvPr id="22" name="TextBox 21"/>
+          <p:cNvSpPr txBox="1"/>
+          <p:nvPr/>
+        </p:nvSpPr>
+        <p:spPr>
+          <a:xfrm>
+            <a:off x="731520" y="5532120"/>
+            <a:ext cx="365760" cy="365760"/>
+          </a:xfrm>
+          <a:prstGeom prst="rect">
+            <a:avLst/>
+          </a:prstGeom>
+          <a:noFill/>
+        </p:spPr>
+        <p:txBody>
+          <a:bodyPr wrap="square" anchor="ctr"/>
+          <a:lstStyle/>
+          <a:p>
+            <a:pPr algn="ctr" eaLnBrk="0">
+              <a:lnSpc>
+                <a:spcPct val="110000"/>
+              </a:lnSpc>
+            </a:pPr>
+            <a:r>
+              <a:rPr sz="1300" b="1">
+                <a:solidFill>
+                  <a:srgbClr val="FFFFFF"/>
+                </a:solidFill>
+                <a:latin typeface="맑은 고딕"/>
+                <a:ea typeface="맑은 고딕"/>
+                <a:cs typeface="맑은 고딕"/>
+              </a:rPr>
+              <a:t>4</a:t>
+            </a:r>
+          </a:p>
+        </p:txBody>
+      </p:sp>
+      <p:sp>
+        <p:nvSpPr>
+          <p:cNvPr id="23" name="TextBox 22"/>
+          <p:cNvSpPr txBox="1"/>
+          <p:nvPr/>
+        </p:nvSpPr>
+        <p:spPr>
+          <a:xfrm>
+            <a:off x="1234440" y="5257800"/>
+            <a:ext cx="10225735" cy="914400"/>
+          </a:xfrm>
+          <a:prstGeom prst="rect">
+            <a:avLst/>
+          </a:prstGeom>
+          <a:noFill/>
+        </p:spPr>
+        <p:txBody>
+          <a:bodyPr wrap="square" anchor="ctr"/>
+          <a:lstStyle/>
+          <a:p>
+            <a:pPr algn="l" eaLnBrk="0">
+              <a:lnSpc>
+                <a:spcPct val="110000"/>
+              </a:lnSpc>
+            </a:pPr>
+            <a:r>
+              <a:rPr sz="1550" b="1">
+                <a:solidFill>
+                  <a:srgbClr val="1F2A3A"/>
+                </a:solidFill>
+                <a:latin typeface="맑은 고딕"/>
+                <a:ea typeface="맑은 고딕"/>
+                <a:cs typeface="맑은 고딕"/>
+              </a:rPr>
+              <a:t>두 업무 DB 서버를 하나로 합쳐 도구를 모두 준다</a:t>
+            </a:r>
+          </a:p>
+        </p:txBody>
+      </p:sp>
+    </p:spTree>
+  </p:cSld>
+  <p:clrMapOvr>
+    <a:masterClrMapping/>
+  </p:clrMapOvr>
+</p:sld>
+</file>
+
+<file path=ppt/slides/slide34.xml><?xml version="1.0" encoding="utf-8"?>
+<p:sld xmlns:a="http://schemas.openxmlformats.org/drawingml/2006/main" xmlns:p="http://schemas.openxmlformats.org/presentationml/2006/main" xmlns:r="http://schemas.openxmlformats.org/officeDocument/2006/relationships">
+  <p:cSld>
+    <p:bg>
+      <p:bgPr>
+        <a:solidFill>
+          <a:srgbClr val="FFFFFF"/>
+        </a:solidFill>
+        <a:effectLst/>
+      </p:bgPr>
+    </p:bg>
+    <p:spTree>
+      <p:nvGrpSpPr>
+        <p:cNvPr id="1" name=""/>
+        <p:cNvGrpSpPr/>
+        <p:nvPr/>
+      </p:nvGrpSpPr>
+      <p:grpSpPr/>
+      <p:sp>
+        <p:nvSpPr>
+          <p:cNvPr id="2" name="TextBox 1"/>
+          <p:cNvSpPr txBox="1"/>
+          <p:nvPr/>
+        </p:nvSpPr>
+        <p:spPr>
+          <a:xfrm>
+            <a:off x="457200" y="329184"/>
+            <a:ext cx="11277295" cy="603504"/>
+          </a:xfrm>
+          <a:prstGeom prst="rect">
+            <a:avLst/>
+          </a:prstGeom>
+          <a:noFill/>
+        </p:spPr>
+        <p:txBody>
+          <a:bodyPr wrap="square" anchor="ctr"/>
+          <a:lstStyle/>
+          <a:p>
+            <a:pPr algn="l" eaLnBrk="0">
+              <a:lnSpc>
+                <a:spcPct val="110000"/>
+              </a:lnSpc>
+            </a:pPr>
+            <a:r>
+              <a:rPr sz="2800" b="1">
+                <a:solidFill>
+                  <a:srgbClr val="13294B"/>
+                </a:solidFill>
+                <a:latin typeface="맑은 고딕"/>
+                <a:ea typeface="맑은 고딕"/>
+                <a:cs typeface="맑은 고딕"/>
+              </a:rPr>
+              <a:t>정답과 판단 기준</a:t>
+            </a:r>
+          </a:p>
+        </p:txBody>
+      </p:sp>
+      <p:sp>
+        <p:nvSpPr>
+          <p:cNvPr id="3" name="TextBox 2"/>
+          <p:cNvSpPr txBox="1"/>
+          <p:nvPr/>
+        </p:nvSpPr>
+        <p:spPr>
+          <a:xfrm>
+            <a:off x="457200" y="932688"/>
+            <a:ext cx="11277295" cy="420624"/>
+          </a:xfrm>
+          <a:prstGeom prst="rect">
+            <a:avLst/>
+          </a:prstGeom>
+          <a:noFill/>
+        </p:spPr>
+        <p:txBody>
+          <a:bodyPr wrap="square" anchor="ctr"/>
+          <a:lstStyle/>
+          <a:p>
+            <a:pPr algn="l" eaLnBrk="0">
+              <a:lnSpc>
+                <a:spcPct val="110000"/>
+              </a:lnSpc>
+            </a:pPr>
+            <a:r>
+              <a:rPr sz="1600" b="0">
+                <a:solidFill>
+                  <a:srgbClr val="556175"/>
+                </a:solidFill>
+                <a:latin typeface="맑은 고딕"/>
+                <a:ea typeface="맑은 고딕"/>
+                <a:cs typeface="맑은 고딕"/>
+              </a:rPr>
+              <a:t>세 문항은 스킬과 도구의 역할, 응답이 알려 준 범위, 맡은 일에 맞춘 권한의 경계를 올바로 판단하는지를 확인한다.</a:t>
+            </a:r>
+          </a:p>
+        </p:txBody>
+      </p:sp>
+      <p:sp>
+        <p:nvSpPr>
+          <p:cNvPr id="4" name="Rectangle 3"/>
+          <p:cNvSpPr/>
+          <p:nvPr/>
+        </p:nvSpPr>
+        <p:spPr>
+          <a:xfrm>
+            <a:off x="548640" y="1408176"/>
+            <a:ext cx="11094415" cy="18288"/>
+          </a:xfrm>
+          <a:prstGeom prst="rect">
+            <a:avLst/>
+          </a:prstGeom>
+          <a:solidFill>
+            <a:srgbClr val="D3D9E1"/>
+          </a:solidFill>
+          <a:ln>
+            <a:noFill/>
+          </a:ln>
+        </p:spPr>
+        <p:txBody>
+          <a:bodyPr rtlCol="0" anchor="ctr"/>
+          <a:lstStyle/>
+          <a:p>
+            <a:pPr algn="ctr"/>
+          </a:p>
+        </p:txBody>
+      </p:sp>
+      <p:sp>
+        <p:nvSpPr>
+          <p:cNvPr id="5" name="TextBox 4"/>
+          <p:cNvSpPr txBox="1"/>
+          <p:nvPr/>
+        </p:nvSpPr>
+        <p:spPr>
+          <a:xfrm>
+            <a:off x="10911535" y="6473952"/>
+            <a:ext cx="822960" cy="274320"/>
+          </a:xfrm>
+          <a:prstGeom prst="rect">
+            <a:avLst/>
+          </a:prstGeom>
+          <a:noFill/>
+        </p:spPr>
+        <p:txBody>
+          <a:bodyPr wrap="square" anchor="t"/>
+          <a:lstStyle/>
+          <a:p>
+            <a:pPr algn="r" eaLnBrk="0">
+              <a:lnSpc>
+                <a:spcPct val="110000"/>
+              </a:lnSpc>
+            </a:pPr>
+            <a:r>
+              <a:rPr sz="1000" b="0">
+                <a:solidFill>
+                  <a:srgbClr val="556175"/>
+                </a:solidFill>
+                <a:latin typeface="맑은 고딕"/>
+                <a:ea typeface="맑은 고딕"/>
+                <a:cs typeface="맑은 고딕"/>
+              </a:rPr>
+              <a:t>34</a:t>
+            </a:r>
+          </a:p>
+        </p:txBody>
+      </p:sp>
+      <p:sp>
+        <p:nvSpPr>
+          <p:cNvPr id="6" name="Rounded Rectangle 5"/>
+          <p:cNvSpPr/>
+          <p:nvPr/>
+        </p:nvSpPr>
+        <p:spPr>
+          <a:xfrm>
+            <a:off x="548640" y="2418587"/>
+            <a:ext cx="11094415" cy="347472"/>
+          </a:xfrm>
+          <a:prstGeom prst="roundRect">
+            <a:avLst>
+              <a:gd name="adj" fmla="val 12000"/>
+            </a:avLst>
+          </a:prstGeom>
+          <a:solidFill>
+            <a:srgbClr val="13294B"/>
+          </a:solidFill>
+          <a:ln>
+            <a:noFill/>
+          </a:ln>
+        </p:spPr>
+        <p:txBody>
+          <a:bodyPr rtlCol="0" anchor="ctr"/>
+          <a:lstStyle/>
+          <a:p>
+            <a:pPr algn="ctr"/>
+          </a:p>
+        </p:txBody>
+      </p:sp>
+      <p:sp>
+        <p:nvSpPr>
+          <p:cNvPr id="7" name="TextBox 6"/>
+          <p:cNvSpPr txBox="1"/>
+          <p:nvPr/>
+        </p:nvSpPr>
+        <p:spPr>
+          <a:xfrm>
+            <a:off x="685800" y="2418587"/>
+            <a:ext cx="2514600" cy="347472"/>
+          </a:xfrm>
+          <a:prstGeom prst="rect">
+            <a:avLst/>
+          </a:prstGeom>
+          <a:noFill/>
+        </p:spPr>
+        <p:txBody>
+          <a:bodyPr wrap="square" anchor="ctr"/>
+          <a:lstStyle/>
+          <a:p>
+            <a:pPr algn="l" eaLnBrk="0">
+              <a:lnSpc>
+                <a:spcPct val="110000"/>
+              </a:lnSpc>
+            </a:pPr>
+            <a:r>
+              <a:rPr sz="1300" b="1">
+                <a:solidFill>
+                  <a:srgbClr val="FFFFFF"/>
+                </a:solidFill>
+                <a:latin typeface="맑은 고딕"/>
+                <a:ea typeface="맑은 고딕"/>
+                <a:cs typeface="맑은 고딕"/>
+              </a:rPr>
+              <a:t>문항</a:t>
+            </a:r>
+          </a:p>
+        </p:txBody>
+      </p:sp>
+      <p:sp>
+        <p:nvSpPr>
+          <p:cNvPr id="8" name="TextBox 7"/>
+          <p:cNvSpPr txBox="1"/>
+          <p:nvPr/>
+        </p:nvSpPr>
+        <p:spPr>
+          <a:xfrm>
+            <a:off x="3200400" y="2418587"/>
+            <a:ext cx="6248095" cy="347472"/>
+          </a:xfrm>
+          <a:prstGeom prst="rect">
+            <a:avLst/>
+          </a:prstGeom>
+          <a:noFill/>
+        </p:spPr>
+        <p:txBody>
+          <a:bodyPr wrap="square" anchor="ctr"/>
+          <a:lstStyle/>
+          <a:p>
+            <a:pPr algn="l" eaLnBrk="0">
+              <a:lnSpc>
+                <a:spcPct val="110000"/>
+              </a:lnSpc>
+            </a:pPr>
+            <a:r>
+              <a:rPr sz="1300" b="1">
+                <a:solidFill>
+                  <a:srgbClr val="FFFFFF"/>
+                </a:solidFill>
+                <a:latin typeface="맑은 고딕"/>
+                <a:ea typeface="맑은 고딕"/>
+                <a:cs typeface="맑은 고딕"/>
+              </a:rPr>
+              <a:t>판단 기준</a:t>
+            </a:r>
+          </a:p>
+        </p:txBody>
+      </p:sp>
+      <p:sp>
+        <p:nvSpPr>
+          <p:cNvPr id="9" name="TextBox 8"/>
+          <p:cNvSpPr txBox="1"/>
+          <p:nvPr/>
+        </p:nvSpPr>
+        <p:spPr>
+          <a:xfrm>
+            <a:off x="9448495" y="2418587"/>
+            <a:ext cx="2194560" cy="347472"/>
+          </a:xfrm>
+          <a:prstGeom prst="rect">
+            <a:avLst/>
+          </a:prstGeom>
+          <a:noFill/>
+        </p:spPr>
+        <p:txBody>
+          <a:bodyPr wrap="square" anchor="ctr"/>
+          <a:lstStyle/>
+          <a:p>
+            <a:pPr algn="l" eaLnBrk="0">
+              <a:lnSpc>
+                <a:spcPct val="110000"/>
+              </a:lnSpc>
+            </a:pPr>
+            <a:r>
+              <a:rPr sz="1300" b="1">
+                <a:solidFill>
+                  <a:srgbClr val="FFFFFF"/>
+                </a:solidFill>
+                <a:latin typeface="맑은 고딕"/>
+                <a:ea typeface="맑은 고딕"/>
+                <a:cs typeface="맑은 고딕"/>
+              </a:rPr>
+              <a:t>정답</a:t>
+            </a:r>
+          </a:p>
+        </p:txBody>
+      </p:sp>
+      <p:sp>
+        <p:nvSpPr>
+          <p:cNvPr id="10" name="Rounded Rectangle 9"/>
+          <p:cNvSpPr/>
+          <p:nvPr/>
+        </p:nvSpPr>
+        <p:spPr>
+          <a:xfrm>
+            <a:off x="548640" y="2852927"/>
+            <a:ext cx="11094415" cy="850392"/>
+          </a:xfrm>
+          <a:prstGeom prst="roundRect">
+            <a:avLst>
+              <a:gd name="adj" fmla="val 8000"/>
+            </a:avLst>
+          </a:prstGeom>
+          <a:solidFill>
+            <a:srgbClr val="F3F6F9"/>
+          </a:solidFill>
+          <a:ln>
+            <a:noFill/>
+          </a:ln>
+        </p:spPr>
+        <p:txBody>
+          <a:bodyPr rtlCol="0" anchor="ctr"/>
+          <a:lstStyle/>
+          <a:p>
+            <a:pPr algn="ctr"/>
+          </a:p>
+        </p:txBody>
+      </p:sp>
+      <p:sp>
+        <p:nvSpPr>
+          <p:cNvPr id="11" name="TextBox 10"/>
+          <p:cNvSpPr txBox="1"/>
+          <p:nvPr/>
+        </p:nvSpPr>
+        <p:spPr>
+          <a:xfrm>
+            <a:off x="685800" y="2820923"/>
+            <a:ext cx="2514600" cy="914400"/>
+          </a:xfrm>
+          <a:prstGeom prst="rect">
+            <a:avLst/>
+          </a:prstGeom>
+          <a:noFill/>
+        </p:spPr>
+        <p:txBody>
+          <a:bodyPr wrap="square" anchor="ctr"/>
+          <a:lstStyle/>
+          <a:p>
+            <a:pPr algn="l" eaLnBrk="0">
+              <a:lnSpc>
+                <a:spcPct val="110000"/>
+              </a:lnSpc>
+            </a:pPr>
+            <a:r>
+              <a:rPr sz="1600" b="1">
+                <a:solidFill>
+                  <a:srgbClr val="13294B"/>
+                </a:solidFill>
+                <a:latin typeface="맑은 고딕"/>
+                <a:ea typeface="맑은 고딕"/>
+                <a:cs typeface="맑은 고딕"/>
+              </a:rPr>
+              <a:t>Quiz 1</a:t>
+            </a:r>
+          </a:p>
+        </p:txBody>
+      </p:sp>
+      <p:sp>
+        <p:nvSpPr>
+          <p:cNvPr id="12" name="TextBox 11"/>
+          <p:cNvSpPr txBox="1"/>
+          <p:nvPr/>
+        </p:nvSpPr>
+        <p:spPr>
+          <a:xfrm>
+            <a:off x="3200400" y="2820923"/>
+            <a:ext cx="6156655" cy="914400"/>
+          </a:xfrm>
+          <a:prstGeom prst="rect">
+            <a:avLst/>
+          </a:prstGeom>
+          <a:noFill/>
+        </p:spPr>
+        <p:txBody>
+          <a:bodyPr wrap="square" anchor="ctr"/>
+          <a:lstStyle/>
+          <a:p>
+            <a:pPr algn="l" eaLnBrk="0">
+              <a:lnSpc>
+                <a:spcPct val="110000"/>
+              </a:lnSpc>
+            </a:pPr>
+            <a:r>
+              <a:rPr sz="1400" b="0">
+                <a:solidFill>
+                  <a:srgbClr val="1F2A3A"/>
+                </a:solidFill>
+                <a:latin typeface="맑은 고딕"/>
+                <a:ea typeface="맑은 고딕"/>
+                <a:cs typeface="맑은 고딕"/>
+              </a:rPr>
+              <a:t>스킬은 방법을 적은 글이고 실행은 서버가 한다. 서버가 연결되지 않으면 그 값을 받지 못한다.</a:t>
+            </a:r>
+          </a:p>
+        </p:txBody>
+      </p:sp>
+      <p:sp>
+        <p:nvSpPr>
+          <p:cNvPr id="13" name="TextBox 12"/>
+          <p:cNvSpPr txBox="1"/>
+          <p:nvPr/>
+        </p:nvSpPr>
+        <p:spPr>
+          <a:xfrm>
+            <a:off x="9448495" y="2820923"/>
+            <a:ext cx="2103120" cy="914400"/>
+          </a:xfrm>
+          <a:prstGeom prst="rect">
+            <a:avLst/>
+          </a:prstGeom>
+          <a:noFill/>
+        </p:spPr>
+        <p:txBody>
+          <a:bodyPr wrap="square" anchor="ctr"/>
+          <a:lstStyle/>
+          <a:p>
+            <a:pPr algn="l" eaLnBrk="0">
+              <a:lnSpc>
+                <a:spcPct val="110000"/>
+              </a:lnSpc>
+            </a:pPr>
+            <a:r>
+              <a:rPr sz="1250" b="1">
+                <a:solidFill>
+                  <a:srgbClr val="556175"/>
+                </a:solidFill>
+                <a:latin typeface="맑은 고딕"/>
+                <a:ea typeface="맑은 고딕"/>
+                <a:cs typeface="맑은 고딕"/>
+              </a:rPr>
+              <a:t>2번</a:t>
+            </a:r>
+          </a:p>
+        </p:txBody>
+      </p:sp>
+      <p:sp>
+        <p:nvSpPr>
+          <p:cNvPr id="14" name="Rounded Rectangle 13"/>
+          <p:cNvSpPr/>
+          <p:nvPr/>
+        </p:nvSpPr>
+        <p:spPr>
+          <a:xfrm>
+            <a:off x="548640" y="3767327"/>
+            <a:ext cx="11094415" cy="850392"/>
+          </a:xfrm>
+          <a:prstGeom prst="roundRect">
+            <a:avLst>
+              <a:gd name="adj" fmla="val 8000"/>
+            </a:avLst>
+          </a:prstGeom>
+          <a:solidFill>
+            <a:srgbClr val="F3F6F9"/>
+          </a:solidFill>
+          <a:ln>
+            <a:noFill/>
+          </a:ln>
+        </p:spPr>
+        <p:txBody>
+          <a:bodyPr rtlCol="0" anchor="ctr"/>
+          <a:lstStyle/>
+          <a:p>
+            <a:pPr algn="ctr"/>
+          </a:p>
+        </p:txBody>
+      </p:sp>
+      <p:sp>
+        <p:nvSpPr>
+          <p:cNvPr id="15" name="TextBox 14"/>
+          <p:cNvSpPr txBox="1"/>
+          <p:nvPr/>
+        </p:nvSpPr>
+        <p:spPr>
+          <a:xfrm>
+            <a:off x="685800" y="3735323"/>
+            <a:ext cx="2514600" cy="914400"/>
+          </a:xfrm>
+          <a:prstGeom prst="rect">
+            <a:avLst/>
+          </a:prstGeom>
+          <a:noFill/>
+        </p:spPr>
+        <p:txBody>
+          <a:bodyPr wrap="square" anchor="ctr"/>
+          <a:lstStyle/>
+          <a:p>
+            <a:pPr algn="l" eaLnBrk="0">
+              <a:lnSpc>
+                <a:spcPct val="110000"/>
+              </a:lnSpc>
+            </a:pPr>
+            <a:r>
+              <a:rPr sz="1600" b="1">
+                <a:solidFill>
+                  <a:srgbClr val="13294B"/>
+                </a:solidFill>
+                <a:latin typeface="맑은 고딕"/>
+                <a:ea typeface="맑은 고딕"/>
+                <a:cs typeface="맑은 고딕"/>
+              </a:rPr>
+              <a:t>Quiz 2</a:t>
+            </a:r>
+          </a:p>
+        </p:txBody>
+      </p:sp>
+      <p:sp>
+        <p:nvSpPr>
+          <p:cNvPr id="16" name="TextBox 15"/>
+          <p:cNvSpPr txBox="1"/>
+          <p:nvPr/>
+        </p:nvSpPr>
+        <p:spPr>
+          <a:xfrm>
+            <a:off x="3200400" y="3735323"/>
+            <a:ext cx="6156655" cy="914400"/>
+          </a:xfrm>
+          <a:prstGeom prst="rect">
+            <a:avLst/>
+          </a:prstGeom>
+          <a:noFill/>
+        </p:spPr>
+        <p:txBody>
+          <a:bodyPr wrap="square" anchor="ctr"/>
+          <a:lstStyle/>
+          <a:p>
+            <a:pPr algn="l" eaLnBrk="0">
+              <a:lnSpc>
+                <a:spcPct val="110000"/>
+              </a:lnSpc>
+            </a:pPr>
+            <a:r>
+              <a:rPr sz="1350" b="0">
+                <a:solidFill>
+                  <a:srgbClr val="1F2A3A"/>
+                </a:solidFill>
+                <a:latin typeface="맑은 고딕"/>
+                <a:ea typeface="맑은 고딕"/>
+                <a:cs typeface="맑은 고딕"/>
+              </a:rPr>
+              <a:t>실패한 조회는 값이 없다는 사실을 알려 주지 않는다. 실패는 실패로 적는다.</a:t>
+            </a:r>
+          </a:p>
+        </p:txBody>
+      </p:sp>
+      <p:sp>
+        <p:nvSpPr>
+          <p:cNvPr id="17" name="TextBox 16"/>
+          <p:cNvSpPr txBox="1"/>
+          <p:nvPr/>
+        </p:nvSpPr>
+        <p:spPr>
+          <a:xfrm>
+            <a:off x="9448495" y="3735323"/>
+            <a:ext cx="2103120" cy="914400"/>
+          </a:xfrm>
+          <a:prstGeom prst="rect">
+            <a:avLst/>
+          </a:prstGeom>
+          <a:noFill/>
+        </p:spPr>
+        <p:txBody>
+          <a:bodyPr wrap="square" anchor="ctr"/>
+          <a:lstStyle/>
+          <a:p>
+            <a:pPr algn="l" eaLnBrk="0">
+              <a:lnSpc>
+                <a:spcPct val="110000"/>
+              </a:lnSpc>
+            </a:pPr>
+            <a:r>
+              <a:rPr sz="1250" b="1">
+                <a:solidFill>
+                  <a:srgbClr val="556175"/>
+                </a:solidFill>
+                <a:latin typeface="맑은 고딕"/>
+                <a:ea typeface="맑은 고딕"/>
+                <a:cs typeface="맑은 고딕"/>
+              </a:rPr>
+              <a:t>4번</a:t>
+            </a:r>
+          </a:p>
+        </p:txBody>
+      </p:sp>
+      <p:sp>
+        <p:nvSpPr>
+          <p:cNvPr id="18" name="Rounded Rectangle 17"/>
+          <p:cNvSpPr/>
+          <p:nvPr/>
+        </p:nvSpPr>
+        <p:spPr>
+          <a:xfrm>
+            <a:off x="548640" y="4681727"/>
+            <a:ext cx="11094415" cy="850392"/>
+          </a:xfrm>
+          <a:prstGeom prst="roundRect">
+            <a:avLst>
+              <a:gd name="adj" fmla="val 8000"/>
+            </a:avLst>
+          </a:prstGeom>
+          <a:solidFill>
+            <a:srgbClr val="F3F6F9"/>
+          </a:solidFill>
+          <a:ln>
+            <a:noFill/>
+          </a:ln>
+        </p:spPr>
+        <p:txBody>
+          <a:bodyPr rtlCol="0" anchor="ctr"/>
+          <a:lstStyle/>
+          <a:p>
+            <a:pPr algn="ctr"/>
+          </a:p>
+        </p:txBody>
+      </p:sp>
+      <p:sp>
+        <p:nvSpPr>
+          <p:cNvPr id="19" name="TextBox 18"/>
+          <p:cNvSpPr txBox="1"/>
+          <p:nvPr/>
+        </p:nvSpPr>
+        <p:spPr>
+          <a:xfrm>
+            <a:off x="685800" y="4649723"/>
+            <a:ext cx="2514600" cy="914400"/>
+          </a:xfrm>
+          <a:prstGeom prst="rect">
+            <a:avLst/>
+          </a:prstGeom>
+          <a:noFill/>
+        </p:spPr>
+        <p:txBody>
+          <a:bodyPr wrap="square" anchor="ctr"/>
+          <a:lstStyle/>
+          <a:p>
+            <a:pPr algn="l" eaLnBrk="0">
+              <a:lnSpc>
+                <a:spcPct val="110000"/>
+              </a:lnSpc>
+            </a:pPr>
+            <a:r>
+              <a:rPr sz="1600" b="1">
+                <a:solidFill>
+                  <a:srgbClr val="13294B"/>
+                </a:solidFill>
+                <a:latin typeface="맑은 고딕"/>
+                <a:ea typeface="맑은 고딕"/>
+                <a:cs typeface="맑은 고딕"/>
+              </a:rPr>
+              <a:t>Quiz 3</a:t>
+            </a:r>
+          </a:p>
+        </p:txBody>
+      </p:sp>
+      <p:sp>
+        <p:nvSpPr>
+          <p:cNvPr id="20" name="TextBox 19"/>
+          <p:cNvSpPr txBox="1"/>
+          <p:nvPr/>
+        </p:nvSpPr>
+        <p:spPr>
+          <a:xfrm>
+            <a:off x="3200400" y="4649723"/>
+            <a:ext cx="6156655" cy="914400"/>
+          </a:xfrm>
+          <a:prstGeom prst="rect">
+            <a:avLst/>
+          </a:prstGeom>
+          <a:noFill/>
+        </p:spPr>
+        <p:txBody>
+          <a:bodyPr wrap="square" anchor="ctr"/>
+          <a:lstStyle/>
+          <a:p>
+            <a:pPr algn="l" eaLnBrk="0">
+              <a:lnSpc>
+                <a:spcPct val="110000"/>
+              </a:lnSpc>
+            </a:pPr>
+            <a:r>
+              <a:rPr sz="1400" b="0">
+                <a:solidFill>
+                  <a:srgbClr val="1F2A3A"/>
+                </a:solidFill>
+                <a:latin typeface="맑은 고딕"/>
+                <a:ea typeface="맑은 고딕"/>
+                <a:cs typeface="맑은 고딕"/>
+              </a:rPr>
+              <a:t>맡은 일에 필요한 권한만 준다. 읽기 도구라도 그 일에 쓰이지 않으면 연결하지 않는다.</a:t>
+            </a:r>
+          </a:p>
+        </p:txBody>
+      </p:sp>
+      <p:sp>
+        <p:nvSpPr>
+          <p:cNvPr id="21" name="TextBox 20"/>
+          <p:cNvSpPr txBox="1"/>
+          <p:nvPr/>
+        </p:nvSpPr>
+        <p:spPr>
+          <a:xfrm>
+            <a:off x="9448495" y="4649723"/>
+            <a:ext cx="2103120" cy="914400"/>
+          </a:xfrm>
+          <a:prstGeom prst="rect">
+            <a:avLst/>
+          </a:prstGeom>
+          <a:noFill/>
+        </p:spPr>
+        <p:txBody>
+          <a:bodyPr wrap="square" anchor="ctr"/>
+          <a:lstStyle/>
+          <a:p>
+            <a:pPr algn="l" eaLnBrk="0">
+              <a:lnSpc>
+                <a:spcPct val="110000"/>
+              </a:lnSpc>
+            </a:pPr>
+            <a:r>
+              <a:rPr sz="1250" b="1">
+                <a:solidFill>
+                  <a:srgbClr val="556175"/>
+                </a:solidFill>
+                <a:latin typeface="맑은 고딕"/>
+                <a:ea typeface="맑은 고딕"/>
+                <a:cs typeface="맑은 고딕"/>
+              </a:rPr>
+              <a:t>1번</a:t>
+            </a:r>
+          </a:p>
+        </p:txBody>
+      </p:sp>
+    </p:spTree>
+  </p:cSld>
+  <p:clrMapOvr>
+    <a:masterClrMapping/>
+  </p:clrMapOvr>
+</p:sld>
+</file>
+
 <file path=ppt/slides/slide4.xml><?xml version="1.0" encoding="utf-8"?>
 <p:sld xmlns:a="http://schemas.openxmlformats.org/drawingml/2006/main" xmlns:p="http://schemas.openxmlformats.org/presentationml/2006/main" xmlns:r="http://schemas.openxmlformats.org/officeDocument/2006/relationships">
   <p:cSld>
@@ -28064,7 +33305,7 @@
       </p:sp>
       <p:pic>
         <p:nvPicPr>
-          <p:cNvPr id="6" name="삽화:스킬문서.svg" descr="illust_1450096010465289401_1793113376.png"/>
+          <p:cNvPr id="6" name="삽화:스킬문서.svg" descr="illust_5220910279362313373_1793113376.png"/>
           <p:cNvPicPr>
             <a:picLocks noChangeAspect="1"/>
           </p:cNvPicPr>
